--- a/deliverables/G4-WATCH_overview.pptx
+++ b/deliverables/G4-WATCH_overview.pptx
@@ -18,6 +18,8 @@
     <p:sldId id="266" r:id="rId17"/>
     <p:sldId id="267" r:id="rId18"/>
     <p:sldId id="268" r:id="rId19"/>
+    <p:sldId id="269" r:id="rId20"/>
+    <p:sldId id="270" r:id="rId21"/>
   </p:sldIdLst>
   <p:sldSz cx="12191695" cy="6858000" type="screen4x3"/>
   <p:notesSz cx="6858000" cy="9144000"/>
@@ -3467,7 +3469,7 @@
                 </a:solidFill>
                 <a:latin typeface="Calibri"/>
               </a:rPr>
-              <a:t>SO WHAT DOES IT OUTPUT TODAY?</a:t>
+              <a:t>RESULT 3</a:t>
             </a:r>
           </a:p>
         </p:txBody>
@@ -3506,7 +3508,7 @@
                 </a:solidFill>
                 <a:latin typeface="Calibri"/>
               </a:rPr>
-              <a:t>A closed gate, and the reason for it</a:t>
+              <a:t>The one locus that moved — and it moved the wrong way</a:t>
             </a:r>
           </a:p>
         </p:txBody>
@@ -3521,211 +3523,6 @@
           <a:xfrm>
             <a:off x="0" y="932688"/>
             <a:ext cx="12191695" cy="38100"/>
-          </a:xfrm>
-          <a:prstGeom prst="rect">
-            <a:avLst/>
-          </a:prstGeom>
-          <a:solidFill>
-            <a:srgbClr val="1F8A70"/>
-          </a:solidFill>
-          <a:ln>
-            <a:noFill/>
-          </a:ln>
-          <a:effectLst/>
-        </p:spPr>
-        <p:style>
-          <a:lnRef idx="1">
-            <a:schemeClr val="accent1"/>
-          </a:lnRef>
-          <a:fillRef idx="3">
-            <a:schemeClr val="accent1"/>
-          </a:fillRef>
-          <a:effectRef idx="2">
-            <a:schemeClr val="accent1"/>
-          </a:effectRef>
-          <a:fontRef idx="minor">
-            <a:schemeClr val="lt1"/>
-          </a:fontRef>
-        </p:style>
-        <p:txBody>
-          <a:bodyPr rtlCol="0" anchor="ctr"/>
-          <a:lstStyle/>
-          <a:p>
-            <a:pPr algn="ctr"/>
-          </a:p>
-        </p:txBody>
-      </p:sp>
-      <p:sp>
-        <p:nvSpPr>
-          <p:cNvPr id="6" name="TextBox 5"/>
-          <p:cNvSpPr txBox="1"/>
-          <p:nvPr/>
-        </p:nvSpPr>
-        <p:spPr>
-          <a:xfrm>
-            <a:off x="502920" y="1298448"/>
-            <a:ext cx="11155680" cy="457200"/>
-          </a:xfrm>
-          <a:prstGeom prst="rect">
-            <a:avLst/>
-          </a:prstGeom>
-          <a:noFill/>
-        </p:spPr>
-        <p:txBody>
-          <a:bodyPr wrap="square" anchor="t" lIns="0" rIns="0" tIns="0" bIns="0">
-            <a:spAutoFit/>
-          </a:bodyPr>
-          <a:lstStyle/>
-          <a:p>
-            <a:pPr algn="l">
-              <a:lnSpc>
-                <a:spcPct val="100000"/>
-              </a:lnSpc>
-            </a:pPr>
-            <a:r>
-              <a:rPr sz="1500" b="0" i="0">
-                <a:solidFill>
-                  <a:srgbClr val="222A30"/>
-                </a:solidFill>
-                <a:latin typeface="Calibri"/>
-              </a:rPr>
-              <a:t>Across all eleven pathogens, the testing ledger currently holds no SUPPORTED D.H1 verdict. So:</a:t>
-            </a:r>
-          </a:p>
-        </p:txBody>
-      </p:sp>
-      <p:sp>
-        <p:nvSpPr>
-          <p:cNvPr id="7" name="Rectangle 6"/>
-          <p:cNvSpPr/>
-          <p:nvPr/>
-        </p:nvSpPr>
-        <p:spPr>
-          <a:xfrm>
-            <a:off x="502920" y="1783080"/>
-            <a:ext cx="50800" cy="566928"/>
-          </a:xfrm>
-          <a:prstGeom prst="rect">
-            <a:avLst/>
-          </a:prstGeom>
-          <a:solidFill>
-            <a:srgbClr val="1F8A70"/>
-          </a:solidFill>
-          <a:ln>
-            <a:noFill/>
-          </a:ln>
-          <a:effectLst/>
-        </p:spPr>
-        <p:style>
-          <a:lnRef idx="1">
-            <a:schemeClr val="accent1"/>
-          </a:lnRef>
-          <a:fillRef idx="3">
-            <a:schemeClr val="accent1"/>
-          </a:fillRef>
-          <a:effectRef idx="2">
-            <a:schemeClr val="accent1"/>
-          </a:effectRef>
-          <a:fontRef idx="minor">
-            <a:schemeClr val="lt1"/>
-          </a:fontRef>
-        </p:style>
-        <p:txBody>
-          <a:bodyPr rtlCol="0" anchor="ctr"/>
-          <a:lstStyle/>
-          <a:p>
-            <a:pPr algn="ctr"/>
-          </a:p>
-        </p:txBody>
-      </p:sp>
-      <p:sp>
-        <p:nvSpPr>
-          <p:cNvPr id="8" name="TextBox 7"/>
-          <p:cNvSpPr txBox="1"/>
-          <p:nvPr/>
-        </p:nvSpPr>
-        <p:spPr>
-          <a:xfrm>
-            <a:off x="868680" y="1783080"/>
-            <a:ext cx="1920240" cy="365760"/>
-          </a:xfrm>
-          <a:prstGeom prst="rect">
-            <a:avLst/>
-          </a:prstGeom>
-          <a:noFill/>
-        </p:spPr>
-        <p:txBody>
-          <a:bodyPr wrap="square" anchor="t" lIns="0" rIns="0" tIns="0" bIns="0">
-            <a:spAutoFit/>
-          </a:bodyPr>
-          <a:lstStyle/>
-          <a:p>
-            <a:pPr algn="l">
-              <a:lnSpc>
-                <a:spcPct val="100000"/>
-              </a:lnSpc>
-            </a:pPr>
-            <a:r>
-              <a:rPr sz="1700" b="1" i="0">
-                <a:solidFill>
-                  <a:srgbClr val="1F8A70"/>
-                </a:solidFill>
-                <a:latin typeface="Calibri"/>
-              </a:rPr>
-              <a:t>Produced</a:t>
-            </a:r>
-          </a:p>
-        </p:txBody>
-      </p:sp>
-      <p:sp>
-        <p:nvSpPr>
-          <p:cNvPr id="9" name="TextBox 8"/>
-          <p:cNvSpPr txBox="1"/>
-          <p:nvPr/>
-        </p:nvSpPr>
-        <p:spPr>
-          <a:xfrm>
-            <a:off x="2880360" y="1783080"/>
-            <a:ext cx="8778240" cy="822960"/>
-          </a:xfrm>
-          <a:prstGeom prst="rect">
-            <a:avLst/>
-          </a:prstGeom>
-          <a:noFill/>
-        </p:spPr>
-        <p:txBody>
-          <a:bodyPr wrap="square" anchor="t" lIns="0" rIns="0" tIns="0" bIns="0">
-            <a:spAutoFit/>
-          </a:bodyPr>
-          <a:lstStyle/>
-          <a:p>
-            <a:pPr algn="l">
-              <a:lnSpc>
-                <a:spcPct val="130000"/>
-              </a:lnSpc>
-            </a:pPr>
-            <a:r>
-              <a:rPr sz="1350" b="0" i="0">
-                <a:solidFill>
-                  <a:srgbClr val="222A30"/>
-                </a:solidFill>
-                <a:latin typeface="Calibri"/>
-              </a:rPr>
-              <a:t>G4 Reference Atlas per pathogen · QC report · reference-anchored alignment · recombination screen · ML tree and time-scaled root · variant table · per-locus disruption rates · GC control gate · D.H1 verdict · report card · full provenance</a:t>
-            </a:r>
-          </a:p>
-        </p:txBody>
-      </p:sp>
-      <p:sp>
-        <p:nvSpPr>
-          <p:cNvPr id="10" name="Rectangle 9"/>
-          <p:cNvSpPr/>
-          <p:nvPr/>
-        </p:nvSpPr>
-        <p:spPr>
-          <a:xfrm>
-            <a:off x="502920" y="2697480"/>
-            <a:ext cx="50800" cy="566928"/>
           </a:xfrm>
           <a:prstGeom prst="rect">
             <a:avLst/>
@@ -3762,131 +3559,14 @@
       </p:sp>
       <p:sp>
         <p:nvSpPr>
-          <p:cNvPr id="11" name="TextBox 10"/>
-          <p:cNvSpPr txBox="1"/>
-          <p:nvPr/>
-        </p:nvSpPr>
-        <p:spPr>
-          <a:xfrm>
-            <a:off x="868680" y="2697480"/>
-            <a:ext cx="1920240" cy="365760"/>
-          </a:xfrm>
-          <a:prstGeom prst="rect">
-            <a:avLst/>
-          </a:prstGeom>
-          <a:noFill/>
-        </p:spPr>
-        <p:txBody>
-          <a:bodyPr wrap="square" anchor="t" lIns="0" rIns="0" tIns="0" bIns="0">
-            <a:spAutoFit/>
-          </a:bodyPr>
-          <a:lstStyle/>
-          <a:p>
-            <a:pPr algn="l">
-              <a:lnSpc>
-                <a:spcPct val="100000"/>
-              </a:lnSpc>
-            </a:pPr>
-            <a:r>
-              <a:rPr sz="1700" b="1" i="0">
-                <a:solidFill>
-                  <a:srgbClr val="C0392B"/>
-                </a:solidFill>
-                <a:latin typeface="Calibri"/>
-              </a:rPr>
-              <a:t>NOT produced</a:t>
-            </a:r>
-          </a:p>
-        </p:txBody>
-      </p:sp>
-      <p:sp>
-        <p:nvSpPr>
-          <p:cNvPr id="12" name="TextBox 11"/>
-          <p:cNvSpPr txBox="1"/>
-          <p:nvPr/>
-        </p:nvSpPr>
-        <p:spPr>
-          <a:xfrm>
-            <a:off x="2880360" y="2697480"/>
-            <a:ext cx="8778240" cy="822960"/>
-          </a:xfrm>
-          <a:prstGeom prst="rect">
-            <a:avLst/>
-          </a:prstGeom>
-          <a:noFill/>
-        </p:spPr>
-        <p:txBody>
-          <a:bodyPr wrap="square" anchor="t" lIns="0" rIns="0" tIns="0" bIns="0">
-            <a:spAutoFit/>
-          </a:bodyPr>
-          <a:lstStyle/>
-          <a:p>
-            <a:pPr algn="l">
-              <a:lnSpc>
-                <a:spcPct val="130000"/>
-              </a:lnSpc>
-            </a:pPr>
-            <a:r>
-              <a:rPr sz="1350" b="0" i="0">
-                <a:solidFill>
-                  <a:srgbClr val="222A30"/>
-                </a:solidFill>
-                <a:latin typeface="Calibri"/>
-              </a:rPr>
-              <a:t>G4-EWS surveillance score · CUSUM / EWMA control limits · detection calls · any statement that a pathogen is or is not changing at a G4 site</a:t>
-            </a:r>
-          </a:p>
-        </p:txBody>
-      </p:sp>
-      <p:sp>
-        <p:nvSpPr>
-          <p:cNvPr id="13" name="TextBox 12"/>
-          <p:cNvSpPr txBox="1"/>
-          <p:nvPr/>
-        </p:nvSpPr>
-        <p:spPr>
-          <a:xfrm>
-            <a:off x="502920" y="3703320"/>
-            <a:ext cx="11155680" cy="320040"/>
-          </a:xfrm>
-          <a:prstGeom prst="rect">
-            <a:avLst/>
-          </a:prstGeom>
-          <a:noFill/>
-        </p:spPr>
-        <p:txBody>
-          <a:bodyPr wrap="square" anchor="t" lIns="0" rIns="0" tIns="0" bIns="0">
-            <a:spAutoFit/>
-          </a:bodyPr>
-          <a:lstStyle/>
-          <a:p>
-            <a:pPr algn="l">
-              <a:lnSpc>
-                <a:spcPct val="100000"/>
-              </a:lnSpc>
-            </a:pPr>
-            <a:r>
-              <a:rPr sz="1350" b="1" i="0">
-                <a:solidFill>
-                  <a:srgbClr val="1B3A5C"/>
-                </a:solidFill>
-                <a:latin typeface="Calibri"/>
-              </a:rPr>
-              <a:t>What the tool says when you ask it to score anyway:</a:t>
-            </a:r>
-          </a:p>
-        </p:txBody>
-      </p:sp>
-      <p:sp>
-        <p:nvSpPr>
-          <p:cNvPr id="14" name="Rectangle 13"/>
+          <p:cNvPr id="6" name="Rectangle 5"/>
           <p:cNvSpPr/>
           <p:nvPr/>
         </p:nvSpPr>
         <p:spPr>
           <a:xfrm>
-            <a:off x="502920" y="4069080"/>
-            <a:ext cx="11201400" cy="1207008"/>
+            <a:off x="502920" y="1280160"/>
+            <a:ext cx="11201400" cy="1170432"/>
           </a:xfrm>
           <a:prstGeom prst="rect">
             <a:avLst/>
@@ -3925,149 +3605,576 @@
       </p:sp>
       <p:sp>
         <p:nvSpPr>
+          <p:cNvPr id="7" name="TextBox 6"/>
+          <p:cNvSpPr txBox="1"/>
+          <p:nvPr/>
+        </p:nvSpPr>
+        <p:spPr>
+          <a:xfrm>
+            <a:off x="822960" y="1463040"/>
+            <a:ext cx="5120640" cy="457200"/>
+          </a:xfrm>
+          <a:prstGeom prst="rect">
+            <a:avLst/>
+          </a:prstGeom>
+          <a:noFill/>
+        </p:spPr>
+        <p:txBody>
+          <a:bodyPr wrap="square" anchor="t" lIns="0" rIns="0" tIns="0" bIns="0">
+            <a:spAutoFit/>
+          </a:bodyPr>
+          <a:lstStyle/>
+          <a:p>
+            <a:pPr algn="l">
+              <a:lnSpc>
+                <a:spcPct val="100000"/>
+              </a:lnSpc>
+            </a:pPr>
+            <a:r>
+              <a:rPr sz="2400" b="1" i="0">
+                <a:solidFill>
+                  <a:srgbClr val="C0392B"/>
+                </a:solidFill>
+                <a:latin typeface="Consolas"/>
+              </a:rPr>
+              <a:t>FMDV2026-G4-004</a:t>
+            </a:r>
+          </a:p>
+        </p:txBody>
+      </p:sp>
+      <p:sp>
+        <p:nvSpPr>
+          <p:cNvPr id="8" name="TextBox 7"/>
+          <p:cNvSpPr txBox="1"/>
+          <p:nvPr/>
+        </p:nvSpPr>
+        <p:spPr>
+          <a:xfrm>
+            <a:off x="822960" y="1920240"/>
+            <a:ext cx="5486400" cy="411480"/>
+          </a:xfrm>
+          <a:prstGeom prst="rect">
+            <a:avLst/>
+          </a:prstGeom>
+          <a:noFill/>
+        </p:spPr>
+        <p:txBody>
+          <a:bodyPr wrap="square" anchor="t" lIns="0" rIns="0" tIns="0" bIns="0">
+            <a:spAutoFit/>
+          </a:bodyPr>
+          <a:lstStyle/>
+          <a:p>
+            <a:pPr algn="l">
+              <a:lnSpc>
+                <a:spcPct val="100000"/>
+              </a:lnSpc>
+            </a:pPr>
+            <a:r>
+              <a:rPr sz="1350" b="0" i="0">
+                <a:solidFill>
+                  <a:srgbClr val="5A6670"/>
+                </a:solidFill>
+                <a:latin typeface="Consolas"/>
+              </a:rPr>
+              <a:t>nt 4313–4337  ·  CDS (polyprotein)  ·  RNA_G4</a:t>
+            </a:r>
+          </a:p>
+        </p:txBody>
+      </p:sp>
+      <p:sp>
+        <p:nvSpPr>
+          <p:cNvPr id="9" name="TextBox 8"/>
+          <p:cNvSpPr txBox="1"/>
+          <p:nvPr/>
+        </p:nvSpPr>
+        <p:spPr>
+          <a:xfrm>
+            <a:off x="6263640" y="1463040"/>
+            <a:ext cx="1691640" cy="566928"/>
+          </a:xfrm>
+          <a:prstGeom prst="rect">
+            <a:avLst/>
+          </a:prstGeom>
+          <a:noFill/>
+        </p:spPr>
+        <p:txBody>
+          <a:bodyPr wrap="square" anchor="t" lIns="0" rIns="0" tIns="0" bIns="0">
+            <a:spAutoFit/>
+          </a:bodyPr>
+          <a:lstStyle/>
+          <a:p>
+            <a:pPr algn="l">
+              <a:lnSpc>
+                <a:spcPct val="100000"/>
+              </a:lnSpc>
+            </a:pPr>
+            <a:r>
+              <a:rPr sz="3800" b="1" i="0">
+                <a:solidFill>
+                  <a:srgbClr val="C0392B"/>
+                </a:solidFill>
+                <a:latin typeface="Calibri"/>
+              </a:rPr>
+              <a:t>0.775</a:t>
+            </a:r>
+          </a:p>
+        </p:txBody>
+      </p:sp>
+      <p:sp>
+        <p:nvSpPr>
+          <p:cNvPr id="10" name="TextBox 9"/>
+          <p:cNvSpPr txBox="1"/>
+          <p:nvPr/>
+        </p:nvSpPr>
+        <p:spPr>
+          <a:xfrm>
+            <a:off x="6263640" y="2029968"/>
+            <a:ext cx="1691640" cy="457200"/>
+          </a:xfrm>
+          <a:prstGeom prst="rect">
+            <a:avLst/>
+          </a:prstGeom>
+          <a:noFill/>
+        </p:spPr>
+        <p:txBody>
+          <a:bodyPr wrap="square" anchor="t" lIns="0" rIns="0" tIns="0" bIns="0">
+            <a:spAutoFit/>
+          </a:bodyPr>
+          <a:lstStyle/>
+          <a:p>
+            <a:pPr algn="l">
+              <a:lnSpc>
+                <a:spcPct val="100000"/>
+              </a:lnSpc>
+            </a:pPr>
+            <a:r>
+              <a:rPr sz="1150" b="0" i="0">
+                <a:solidFill>
+                  <a:srgbClr val="5A6670"/>
+                </a:solidFill>
+                <a:latin typeface="Calibri"/>
+              </a:rPr>
+              <a:t>disruption, locus</a:t>
+            </a:r>
+          </a:p>
+        </p:txBody>
+      </p:sp>
+      <p:sp>
+        <p:nvSpPr>
+          <p:cNvPr id="11" name="TextBox 10"/>
+          <p:cNvSpPr txBox="1"/>
+          <p:nvPr/>
+        </p:nvSpPr>
+        <p:spPr>
+          <a:xfrm>
+            <a:off x="8046720" y="1463040"/>
+            <a:ext cx="1691640" cy="566928"/>
+          </a:xfrm>
+          <a:prstGeom prst="rect">
+            <a:avLst/>
+          </a:prstGeom>
+          <a:noFill/>
+        </p:spPr>
+        <p:txBody>
+          <a:bodyPr wrap="square" anchor="t" lIns="0" rIns="0" tIns="0" bIns="0">
+            <a:spAutoFit/>
+          </a:bodyPr>
+          <a:lstStyle/>
+          <a:p>
+            <a:pPr algn="l">
+              <a:lnSpc>
+                <a:spcPct val="100000"/>
+              </a:lnSpc>
+            </a:pPr>
+            <a:r>
+              <a:rPr sz="3800" b="1" i="0">
+                <a:solidFill>
+                  <a:srgbClr val="1B3A5C"/>
+                </a:solidFill>
+                <a:latin typeface="Calibri"/>
+              </a:rPr>
+              <a:t>0.288</a:t>
+            </a:r>
+          </a:p>
+        </p:txBody>
+      </p:sp>
+      <p:sp>
+        <p:nvSpPr>
+          <p:cNvPr id="12" name="TextBox 11"/>
+          <p:cNvSpPr txBox="1"/>
+          <p:nvPr/>
+        </p:nvSpPr>
+        <p:spPr>
+          <a:xfrm>
+            <a:off x="8046720" y="2029968"/>
+            <a:ext cx="1691640" cy="457200"/>
+          </a:xfrm>
+          <a:prstGeom prst="rect">
+            <a:avLst/>
+          </a:prstGeom>
+          <a:noFill/>
+        </p:spPr>
+        <p:txBody>
+          <a:bodyPr wrap="square" anchor="t" lIns="0" rIns="0" tIns="0" bIns="0">
+            <a:spAutoFit/>
+          </a:bodyPr>
+          <a:lstStyle/>
+          <a:p>
+            <a:pPr algn="l">
+              <a:lnSpc>
+                <a:spcPct val="100000"/>
+              </a:lnSpc>
+            </a:pPr>
+            <a:r>
+              <a:rPr sz="1150" b="0" i="0">
+                <a:solidFill>
+                  <a:srgbClr val="5A6670"/>
+                </a:solidFill>
+                <a:latin typeface="Calibri"/>
+              </a:rPr>
+              <a:t>disruption, controls</a:t>
+            </a:r>
+          </a:p>
+        </p:txBody>
+      </p:sp>
+      <p:sp>
+        <p:nvSpPr>
+          <p:cNvPr id="13" name="TextBox 12"/>
+          <p:cNvSpPr txBox="1"/>
+          <p:nvPr/>
+        </p:nvSpPr>
+        <p:spPr>
+          <a:xfrm>
+            <a:off x="9829800" y="1481328"/>
+            <a:ext cx="1783080" cy="502920"/>
+          </a:xfrm>
+          <a:prstGeom prst="rect">
+            <a:avLst/>
+          </a:prstGeom>
+          <a:noFill/>
+        </p:spPr>
+        <p:txBody>
+          <a:bodyPr wrap="square" anchor="t" lIns="0" rIns="0" tIns="0" bIns="0">
+            <a:spAutoFit/>
+          </a:bodyPr>
+          <a:lstStyle/>
+          <a:p>
+            <a:pPr algn="l">
+              <a:lnSpc>
+                <a:spcPct val="100000"/>
+              </a:lnSpc>
+            </a:pPr>
+            <a:r>
+              <a:rPr sz="2700" b="1" i="0">
+                <a:solidFill>
+                  <a:srgbClr val="C0392B"/>
+                </a:solidFill>
+                <a:latin typeface="Calibri"/>
+              </a:rPr>
+              <a:t>1.08e-09</a:t>
+            </a:r>
+          </a:p>
+        </p:txBody>
+      </p:sp>
+      <p:sp>
+        <p:nvSpPr>
+          <p:cNvPr id="14" name="TextBox 13"/>
+          <p:cNvSpPr txBox="1"/>
+          <p:nvPr/>
+        </p:nvSpPr>
+        <p:spPr>
+          <a:xfrm>
+            <a:off x="9829800" y="1993392"/>
+            <a:ext cx="1828800" cy="457200"/>
+          </a:xfrm>
+          <a:prstGeom prst="rect">
+            <a:avLst/>
+          </a:prstGeom>
+          <a:noFill/>
+        </p:spPr>
+        <p:txBody>
+          <a:bodyPr wrap="square" anchor="t" lIns="0" rIns="0" tIns="0" bIns="0">
+            <a:spAutoFit/>
+          </a:bodyPr>
+          <a:lstStyle/>
+          <a:p>
+            <a:pPr algn="l">
+              <a:lnSpc>
+                <a:spcPct val="100000"/>
+              </a:lnSpc>
+            </a:pPr>
+            <a:r>
+              <a:rPr sz="1150" b="0" i="0">
+                <a:solidFill>
+                  <a:srgbClr val="5A6670"/>
+                </a:solidFill>
+                <a:latin typeface="Calibri"/>
+              </a:rPr>
+              <a:t>q, GC-adjusted + FDR</a:t>
+            </a:r>
+          </a:p>
+        </p:txBody>
+      </p:sp>
+      <p:sp>
+        <p:nvSpPr>
           <p:cNvPr id="15" name="TextBox 14"/>
           <p:cNvSpPr txBox="1"/>
           <p:nvPr/>
         </p:nvSpPr>
         <p:spPr>
           <a:xfrm>
-            <a:off x="777240" y="4224528"/>
-            <a:ext cx="10698480" cy="960120"/>
-          </a:xfrm>
-          <a:prstGeom prst="rect">
-            <a:avLst/>
-          </a:prstGeom>
-          <a:noFill/>
-        </p:spPr>
-        <p:txBody>
-          <a:bodyPr wrap="square" anchor="t" lIns="0" rIns="0" tIns="0" bIns="0">
-            <a:spAutoFit/>
-          </a:bodyPr>
-          <a:lstStyle/>
-          <a:p>
-            <a:pPr algn="l">
-              <a:lnSpc>
-                <a:spcPct val="122000"/>
+            <a:off x="502920" y="2788920"/>
+            <a:ext cx="5486400" cy="3291840"/>
+          </a:xfrm>
+          <a:prstGeom prst="rect">
+            <a:avLst/>
+          </a:prstGeom>
+          <a:noFill/>
+        </p:spPr>
+        <p:txBody>
+          <a:bodyPr wrap="square" lIns="0" rIns="0" tIns="0" bIns="0">
+            <a:spAutoFit/>
+          </a:bodyPr>
+          <a:lstStyle/>
+          <a:p>
+            <a:pPr>
+              <a:lnSpc>
+                <a:spcPct val="108000"/>
+              </a:lnSpc>
+              <a:spcAft>
+                <a:spcPts val="1500"/>
+              </a:spcAft>
+            </a:pPr>
+            <a:r>
+              <a:rPr sz="1400" b="0" i="0">
+                <a:solidFill>
+                  <a:srgbClr val="222A30"/>
+                </a:solidFill>
+                <a:latin typeface="Calibri"/>
+              </a:rPr>
+              <a:t>▪  Highly conserved: 94.86% across independent lineages — this is not a poorly aligned region.</a:t>
+            </a:r>
+          </a:p>
+          <a:p>
+            <a:pPr>
+              <a:lnSpc>
+                <a:spcPct val="108000"/>
+              </a:lnSpc>
+              <a:spcAft>
+                <a:spcPts val="1500"/>
+              </a:spcAft>
+            </a:pPr>
+            <a:r>
+              <a:rPr sz="1400" b="0" i="0">
+                <a:solidFill>
+                  <a:srgbClr val="222A30"/>
+                </a:solidFill>
+                <a:latin typeface="Calibri"/>
+              </a:rPr>
+              <a:t>▪  Not a GC artefact: flanking GC is 55.56%, and the signal STRENGTHENED when GC-matched controls were used.</a:t>
+            </a:r>
+          </a:p>
+          <a:p>
+            <a:pPr>
+              <a:lnSpc>
+                <a:spcPct val="108000"/>
+              </a:lnSpc>
+              <a:spcAft>
+                <a:spcPts val="1500"/>
+              </a:spcAft>
+            </a:pPr>
+            <a:r>
+              <a:rPr sz="1400" b="1" i="0">
+                <a:solidFill>
+                  <a:srgbClr val="1B3A5C"/>
+                </a:solidFill>
+                <a:latin typeface="Calibri"/>
+              </a:rPr>
+              <a:t>▪  Not a control artefact either. When control selection was rebuilt to stop it collapsing onto the genome's 5' end, p moved from 0.14 to 1.08e-09.</a:t>
+            </a:r>
+          </a:p>
+        </p:txBody>
+      </p:sp>
+      <p:sp>
+        <p:nvSpPr>
+          <p:cNvPr id="16" name="Rectangle 15"/>
+          <p:cNvSpPr/>
+          <p:nvPr/>
+        </p:nvSpPr>
+        <p:spPr>
+          <a:xfrm>
+            <a:off x="6309360" y="2788920"/>
+            <a:ext cx="5413248" cy="2148840"/>
+          </a:xfrm>
+          <a:prstGeom prst="rect">
+            <a:avLst/>
+          </a:prstGeom>
+          <a:solidFill>
+            <a:srgbClr val="1B3A5C"/>
+          </a:solidFill>
+          <a:ln>
+            <a:noFill/>
+          </a:ln>
+          <a:effectLst/>
+        </p:spPr>
+        <p:style>
+          <a:lnRef idx="1">
+            <a:schemeClr val="accent1"/>
+          </a:lnRef>
+          <a:fillRef idx="3">
+            <a:schemeClr val="accent1"/>
+          </a:fillRef>
+          <a:effectRef idx="2">
+            <a:schemeClr val="accent1"/>
+          </a:effectRef>
+          <a:fontRef idx="minor">
+            <a:schemeClr val="lt1"/>
+          </a:fontRef>
+        </p:style>
+        <p:txBody>
+          <a:bodyPr rtlCol="0" anchor="ctr"/>
+          <a:lstStyle/>
+          <a:p>
+            <a:pPr algn="ctr"/>
+          </a:p>
+        </p:txBody>
+      </p:sp>
+      <p:sp>
+        <p:nvSpPr>
+          <p:cNvPr id="17" name="TextBox 16"/>
+          <p:cNvSpPr txBox="1"/>
+          <p:nvPr/>
+        </p:nvSpPr>
+        <p:spPr>
+          <a:xfrm>
+            <a:off x="6583680" y="2999232"/>
+            <a:ext cx="4846320" cy="320040"/>
+          </a:xfrm>
+          <a:prstGeom prst="rect">
+            <a:avLst/>
+          </a:prstGeom>
+          <a:noFill/>
+        </p:spPr>
+        <p:txBody>
+          <a:bodyPr wrap="square" anchor="t" lIns="0" rIns="0" tIns="0" bIns="0">
+            <a:spAutoFit/>
+          </a:bodyPr>
+          <a:lstStyle/>
+          <a:p>
+            <a:pPr algn="l">
+              <a:lnSpc>
+                <a:spcPct val="100000"/>
+              </a:lnSpc>
+            </a:pPr>
+            <a:r>
+              <a:rPr sz="1150" b="1" i="0">
+                <a:solidFill>
+                  <a:srgbClr val="9FC7D8"/>
+                </a:solidFill>
+                <a:latin typeface="Calibri"/>
+              </a:rPr>
+              <a:t>THE CAVEAT THAT COMES WITH IT</a:t>
+            </a:r>
+          </a:p>
+        </p:txBody>
+      </p:sp>
+      <p:sp>
+        <p:nvSpPr>
+          <p:cNvPr id="18" name="TextBox 17"/>
+          <p:cNvSpPr txBox="1"/>
+          <p:nvPr/>
+        </p:nvSpPr>
+        <p:spPr>
+          <a:xfrm>
+            <a:off x="6583680" y="3383280"/>
+            <a:ext cx="4892040" cy="1463040"/>
+          </a:xfrm>
+          <a:prstGeom prst="rect">
+            <a:avLst/>
+          </a:prstGeom>
+          <a:noFill/>
+        </p:spPr>
+        <p:txBody>
+          <a:bodyPr wrap="square" anchor="t" lIns="0" rIns="0" tIns="0" bIns="0">
+            <a:spAutoFit/>
+          </a:bodyPr>
+          <a:lstStyle/>
+          <a:p>
+            <a:pPr algn="l">
+              <a:lnSpc>
+                <a:spcPct val="128000"/>
               </a:lnSpc>
             </a:pPr>
             <a:r>
               <a:rPr sz="1250" b="0" i="0">
                 <a:solidFill>
-                  <a:srgbClr val="1B3A5C"/>
-                </a:solidFill>
-                <a:latin typeface="Consolas"/>
-              </a:rPr>
-              <a:t>FMDV2026: Stage 5 scoring is BLOCKED — at least one locus shows a real,</a:t>
-            </a:r>
-          </a:p>
-          <a:p>
-            <a:pPr algn="l">
-              <a:lnSpc>
-                <a:spcPct val="122000"/>
-              </a:lnSpc>
-            </a:pPr>
-            <a:r>
-              <a:rPr sz="1250" b="0" i="0">
-                <a:solidFill>
-                  <a:srgbClr val="1B3A5C"/>
-                </a:solidFill>
-                <a:latin typeface="Consolas"/>
-              </a:rPr>
-              <a:t>GC-adjustment-surviving effect that runs AGAINST D.H1: it is MORE disrupted than its</a:t>
-            </a:r>
-          </a:p>
-          <a:p>
-            <a:pPr algn="l">
-              <a:lnSpc>
-                <a:spcPct val="122000"/>
-              </a:lnSpc>
-            </a:pPr>
-            <a:r>
-              <a:rPr sz="1250" b="0" i="0">
-                <a:solidFill>
-                  <a:srgbClr val="1B3A5C"/>
-                </a:solidFill>
-                <a:latin typeface="Consolas"/>
-              </a:rPr>
-              <a:t>matched control, not less. This is evidence against the hypothesis, not an absence of</a:t>
-            </a:r>
-          </a:p>
-          <a:p>
-            <a:pPr algn="l">
-              <a:lnSpc>
-                <a:spcPct val="122000"/>
-              </a:lnSpc>
-            </a:pPr>
-            <a:r>
-              <a:rPr sz="1250" b="0" i="0">
-                <a:solidFill>
-                  <a:srgbClr val="1B3A5C"/>
-                </a:solidFill>
-                <a:latin typeface="Consolas"/>
-              </a:rPr>
-              <a:t>evidence for it, and it is reported separately for that reason.</a:t>
-            </a:r>
-          </a:p>
-        </p:txBody>
-      </p:sp>
-      <p:sp>
-        <p:nvSpPr>
-          <p:cNvPr id="16" name="TextBox 15"/>
-          <p:cNvSpPr txBox="1"/>
-          <p:nvPr/>
-        </p:nvSpPr>
-        <p:spPr>
-          <a:xfrm>
-            <a:off x="502920" y="5440680"/>
-            <a:ext cx="11155680" cy="822960"/>
-          </a:xfrm>
-          <a:prstGeom prst="rect">
-            <a:avLst/>
-          </a:prstGeom>
-          <a:noFill/>
-        </p:spPr>
-        <p:txBody>
-          <a:bodyPr wrap="square" anchor="t" lIns="0" rIns="0" tIns="0" bIns="0">
-            <a:spAutoFit/>
-          </a:bodyPr>
-          <a:lstStyle/>
-          <a:p>
-            <a:pPr algn="l">
-              <a:lnSpc>
-                <a:spcPct val="132000"/>
-              </a:lnSpc>
-            </a:pPr>
-            <a:r>
-              <a:rPr sz="1350" b="0" i="0">
+                  <a:srgbClr val="FFFFFF"/>
+                </a:solidFill>
+                <a:latin typeface="Calibri"/>
+              </a:rPr>
+              <a:t>Disruption at this locus is strongly serotype-structured — Asia1 is nearly invariant (0.03) while SAT2 is completely diverged (1.00). The pathogen-level verdict pools lineages that behave very differently. Before this locus is interpreted biologically, D.H1 must be run per serotype.</a:t>
+            </a:r>
+          </a:p>
+        </p:txBody>
+      </p:sp>
+      <p:sp>
+        <p:nvSpPr>
+          <p:cNvPr id="19" name="TextBox 18"/>
+          <p:cNvSpPr txBox="1"/>
+          <p:nvPr/>
+        </p:nvSpPr>
+        <p:spPr>
+          <a:xfrm>
+            <a:off x="502920" y="5623560"/>
+            <a:ext cx="11155680" cy="685800"/>
+          </a:xfrm>
+          <a:prstGeom prst="rect">
+            <a:avLst/>
+          </a:prstGeom>
+          <a:noFill/>
+        </p:spPr>
+        <p:txBody>
+          <a:bodyPr wrap="square" anchor="t" lIns="0" rIns="0" tIns="0" bIns="0">
+            <a:spAutoFit/>
+          </a:bodyPr>
+          <a:lstStyle/>
+          <a:p>
+            <a:pPr algn="l">
+              <a:lnSpc>
+                <a:spcPct val="135000"/>
+              </a:lnSpc>
+            </a:pPr>
+            <a:r>
+              <a:rPr sz="1350" b="1" i="0">
                 <a:solidFill>
                   <a:srgbClr val="222A30"/>
                 </a:solidFill>
                 <a:latin typeface="Calibri"/>
               </a:rPr>
-              <a:t>This is the designed behaviour, not a broken run. A score computed from a hypothesis its own data does not support would be a</a:t>
-            </a:r>
-          </a:p>
-          <a:p>
-            <a:pPr algn="l">
-              <a:lnSpc>
-                <a:spcPct val="132000"/>
-              </a:lnSpc>
-            </a:pPr>
-            <a:r>
-              <a:rPr sz="1350" b="0" i="0">
+              <a:t>Read plainly: at the one locus in this study with a decisive signal, G4 sites are MORE labile than matched controls, not less.</a:t>
+            </a:r>
+          </a:p>
+          <a:p>
+            <a:pPr algn="l">
+              <a:lnSpc>
+                <a:spcPct val="135000"/>
+              </a:lnSpc>
+            </a:pPr>
+            <a:r>
+              <a:rPr sz="1350" b="1" i="0">
                 <a:solidFill>
                   <a:srgbClr val="222A30"/>
                 </a:solidFill>
                 <a:latin typeface="Calibri"/>
               </a:rPr>
-              <a:t>number with nothing behind it — and it would look exactly like a number with something behind it.</a:t>
-            </a:r>
-          </a:p>
-        </p:txBody>
-      </p:sp>
-      <p:sp>
-        <p:nvSpPr>
-          <p:cNvPr id="17" name="TextBox 16"/>
+              <a:t>That contradicts D.H1. It is a real measurement, and reporting it as anything else would be the only actual failure here.</a:t>
+            </a:r>
+          </a:p>
+        </p:txBody>
+      </p:sp>
+      <p:sp>
+        <p:nvSpPr>
+          <p:cNvPr id="20" name="TextBox 19"/>
           <p:cNvSpPr txBox="1"/>
           <p:nvPr/>
         </p:nvSpPr>
@@ -4099,14 +4206,14 @@
                 </a:solidFill>
                 <a:latin typeface="Calibri"/>
               </a:rPr>
-              <a:t>Quoted verbatim from `g4watch score --pathogen fmdv2026`, which exits 3 rather than emitting a score</a:t>
-            </a:r>
-          </a:p>
-        </p:txBody>
-      </p:sp>
-      <p:sp>
-        <p:nvSpPr>
-          <p:cNvPr id="18" name="TextBox 17"/>
+              <a:t>Serotype breakdown recorded in docs/revision_log.md; the superseded verdict is kept in the ledger, not overwritten</a:t>
+            </a:r>
+          </a:p>
+        </p:txBody>
+      </p:sp>
+      <p:sp>
+        <p:nvSpPr>
+          <p:cNvPr id="21" name="TextBox 20"/>
           <p:cNvSpPr txBox="1"/>
           <p:nvPr/>
         </p:nvSpPr>
@@ -4247,7 +4354,7 @@
                 </a:solidFill>
                 <a:latin typeface="Calibri"/>
               </a:rPr>
-              <a:t>LIMITS</a:t>
+              <a:t>SO WHAT DOES IT OUTPUT TODAY?</a:t>
             </a:r>
           </a:p>
         </p:txBody>
@@ -4286,7 +4393,7 @@
                 </a:solidFill>
                 <a:latin typeface="Calibri"/>
               </a:rPr>
-              <a:t>What this does not yet establish</a:t>
+              <a:t>A closed gate, and the reason for it</a:t>
             </a:r>
           </a:p>
         </p:txBody>
@@ -4343,288 +4450,53 @@
         </p:nvSpPr>
         <p:spPr>
           <a:xfrm>
-            <a:off x="502920" y="1371600"/>
-            <a:ext cx="5486400" cy="4754880"/>
-          </a:xfrm>
-          <a:prstGeom prst="rect">
-            <a:avLst/>
-          </a:prstGeom>
-          <a:noFill/>
-        </p:spPr>
-        <p:txBody>
-          <a:bodyPr wrap="square" lIns="0" rIns="0" tIns="0" bIns="0">
-            <a:spAutoFit/>
-          </a:bodyPr>
-          <a:lstStyle/>
-          <a:p>
-            <a:pPr>
-              <a:lnSpc>
-                <a:spcPct val="108000"/>
-              </a:lnSpc>
-              <a:spcAft>
-                <a:spcPts val="300"/>
-              </a:spcAft>
-            </a:pPr>
-            <a:r>
-              <a:rPr sz="1500" b="1" i="0">
-                <a:solidFill>
-                  <a:srgbClr val="1B3A5C"/>
-                </a:solidFill>
-                <a:latin typeface="Calibri"/>
-              </a:rPr>
-              <a:t>▪  Predictions, not structures.</a:t>
-            </a:r>
-          </a:p>
-          <a:p>
-            <a:pPr>
-              <a:lnSpc>
-                <a:spcPct val="108000"/>
-              </a:lnSpc>
-              <a:spcAft>
-                <a:spcPts val="1300"/>
-              </a:spcAft>
-            </a:pPr>
-            <a:r>
-              <a:rPr sz="1350" b="0" i="0">
+            <a:off x="502920" y="1298448"/>
+            <a:ext cx="11155680" cy="457200"/>
+          </a:xfrm>
+          <a:prstGeom prst="rect">
+            <a:avLst/>
+          </a:prstGeom>
+          <a:noFill/>
+        </p:spPr>
+        <p:txBody>
+          <a:bodyPr wrap="square" anchor="t" lIns="0" rIns="0" tIns="0" bIns="0">
+            <a:spAutoFit/>
+          </a:bodyPr>
+          <a:lstStyle/>
+          <a:p>
+            <a:pPr algn="l">
+              <a:lnSpc>
+                <a:spcPct val="100000"/>
+              </a:lnSpc>
+            </a:pPr>
+            <a:r>
+              <a:rPr sz="1500" b="0" i="0">
                 <a:solidFill>
                   <a:srgbClr val="222A30"/>
                 </a:solidFill>
                 <a:latin typeface="Calibri"/>
               </a:rPr>
-              <a:t>Every locus here is computational. No G4 in this Atlas has been confirmed in vitro by CD spectroscopy or NMR.</a:t>
-            </a:r>
-          </a:p>
-          <a:p>
-            <a:pPr>
-              <a:lnSpc>
-                <a:spcPct val="108000"/>
-              </a:lnSpc>
-              <a:spcAft>
-                <a:spcPts val="300"/>
-              </a:spcAft>
-            </a:pPr>
-            <a:r>
-              <a:rPr sz="1500" b="1" i="0">
-                <a:solidFill>
-                  <a:srgbClr val="1B3A5C"/>
-                </a:solidFill>
-                <a:latin typeface="Calibri"/>
-              </a:rPr>
-              <a:t>▪  One test, one corpus.</a:t>
-            </a:r>
-          </a:p>
-          <a:p>
-            <a:pPr>
-              <a:lnSpc>
-                <a:spcPct val="108000"/>
-              </a:lnSpc>
-              <a:spcAft>
-                <a:spcPts val="1300"/>
-              </a:spcAft>
-            </a:pPr>
-            <a:r>
-              <a:rPr sz="1350" b="0" i="0">
-                <a:solidFill>
-                  <a:srgbClr val="222A30"/>
-                </a:solidFill>
-                <a:latin typeface="Calibri"/>
-              </a:rPr>
-              <a:t>Only FMDV2026 and its serotype-O subset have cleared the floor for enough loci to test. Eight pathogens have no D.H1 verdict at all.</a:t>
-            </a:r>
-          </a:p>
-          <a:p>
-            <a:pPr>
-              <a:lnSpc>
-                <a:spcPct val="108000"/>
-              </a:lnSpc>
-              <a:spcAft>
-                <a:spcPts val="300"/>
-              </a:spcAft>
-            </a:pPr>
-            <a:r>
-              <a:rPr sz="1500" b="1" i="0">
-                <a:solidFill>
-                  <a:srgbClr val="1B3A5C"/>
-                </a:solidFill>
-                <a:latin typeface="Calibri"/>
-              </a:rPr>
-              <a:t>▪  Lineage pooling.</a:t>
-            </a:r>
-          </a:p>
-          <a:p>
-            <a:pPr>
-              <a:lnSpc>
-                <a:spcPct val="108000"/>
-              </a:lnSpc>
-              <a:spcAft>
-                <a:spcPts val="1300"/>
-              </a:spcAft>
-            </a:pPr>
-            <a:r>
-              <a:rPr sz="1350" b="0" i="0">
-                <a:solidFill>
-                  <a:srgbClr val="222A30"/>
-                </a:solidFill>
-                <a:latin typeface="Calibri"/>
-              </a:rPr>
-              <a:t>The pathogen-level verdict treats each corpus as one population. G4-004 shows that can hide large between-lineage differences.</a:t>
-            </a:r>
-          </a:p>
-        </p:txBody>
-      </p:sp>
-      <p:sp>
-        <p:nvSpPr>
-          <p:cNvPr id="7" name="TextBox 6"/>
-          <p:cNvSpPr txBox="1"/>
-          <p:nvPr/>
-        </p:nvSpPr>
-        <p:spPr>
-          <a:xfrm>
-            <a:off x="6309360" y="1371600"/>
-            <a:ext cx="5394960" cy="4754880"/>
-          </a:xfrm>
-          <a:prstGeom prst="rect">
-            <a:avLst/>
-          </a:prstGeom>
-          <a:noFill/>
-        </p:spPr>
-        <p:txBody>
-          <a:bodyPr wrap="square" lIns="0" rIns="0" tIns="0" bIns="0">
-            <a:spAutoFit/>
-          </a:bodyPr>
-          <a:lstStyle/>
-          <a:p>
-            <a:pPr>
-              <a:lnSpc>
-                <a:spcPct val="108000"/>
-              </a:lnSpc>
-              <a:spcAft>
-                <a:spcPts val="300"/>
-              </a:spcAft>
-            </a:pPr>
-            <a:r>
-              <a:rPr sz="1500" b="1" i="0">
-                <a:solidFill>
-                  <a:srgbClr val="1B3A5C"/>
-                </a:solidFill>
-                <a:latin typeface="Calibri"/>
-              </a:rPr>
-              <a:t>▪  Sampling is opportunistic.</a:t>
-            </a:r>
-          </a:p>
-          <a:p>
-            <a:pPr>
-              <a:lnSpc>
-                <a:spcPct val="108000"/>
-              </a:lnSpc>
-              <a:spcAft>
-                <a:spcPts val="1300"/>
-              </a:spcAft>
-            </a:pPr>
-            <a:r>
-              <a:rPr sz="1350" b="0" i="0">
-                <a:solidFill>
-                  <a:srgbClr val="222A30"/>
-                </a:solidFill>
-                <a:latin typeface="Calibri"/>
-              </a:rPr>
-              <a:t>GenBank is not a survey. Country and year distributions reflect who sequenced what, not where the virus was.</a:t>
-            </a:r>
-          </a:p>
-          <a:p>
-            <a:pPr>
-              <a:lnSpc>
-                <a:spcPct val="108000"/>
-              </a:lnSpc>
-              <a:spcAft>
-                <a:spcPts val="300"/>
-              </a:spcAft>
-            </a:pPr>
-            <a:r>
-              <a:rPr sz="1500" b="1" i="0">
-                <a:solidFill>
-                  <a:srgbClr val="1B3A5C"/>
-                </a:solidFill>
-                <a:latin typeface="Calibri"/>
-              </a:rPr>
-              <a:t>▪  The control-limit calibration is short.</a:t>
-            </a:r>
-          </a:p>
-          <a:p>
-            <a:pPr>
-              <a:lnSpc>
-                <a:spcPct val="108000"/>
-              </a:lnSpc>
-              <a:spcAft>
-                <a:spcPts val="1300"/>
-              </a:spcAft>
-            </a:pPr>
-            <a:r>
-              <a:rPr sz="1350" b="0" i="0">
-                <a:solidFill>
-                  <a:srgbClr val="222A30"/>
-                </a:solidFill>
-                <a:latin typeface="Calibri"/>
-              </a:rPr>
-              <a:t>Baselines are annual and few, so limits carry explicit uncertainty intervals rather than being quoted as exact numbers.</a:t>
-            </a:r>
-          </a:p>
-          <a:p>
-            <a:pPr>
-              <a:lnSpc>
-                <a:spcPct val="108000"/>
-              </a:lnSpc>
-              <a:spcAft>
-                <a:spcPts val="300"/>
-              </a:spcAft>
-            </a:pPr>
-            <a:r>
-              <a:rPr sz="1500" b="1" i="0">
-                <a:solidFill>
-                  <a:srgbClr val="1B3A5C"/>
-                </a:solidFill>
-                <a:latin typeface="Calibri"/>
-              </a:rPr>
-              <a:t>▪  No clinical or field validation.</a:t>
-            </a:r>
-          </a:p>
-          <a:p>
-            <a:pPr>
-              <a:lnSpc>
-                <a:spcPct val="108000"/>
-              </a:lnSpc>
-              <a:spcAft>
-                <a:spcPts val="1300"/>
-              </a:spcAft>
-            </a:pPr>
-            <a:r>
-              <a:rPr sz="1350" b="0" i="0">
-                <a:solidFill>
-                  <a:srgbClr val="222A30"/>
-                </a:solidFill>
-                <a:latin typeface="Calibri"/>
-              </a:rPr>
-              <a:t>Nothing here has been tested against outbreak outcomes. This is a hypothesis-testing framework, not a diagnostic.</a:t>
-            </a:r>
-          </a:p>
-        </p:txBody>
-      </p:sp>
-      <p:sp>
-        <p:nvSpPr>
-          <p:cNvPr id="8" name="Rectangle 7"/>
+              <a:t>Across all eleven pathogens, the testing ledger currently holds no SUPPORTED D.H1 verdict. So:</a:t>
+            </a:r>
+          </a:p>
+        </p:txBody>
+      </p:sp>
+      <p:sp>
+        <p:nvSpPr>
+          <p:cNvPr id="7" name="Rectangle 6"/>
           <p:cNvSpPr/>
           <p:nvPr/>
         </p:nvSpPr>
         <p:spPr>
           <a:xfrm>
-            <a:off x="502920" y="4892040"/>
-            <a:ext cx="11201400" cy="1371600"/>
+            <a:off x="502920" y="1783080"/>
+            <a:ext cx="50800" cy="566928"/>
           </a:xfrm>
           <a:prstGeom prst="rect">
             <a:avLst/>
           </a:prstGeom>
           <a:solidFill>
-            <a:srgbClr val="EEF1F3"/>
+            <a:srgbClr val="1F8A70"/>
           </a:solidFill>
           <a:ln>
             <a:noFill/>
@@ -4655,14 +4527,386 @@
       </p:sp>
       <p:sp>
         <p:nvSpPr>
+          <p:cNvPr id="8" name="TextBox 7"/>
+          <p:cNvSpPr txBox="1"/>
+          <p:nvPr/>
+        </p:nvSpPr>
+        <p:spPr>
+          <a:xfrm>
+            <a:off x="868680" y="1783080"/>
+            <a:ext cx="1920240" cy="365760"/>
+          </a:xfrm>
+          <a:prstGeom prst="rect">
+            <a:avLst/>
+          </a:prstGeom>
+          <a:noFill/>
+        </p:spPr>
+        <p:txBody>
+          <a:bodyPr wrap="square" anchor="t" lIns="0" rIns="0" tIns="0" bIns="0">
+            <a:spAutoFit/>
+          </a:bodyPr>
+          <a:lstStyle/>
+          <a:p>
+            <a:pPr algn="l">
+              <a:lnSpc>
+                <a:spcPct val="100000"/>
+              </a:lnSpc>
+            </a:pPr>
+            <a:r>
+              <a:rPr sz="1700" b="1" i="0">
+                <a:solidFill>
+                  <a:srgbClr val="1F8A70"/>
+                </a:solidFill>
+                <a:latin typeface="Calibri"/>
+              </a:rPr>
+              <a:t>Produced</a:t>
+            </a:r>
+          </a:p>
+        </p:txBody>
+      </p:sp>
+      <p:sp>
+        <p:nvSpPr>
           <p:cNvPr id="9" name="TextBox 8"/>
           <p:cNvSpPr txBox="1"/>
           <p:nvPr/>
         </p:nvSpPr>
         <p:spPr>
           <a:xfrm>
-            <a:off x="868680" y="5102352"/>
-            <a:ext cx="10515600" cy="1005840"/>
+            <a:off x="2880360" y="1783080"/>
+            <a:ext cx="8778240" cy="822960"/>
+          </a:xfrm>
+          <a:prstGeom prst="rect">
+            <a:avLst/>
+          </a:prstGeom>
+          <a:noFill/>
+        </p:spPr>
+        <p:txBody>
+          <a:bodyPr wrap="square" anchor="t" lIns="0" rIns="0" tIns="0" bIns="0">
+            <a:spAutoFit/>
+          </a:bodyPr>
+          <a:lstStyle/>
+          <a:p>
+            <a:pPr algn="l">
+              <a:lnSpc>
+                <a:spcPct val="130000"/>
+              </a:lnSpc>
+            </a:pPr>
+            <a:r>
+              <a:rPr sz="1350" b="0" i="0">
+                <a:solidFill>
+                  <a:srgbClr val="222A30"/>
+                </a:solidFill>
+                <a:latin typeface="Calibri"/>
+              </a:rPr>
+              <a:t>G4 Reference Atlas per pathogen · QC report · reference-anchored alignment · recombination screen · ML tree and time-scaled root · variant table · per-locus disruption rates · GC control gate · D.H1 verdict · report card · full provenance</a:t>
+            </a:r>
+          </a:p>
+        </p:txBody>
+      </p:sp>
+      <p:sp>
+        <p:nvSpPr>
+          <p:cNvPr id="10" name="Rectangle 9"/>
+          <p:cNvSpPr/>
+          <p:nvPr/>
+        </p:nvSpPr>
+        <p:spPr>
+          <a:xfrm>
+            <a:off x="502920" y="2697480"/>
+            <a:ext cx="50800" cy="566928"/>
+          </a:xfrm>
+          <a:prstGeom prst="rect">
+            <a:avLst/>
+          </a:prstGeom>
+          <a:solidFill>
+            <a:srgbClr val="C0392B"/>
+          </a:solidFill>
+          <a:ln>
+            <a:noFill/>
+          </a:ln>
+          <a:effectLst/>
+        </p:spPr>
+        <p:style>
+          <a:lnRef idx="1">
+            <a:schemeClr val="accent1"/>
+          </a:lnRef>
+          <a:fillRef idx="3">
+            <a:schemeClr val="accent1"/>
+          </a:fillRef>
+          <a:effectRef idx="2">
+            <a:schemeClr val="accent1"/>
+          </a:effectRef>
+          <a:fontRef idx="minor">
+            <a:schemeClr val="lt1"/>
+          </a:fontRef>
+        </p:style>
+        <p:txBody>
+          <a:bodyPr rtlCol="0" anchor="ctr"/>
+          <a:lstStyle/>
+          <a:p>
+            <a:pPr algn="ctr"/>
+          </a:p>
+        </p:txBody>
+      </p:sp>
+      <p:sp>
+        <p:nvSpPr>
+          <p:cNvPr id="11" name="TextBox 10"/>
+          <p:cNvSpPr txBox="1"/>
+          <p:nvPr/>
+        </p:nvSpPr>
+        <p:spPr>
+          <a:xfrm>
+            <a:off x="868680" y="2697480"/>
+            <a:ext cx="1920240" cy="365760"/>
+          </a:xfrm>
+          <a:prstGeom prst="rect">
+            <a:avLst/>
+          </a:prstGeom>
+          <a:noFill/>
+        </p:spPr>
+        <p:txBody>
+          <a:bodyPr wrap="square" anchor="t" lIns="0" rIns="0" tIns="0" bIns="0">
+            <a:spAutoFit/>
+          </a:bodyPr>
+          <a:lstStyle/>
+          <a:p>
+            <a:pPr algn="l">
+              <a:lnSpc>
+                <a:spcPct val="100000"/>
+              </a:lnSpc>
+            </a:pPr>
+            <a:r>
+              <a:rPr sz="1700" b="1" i="0">
+                <a:solidFill>
+                  <a:srgbClr val="C0392B"/>
+                </a:solidFill>
+                <a:latin typeface="Calibri"/>
+              </a:rPr>
+              <a:t>NOT produced</a:t>
+            </a:r>
+          </a:p>
+        </p:txBody>
+      </p:sp>
+      <p:sp>
+        <p:nvSpPr>
+          <p:cNvPr id="12" name="TextBox 11"/>
+          <p:cNvSpPr txBox="1"/>
+          <p:nvPr/>
+        </p:nvSpPr>
+        <p:spPr>
+          <a:xfrm>
+            <a:off x="2880360" y="2697480"/>
+            <a:ext cx="8778240" cy="822960"/>
+          </a:xfrm>
+          <a:prstGeom prst="rect">
+            <a:avLst/>
+          </a:prstGeom>
+          <a:noFill/>
+        </p:spPr>
+        <p:txBody>
+          <a:bodyPr wrap="square" anchor="t" lIns="0" rIns="0" tIns="0" bIns="0">
+            <a:spAutoFit/>
+          </a:bodyPr>
+          <a:lstStyle/>
+          <a:p>
+            <a:pPr algn="l">
+              <a:lnSpc>
+                <a:spcPct val="130000"/>
+              </a:lnSpc>
+            </a:pPr>
+            <a:r>
+              <a:rPr sz="1350" b="0" i="0">
+                <a:solidFill>
+                  <a:srgbClr val="222A30"/>
+                </a:solidFill>
+                <a:latin typeface="Calibri"/>
+              </a:rPr>
+              <a:t>G4-EWS surveillance score · CUSUM / EWMA control limits · detection calls · any statement that a pathogen is or is not changing at a G4 site</a:t>
+            </a:r>
+          </a:p>
+        </p:txBody>
+      </p:sp>
+      <p:sp>
+        <p:nvSpPr>
+          <p:cNvPr id="13" name="TextBox 12"/>
+          <p:cNvSpPr txBox="1"/>
+          <p:nvPr/>
+        </p:nvSpPr>
+        <p:spPr>
+          <a:xfrm>
+            <a:off x="502920" y="3703320"/>
+            <a:ext cx="11155680" cy="320040"/>
+          </a:xfrm>
+          <a:prstGeom prst="rect">
+            <a:avLst/>
+          </a:prstGeom>
+          <a:noFill/>
+        </p:spPr>
+        <p:txBody>
+          <a:bodyPr wrap="square" anchor="t" lIns="0" rIns="0" tIns="0" bIns="0">
+            <a:spAutoFit/>
+          </a:bodyPr>
+          <a:lstStyle/>
+          <a:p>
+            <a:pPr algn="l">
+              <a:lnSpc>
+                <a:spcPct val="100000"/>
+              </a:lnSpc>
+            </a:pPr>
+            <a:r>
+              <a:rPr sz="1350" b="1" i="0">
+                <a:solidFill>
+                  <a:srgbClr val="1B3A5C"/>
+                </a:solidFill>
+                <a:latin typeface="Calibri"/>
+              </a:rPr>
+              <a:t>What the tool says when you ask it to score anyway:</a:t>
+            </a:r>
+          </a:p>
+        </p:txBody>
+      </p:sp>
+      <p:sp>
+        <p:nvSpPr>
+          <p:cNvPr id="14" name="Rectangle 13"/>
+          <p:cNvSpPr/>
+          <p:nvPr/>
+        </p:nvSpPr>
+        <p:spPr>
+          <a:xfrm>
+            <a:off x="502920" y="4069080"/>
+            <a:ext cx="11201400" cy="1207008"/>
+          </a:xfrm>
+          <a:prstGeom prst="rect">
+            <a:avLst/>
+          </a:prstGeom>
+          <a:solidFill>
+            <a:srgbClr val="EEF1F3"/>
+          </a:solidFill>
+          <a:ln w="12700">
+            <a:solidFill>
+              <a:srgbClr val="CED8DE"/>
+            </a:solidFill>
+          </a:ln>
+          <a:effectLst/>
+        </p:spPr>
+        <p:style>
+          <a:lnRef idx="1">
+            <a:schemeClr val="accent1"/>
+          </a:lnRef>
+          <a:fillRef idx="3">
+            <a:schemeClr val="accent1"/>
+          </a:fillRef>
+          <a:effectRef idx="2">
+            <a:schemeClr val="accent1"/>
+          </a:effectRef>
+          <a:fontRef idx="minor">
+            <a:schemeClr val="lt1"/>
+          </a:fontRef>
+        </p:style>
+        <p:txBody>
+          <a:bodyPr rtlCol="0" anchor="ctr"/>
+          <a:lstStyle/>
+          <a:p>
+            <a:pPr algn="ctr"/>
+          </a:p>
+        </p:txBody>
+      </p:sp>
+      <p:sp>
+        <p:nvSpPr>
+          <p:cNvPr id="15" name="TextBox 14"/>
+          <p:cNvSpPr txBox="1"/>
+          <p:nvPr/>
+        </p:nvSpPr>
+        <p:spPr>
+          <a:xfrm>
+            <a:off x="777240" y="4224528"/>
+            <a:ext cx="10698480" cy="960120"/>
+          </a:xfrm>
+          <a:prstGeom prst="rect">
+            <a:avLst/>
+          </a:prstGeom>
+          <a:noFill/>
+        </p:spPr>
+        <p:txBody>
+          <a:bodyPr wrap="square" anchor="t" lIns="0" rIns="0" tIns="0" bIns="0">
+            <a:spAutoFit/>
+          </a:bodyPr>
+          <a:lstStyle/>
+          <a:p>
+            <a:pPr algn="l">
+              <a:lnSpc>
+                <a:spcPct val="122000"/>
+              </a:lnSpc>
+            </a:pPr>
+            <a:r>
+              <a:rPr sz="1250" b="0" i="0">
+                <a:solidFill>
+                  <a:srgbClr val="1B3A5C"/>
+                </a:solidFill>
+                <a:latin typeface="Consolas"/>
+              </a:rPr>
+              <a:t>FMDV2026: Stage 5 scoring is BLOCKED — at least one locus shows a real,</a:t>
+            </a:r>
+          </a:p>
+          <a:p>
+            <a:pPr algn="l">
+              <a:lnSpc>
+                <a:spcPct val="122000"/>
+              </a:lnSpc>
+            </a:pPr>
+            <a:r>
+              <a:rPr sz="1250" b="0" i="0">
+                <a:solidFill>
+                  <a:srgbClr val="1B3A5C"/>
+                </a:solidFill>
+                <a:latin typeface="Consolas"/>
+              </a:rPr>
+              <a:t>GC-adjustment-surviving effect that runs AGAINST D.H1: it is MORE disrupted than its</a:t>
+            </a:r>
+          </a:p>
+          <a:p>
+            <a:pPr algn="l">
+              <a:lnSpc>
+                <a:spcPct val="122000"/>
+              </a:lnSpc>
+            </a:pPr>
+            <a:r>
+              <a:rPr sz="1250" b="0" i="0">
+                <a:solidFill>
+                  <a:srgbClr val="1B3A5C"/>
+                </a:solidFill>
+                <a:latin typeface="Consolas"/>
+              </a:rPr>
+              <a:t>matched control, not less. This is evidence against the hypothesis, not an absence of</a:t>
+            </a:r>
+          </a:p>
+          <a:p>
+            <a:pPr algn="l">
+              <a:lnSpc>
+                <a:spcPct val="122000"/>
+              </a:lnSpc>
+            </a:pPr>
+            <a:r>
+              <a:rPr sz="1250" b="0" i="0">
+                <a:solidFill>
+                  <a:srgbClr val="1B3A5C"/>
+                </a:solidFill>
+                <a:latin typeface="Consolas"/>
+              </a:rPr>
+              <a:t>evidence for it, and it is reported separately for that reason.</a:t>
+            </a:r>
+          </a:p>
+        </p:txBody>
+      </p:sp>
+      <p:sp>
+        <p:nvSpPr>
+          <p:cNvPr id="16" name="TextBox 15"/>
+          <p:cNvSpPr txBox="1"/>
+          <p:nvPr/>
+        </p:nvSpPr>
+        <p:spPr>
+          <a:xfrm>
+            <a:off x="502920" y="5440680"/>
+            <a:ext cx="11155680" cy="822960"/>
           </a:xfrm>
           <a:prstGeom prst="rect">
             <a:avLst/>
@@ -4683,11 +4927,11 @@
             <a:r>
               <a:rPr sz="1350" b="0" i="0">
                 <a:solidFill>
-                  <a:srgbClr val="1B3A5C"/>
-                </a:solidFill>
-                <a:latin typeface="Calibri"/>
-              </a:rPr>
-              <a:t>None of these limits is a reason to distrust the negative result.</a:t>
+                  <a:srgbClr val="222A30"/>
+                </a:solidFill>
+                <a:latin typeface="Calibri"/>
+              </a:rPr>
+              <a:t>This is the designed behaviour, not a broken run. A score computed from a hypothesis its own data does not support would be a</a:t>
             </a:r>
           </a:p>
           <a:p>
@@ -4699,34 +4943,18 @@
             <a:r>
               <a:rPr sz="1350" b="0" i="0">
                 <a:solidFill>
-                  <a:srgbClr val="1B3A5C"/>
-                </a:solidFill>
-                <a:latin typeface="Calibri"/>
-              </a:rPr>
-              <a:t>A framework that could not return a negative result would be the thing worth distrusting. What they do bound is how far it</a:t>
-            </a:r>
-          </a:p>
-          <a:p>
-            <a:pPr algn="l">
-              <a:lnSpc>
-                <a:spcPct val="132000"/>
-              </a:lnSpc>
-            </a:pPr>
-            <a:r>
-              <a:rPr sz="1350" b="0" i="0">
-                <a:solidFill>
-                  <a:srgbClr val="1B3A5C"/>
-                </a:solidFill>
-                <a:latin typeface="Calibri"/>
-              </a:rPr>
-              <a:t>generalises: one hypothesis, one well-powered corpus, computational predictions, and no field validation yet.</a:t>
-            </a:r>
-          </a:p>
-        </p:txBody>
-      </p:sp>
-      <p:sp>
-        <p:nvSpPr>
-          <p:cNvPr id="10" name="TextBox 9"/>
+                  <a:srgbClr val="222A30"/>
+                </a:solidFill>
+                <a:latin typeface="Calibri"/>
+              </a:rPr>
+              <a:t>number with nothing behind it — and it would look exactly like a number with something behind it.</a:t>
+            </a:r>
+          </a:p>
+        </p:txBody>
+      </p:sp>
+      <p:sp>
+        <p:nvSpPr>
+          <p:cNvPr id="17" name="TextBox 16"/>
           <p:cNvSpPr txBox="1"/>
           <p:nvPr/>
         </p:nvSpPr>
@@ -4758,14 +4986,14 @@
                 </a:solidFill>
                 <a:latin typeface="Calibri"/>
               </a:rPr>
-              <a:t>Recorded in docs/validation_report.md and docs/revision_log.md</a:t>
-            </a:r>
-          </a:p>
-        </p:txBody>
-      </p:sp>
-      <p:sp>
-        <p:nvSpPr>
-          <p:cNvPr id="11" name="TextBox 10"/>
+              <a:t>Quoted verbatim from `g4watch score --pathogen fmdv2026`, which exits 3 rather than emitting a score</a:t>
+            </a:r>
+          </a:p>
+        </p:txBody>
+      </p:sp>
+      <p:sp>
+        <p:nvSpPr>
+          <p:cNvPr id="18" name="TextBox 17"/>
           <p:cNvSpPr txBox="1"/>
           <p:nvPr/>
         </p:nvSpPr>
@@ -4906,6 +5134,2647 @@
                 </a:solidFill>
                 <a:latin typeface="Calibri"/>
               </a:rPr>
+              <a:t>LIMITS</a:t>
+            </a:r>
+          </a:p>
+        </p:txBody>
+      </p:sp>
+      <p:sp>
+        <p:nvSpPr>
+          <p:cNvPr id="4" name="TextBox 3"/>
+          <p:cNvSpPr txBox="1"/>
+          <p:nvPr/>
+        </p:nvSpPr>
+        <p:spPr>
+          <a:xfrm>
+            <a:off x="502920" y="338328"/>
+            <a:ext cx="11155680" cy="548640"/>
+          </a:xfrm>
+          <a:prstGeom prst="rect">
+            <a:avLst/>
+          </a:prstGeom>
+          <a:noFill/>
+        </p:spPr>
+        <p:txBody>
+          <a:bodyPr wrap="square" anchor="t" lIns="0" rIns="0" tIns="0" bIns="0">
+            <a:spAutoFit/>
+          </a:bodyPr>
+          <a:lstStyle/>
+          <a:p>
+            <a:pPr algn="l">
+              <a:lnSpc>
+                <a:spcPct val="100000"/>
+              </a:lnSpc>
+            </a:pPr>
+            <a:r>
+              <a:rPr sz="2600" b="1" i="0">
+                <a:solidFill>
+                  <a:srgbClr val="FFFFFF"/>
+                </a:solidFill>
+                <a:latin typeface="Calibri"/>
+              </a:rPr>
+              <a:t>What this does not yet establish</a:t>
+            </a:r>
+          </a:p>
+        </p:txBody>
+      </p:sp>
+      <p:sp>
+        <p:nvSpPr>
+          <p:cNvPr id="5" name="Rectangle 4"/>
+          <p:cNvSpPr/>
+          <p:nvPr/>
+        </p:nvSpPr>
+        <p:spPr>
+          <a:xfrm>
+            <a:off x="0" y="932688"/>
+            <a:ext cx="12191695" cy="38100"/>
+          </a:xfrm>
+          <a:prstGeom prst="rect">
+            <a:avLst/>
+          </a:prstGeom>
+          <a:solidFill>
+            <a:srgbClr val="1F8A70"/>
+          </a:solidFill>
+          <a:ln>
+            <a:noFill/>
+          </a:ln>
+          <a:effectLst/>
+        </p:spPr>
+        <p:style>
+          <a:lnRef idx="1">
+            <a:schemeClr val="accent1"/>
+          </a:lnRef>
+          <a:fillRef idx="3">
+            <a:schemeClr val="accent1"/>
+          </a:fillRef>
+          <a:effectRef idx="2">
+            <a:schemeClr val="accent1"/>
+          </a:effectRef>
+          <a:fontRef idx="minor">
+            <a:schemeClr val="lt1"/>
+          </a:fontRef>
+        </p:style>
+        <p:txBody>
+          <a:bodyPr rtlCol="0" anchor="ctr"/>
+          <a:lstStyle/>
+          <a:p>
+            <a:pPr algn="ctr"/>
+          </a:p>
+        </p:txBody>
+      </p:sp>
+      <p:sp>
+        <p:nvSpPr>
+          <p:cNvPr id="6" name="TextBox 5"/>
+          <p:cNvSpPr txBox="1"/>
+          <p:nvPr/>
+        </p:nvSpPr>
+        <p:spPr>
+          <a:xfrm>
+            <a:off x="502920" y="1371600"/>
+            <a:ext cx="5486400" cy="4754880"/>
+          </a:xfrm>
+          <a:prstGeom prst="rect">
+            <a:avLst/>
+          </a:prstGeom>
+          <a:noFill/>
+        </p:spPr>
+        <p:txBody>
+          <a:bodyPr wrap="square" lIns="0" rIns="0" tIns="0" bIns="0">
+            <a:spAutoFit/>
+          </a:bodyPr>
+          <a:lstStyle/>
+          <a:p>
+            <a:pPr>
+              <a:lnSpc>
+                <a:spcPct val="108000"/>
+              </a:lnSpc>
+              <a:spcAft>
+                <a:spcPts val="300"/>
+              </a:spcAft>
+            </a:pPr>
+            <a:r>
+              <a:rPr sz="1500" b="1" i="0">
+                <a:solidFill>
+                  <a:srgbClr val="1B3A5C"/>
+                </a:solidFill>
+                <a:latin typeface="Calibri"/>
+              </a:rPr>
+              <a:t>▪  Predictions, not structures.</a:t>
+            </a:r>
+          </a:p>
+          <a:p>
+            <a:pPr>
+              <a:lnSpc>
+                <a:spcPct val="108000"/>
+              </a:lnSpc>
+              <a:spcAft>
+                <a:spcPts val="1300"/>
+              </a:spcAft>
+            </a:pPr>
+            <a:r>
+              <a:rPr sz="1350" b="0" i="0">
+                <a:solidFill>
+                  <a:srgbClr val="222A30"/>
+                </a:solidFill>
+                <a:latin typeface="Calibri"/>
+              </a:rPr>
+              <a:t>Every locus here is computational. No G4 in this Atlas has been confirmed in vitro by CD spectroscopy or NMR.</a:t>
+            </a:r>
+          </a:p>
+          <a:p>
+            <a:pPr>
+              <a:lnSpc>
+                <a:spcPct val="108000"/>
+              </a:lnSpc>
+              <a:spcAft>
+                <a:spcPts val="300"/>
+              </a:spcAft>
+            </a:pPr>
+            <a:r>
+              <a:rPr sz="1500" b="1" i="0">
+                <a:solidFill>
+                  <a:srgbClr val="1B3A5C"/>
+                </a:solidFill>
+                <a:latin typeface="Calibri"/>
+              </a:rPr>
+              <a:t>▪  One test, one corpus.</a:t>
+            </a:r>
+          </a:p>
+          <a:p>
+            <a:pPr>
+              <a:lnSpc>
+                <a:spcPct val="108000"/>
+              </a:lnSpc>
+              <a:spcAft>
+                <a:spcPts val="1300"/>
+              </a:spcAft>
+            </a:pPr>
+            <a:r>
+              <a:rPr sz="1350" b="0" i="0">
+                <a:solidFill>
+                  <a:srgbClr val="222A30"/>
+                </a:solidFill>
+                <a:latin typeface="Calibri"/>
+              </a:rPr>
+              <a:t>Only FMDV2026 and its serotype-O subset have cleared the floor for enough loci to test. Eight pathogens have no D.H1 verdict at all.</a:t>
+            </a:r>
+          </a:p>
+          <a:p>
+            <a:pPr>
+              <a:lnSpc>
+                <a:spcPct val="108000"/>
+              </a:lnSpc>
+              <a:spcAft>
+                <a:spcPts val="300"/>
+              </a:spcAft>
+            </a:pPr>
+            <a:r>
+              <a:rPr sz="1500" b="1" i="0">
+                <a:solidFill>
+                  <a:srgbClr val="1B3A5C"/>
+                </a:solidFill>
+                <a:latin typeface="Calibri"/>
+              </a:rPr>
+              <a:t>▪  Lineage pooling.</a:t>
+            </a:r>
+          </a:p>
+          <a:p>
+            <a:pPr>
+              <a:lnSpc>
+                <a:spcPct val="108000"/>
+              </a:lnSpc>
+              <a:spcAft>
+                <a:spcPts val="1300"/>
+              </a:spcAft>
+            </a:pPr>
+            <a:r>
+              <a:rPr sz="1350" b="0" i="0">
+                <a:solidFill>
+                  <a:srgbClr val="222A30"/>
+                </a:solidFill>
+                <a:latin typeface="Calibri"/>
+              </a:rPr>
+              <a:t>The pathogen-level verdict treats each corpus as one population. G4-004 shows that can hide large between-lineage differences.</a:t>
+            </a:r>
+          </a:p>
+        </p:txBody>
+      </p:sp>
+      <p:sp>
+        <p:nvSpPr>
+          <p:cNvPr id="7" name="TextBox 6"/>
+          <p:cNvSpPr txBox="1"/>
+          <p:nvPr/>
+        </p:nvSpPr>
+        <p:spPr>
+          <a:xfrm>
+            <a:off x="6309360" y="1371600"/>
+            <a:ext cx="5394960" cy="4754880"/>
+          </a:xfrm>
+          <a:prstGeom prst="rect">
+            <a:avLst/>
+          </a:prstGeom>
+          <a:noFill/>
+        </p:spPr>
+        <p:txBody>
+          <a:bodyPr wrap="square" lIns="0" rIns="0" tIns="0" bIns="0">
+            <a:spAutoFit/>
+          </a:bodyPr>
+          <a:lstStyle/>
+          <a:p>
+            <a:pPr>
+              <a:lnSpc>
+                <a:spcPct val="108000"/>
+              </a:lnSpc>
+              <a:spcAft>
+                <a:spcPts val="300"/>
+              </a:spcAft>
+            </a:pPr>
+            <a:r>
+              <a:rPr sz="1500" b="1" i="0">
+                <a:solidFill>
+                  <a:srgbClr val="1B3A5C"/>
+                </a:solidFill>
+                <a:latin typeface="Calibri"/>
+              </a:rPr>
+              <a:t>▪  Sampling is opportunistic.</a:t>
+            </a:r>
+          </a:p>
+          <a:p>
+            <a:pPr>
+              <a:lnSpc>
+                <a:spcPct val="108000"/>
+              </a:lnSpc>
+              <a:spcAft>
+                <a:spcPts val="1300"/>
+              </a:spcAft>
+            </a:pPr>
+            <a:r>
+              <a:rPr sz="1350" b="0" i="0">
+                <a:solidFill>
+                  <a:srgbClr val="222A30"/>
+                </a:solidFill>
+                <a:latin typeface="Calibri"/>
+              </a:rPr>
+              <a:t>GenBank is not a survey. Country and year distributions reflect who sequenced what, not where the virus was.</a:t>
+            </a:r>
+          </a:p>
+          <a:p>
+            <a:pPr>
+              <a:lnSpc>
+                <a:spcPct val="108000"/>
+              </a:lnSpc>
+              <a:spcAft>
+                <a:spcPts val="300"/>
+              </a:spcAft>
+            </a:pPr>
+            <a:r>
+              <a:rPr sz="1500" b="1" i="0">
+                <a:solidFill>
+                  <a:srgbClr val="1B3A5C"/>
+                </a:solidFill>
+                <a:latin typeface="Calibri"/>
+              </a:rPr>
+              <a:t>▪  The control-limit calibration is short.</a:t>
+            </a:r>
+          </a:p>
+          <a:p>
+            <a:pPr>
+              <a:lnSpc>
+                <a:spcPct val="108000"/>
+              </a:lnSpc>
+              <a:spcAft>
+                <a:spcPts val="1300"/>
+              </a:spcAft>
+            </a:pPr>
+            <a:r>
+              <a:rPr sz="1350" b="0" i="0">
+                <a:solidFill>
+                  <a:srgbClr val="222A30"/>
+                </a:solidFill>
+                <a:latin typeface="Calibri"/>
+              </a:rPr>
+              <a:t>Baselines are annual and few, so limits carry explicit uncertainty intervals rather than being quoted as exact numbers.</a:t>
+            </a:r>
+          </a:p>
+          <a:p>
+            <a:pPr>
+              <a:lnSpc>
+                <a:spcPct val="108000"/>
+              </a:lnSpc>
+              <a:spcAft>
+                <a:spcPts val="300"/>
+              </a:spcAft>
+            </a:pPr>
+            <a:r>
+              <a:rPr sz="1500" b="1" i="0">
+                <a:solidFill>
+                  <a:srgbClr val="1B3A5C"/>
+                </a:solidFill>
+                <a:latin typeface="Calibri"/>
+              </a:rPr>
+              <a:t>▪  No clinical or field validation.</a:t>
+            </a:r>
+          </a:p>
+          <a:p>
+            <a:pPr>
+              <a:lnSpc>
+                <a:spcPct val="108000"/>
+              </a:lnSpc>
+              <a:spcAft>
+                <a:spcPts val="1300"/>
+              </a:spcAft>
+            </a:pPr>
+            <a:r>
+              <a:rPr sz="1350" b="0" i="0">
+                <a:solidFill>
+                  <a:srgbClr val="222A30"/>
+                </a:solidFill>
+                <a:latin typeface="Calibri"/>
+              </a:rPr>
+              <a:t>Nothing here has been tested against outbreak outcomes. This is a hypothesis-testing framework, not a diagnostic.</a:t>
+            </a:r>
+          </a:p>
+        </p:txBody>
+      </p:sp>
+      <p:sp>
+        <p:nvSpPr>
+          <p:cNvPr id="8" name="Rectangle 7"/>
+          <p:cNvSpPr/>
+          <p:nvPr/>
+        </p:nvSpPr>
+        <p:spPr>
+          <a:xfrm>
+            <a:off x="502920" y="4892040"/>
+            <a:ext cx="11201400" cy="1371600"/>
+          </a:xfrm>
+          <a:prstGeom prst="rect">
+            <a:avLst/>
+          </a:prstGeom>
+          <a:solidFill>
+            <a:srgbClr val="EEF1F3"/>
+          </a:solidFill>
+          <a:ln>
+            <a:noFill/>
+          </a:ln>
+          <a:effectLst/>
+        </p:spPr>
+        <p:style>
+          <a:lnRef idx="1">
+            <a:schemeClr val="accent1"/>
+          </a:lnRef>
+          <a:fillRef idx="3">
+            <a:schemeClr val="accent1"/>
+          </a:fillRef>
+          <a:effectRef idx="2">
+            <a:schemeClr val="accent1"/>
+          </a:effectRef>
+          <a:fontRef idx="minor">
+            <a:schemeClr val="lt1"/>
+          </a:fontRef>
+        </p:style>
+        <p:txBody>
+          <a:bodyPr rtlCol="0" anchor="ctr"/>
+          <a:lstStyle/>
+          <a:p>
+            <a:pPr algn="ctr"/>
+          </a:p>
+        </p:txBody>
+      </p:sp>
+      <p:sp>
+        <p:nvSpPr>
+          <p:cNvPr id="9" name="TextBox 8"/>
+          <p:cNvSpPr txBox="1"/>
+          <p:nvPr/>
+        </p:nvSpPr>
+        <p:spPr>
+          <a:xfrm>
+            <a:off x="868680" y="5102352"/>
+            <a:ext cx="10515600" cy="1005840"/>
+          </a:xfrm>
+          <a:prstGeom prst="rect">
+            <a:avLst/>
+          </a:prstGeom>
+          <a:noFill/>
+        </p:spPr>
+        <p:txBody>
+          <a:bodyPr wrap="square" anchor="t" lIns="0" rIns="0" tIns="0" bIns="0">
+            <a:spAutoFit/>
+          </a:bodyPr>
+          <a:lstStyle/>
+          <a:p>
+            <a:pPr algn="l">
+              <a:lnSpc>
+                <a:spcPct val="132000"/>
+              </a:lnSpc>
+            </a:pPr>
+            <a:r>
+              <a:rPr sz="1350" b="0" i="0">
+                <a:solidFill>
+                  <a:srgbClr val="1B3A5C"/>
+                </a:solidFill>
+                <a:latin typeface="Calibri"/>
+              </a:rPr>
+              <a:t>None of these limits is a reason to distrust the negative result.</a:t>
+            </a:r>
+          </a:p>
+          <a:p>
+            <a:pPr algn="l">
+              <a:lnSpc>
+                <a:spcPct val="132000"/>
+              </a:lnSpc>
+            </a:pPr>
+            <a:r>
+              <a:rPr sz="1350" b="0" i="0">
+                <a:solidFill>
+                  <a:srgbClr val="1B3A5C"/>
+                </a:solidFill>
+                <a:latin typeface="Calibri"/>
+              </a:rPr>
+              <a:t>A framework that could not return a negative result would be the thing worth distrusting. What they do bound is how far it</a:t>
+            </a:r>
+          </a:p>
+          <a:p>
+            <a:pPr algn="l">
+              <a:lnSpc>
+                <a:spcPct val="132000"/>
+              </a:lnSpc>
+            </a:pPr>
+            <a:r>
+              <a:rPr sz="1350" b="0" i="0">
+                <a:solidFill>
+                  <a:srgbClr val="1B3A5C"/>
+                </a:solidFill>
+                <a:latin typeface="Calibri"/>
+              </a:rPr>
+              <a:t>generalises: one hypothesis, one well-powered corpus, computational predictions, and no field validation yet.</a:t>
+            </a:r>
+          </a:p>
+        </p:txBody>
+      </p:sp>
+      <p:sp>
+        <p:nvSpPr>
+          <p:cNvPr id="10" name="TextBox 9"/>
+          <p:cNvSpPr txBox="1"/>
+          <p:nvPr/>
+        </p:nvSpPr>
+        <p:spPr>
+          <a:xfrm>
+            <a:off x="502920" y="6510528"/>
+            <a:ext cx="10241280" cy="274320"/>
+          </a:xfrm>
+          <a:prstGeom prst="rect">
+            <a:avLst/>
+          </a:prstGeom>
+          <a:noFill/>
+        </p:spPr>
+        <p:txBody>
+          <a:bodyPr wrap="square" anchor="t" lIns="0" rIns="0" tIns="0" bIns="0">
+            <a:spAutoFit/>
+          </a:bodyPr>
+          <a:lstStyle/>
+          <a:p>
+            <a:pPr algn="l">
+              <a:lnSpc>
+                <a:spcPct val="100000"/>
+              </a:lnSpc>
+            </a:pPr>
+            <a:r>
+              <a:rPr sz="950" b="0" i="1">
+                <a:solidFill>
+                  <a:srgbClr val="5A6670"/>
+                </a:solidFill>
+                <a:latin typeface="Calibri"/>
+              </a:rPr>
+              <a:t>Recorded in docs/validation_report.md and docs/revision_log.md</a:t>
+            </a:r>
+          </a:p>
+        </p:txBody>
+      </p:sp>
+      <p:sp>
+        <p:nvSpPr>
+          <p:cNvPr id="11" name="TextBox 10"/>
+          <p:cNvSpPr txBox="1"/>
+          <p:nvPr/>
+        </p:nvSpPr>
+        <p:spPr>
+          <a:xfrm>
+            <a:off x="11155680" y="6510528"/>
+            <a:ext cx="548640" cy="274320"/>
+          </a:xfrm>
+          <a:prstGeom prst="rect">
+            <a:avLst/>
+          </a:prstGeom>
+          <a:noFill/>
+        </p:spPr>
+        <p:txBody>
+          <a:bodyPr wrap="square" anchor="t" lIns="0" rIns="0" tIns="0" bIns="0">
+            <a:spAutoFit/>
+          </a:bodyPr>
+          <a:lstStyle/>
+          <a:p>
+            <a:pPr algn="r">
+              <a:lnSpc>
+                <a:spcPct val="100000"/>
+              </a:lnSpc>
+            </a:pPr>
+            <a:r>
+              <a:rPr sz="950" b="0" i="0">
+                <a:solidFill>
+                  <a:srgbClr val="5A6670"/>
+                </a:solidFill>
+                <a:latin typeface="Calibri"/>
+              </a:rPr>
+              <a:t>12</a:t>
+            </a:r>
+          </a:p>
+        </p:txBody>
+      </p:sp>
+    </p:spTree>
+  </p:cSld>
+  <p:clrMapOvr>
+    <a:masterClrMapping/>
+  </p:clrMapOvr>
+</p:sld>
+</file>
+
+<file path=ppt/slides/slide13.xml><?xml version="1.0" encoding="utf-8"?>
+<p:sld xmlns:a="http://schemas.openxmlformats.org/drawingml/2006/main" xmlns:p="http://schemas.openxmlformats.org/presentationml/2006/main" xmlns:r="http://schemas.openxmlformats.org/officeDocument/2006/relationships">
+  <p:cSld>
+    <p:bg>
+      <p:bgPr>
+        <a:solidFill>
+          <a:srgbClr val="FFFFFF"/>
+        </a:solidFill>
+        <a:effectLst/>
+      </p:bgPr>
+    </p:bg>
+    <p:spTree>
+      <p:nvGrpSpPr>
+        <p:cNvPr id="1" name=""/>
+        <p:cNvGrpSpPr/>
+        <p:nvPr/>
+      </p:nvGrpSpPr>
+      <p:grpSpPr/>
+      <p:sp>
+        <p:nvSpPr>
+          <p:cNvPr id="2" name="Rectangle 1"/>
+          <p:cNvSpPr/>
+          <p:nvPr/>
+        </p:nvSpPr>
+        <p:spPr>
+          <a:xfrm>
+            <a:off x="0" y="0"/>
+            <a:ext cx="12191695" cy="932688"/>
+          </a:xfrm>
+          <a:prstGeom prst="rect">
+            <a:avLst/>
+          </a:prstGeom>
+          <a:solidFill>
+            <a:srgbClr val="1B3A5C"/>
+          </a:solidFill>
+          <a:ln>
+            <a:noFill/>
+          </a:ln>
+          <a:effectLst/>
+        </p:spPr>
+        <p:style>
+          <a:lnRef idx="1">
+            <a:schemeClr val="accent1"/>
+          </a:lnRef>
+          <a:fillRef idx="3">
+            <a:schemeClr val="accent1"/>
+          </a:fillRef>
+          <a:effectRef idx="2">
+            <a:schemeClr val="accent1"/>
+          </a:effectRef>
+          <a:fontRef idx="minor">
+            <a:schemeClr val="lt1"/>
+          </a:fontRef>
+        </p:style>
+        <p:txBody>
+          <a:bodyPr rtlCol="0" anchor="ctr"/>
+          <a:lstStyle/>
+          <a:p>
+            <a:pPr algn="ctr"/>
+          </a:p>
+        </p:txBody>
+      </p:sp>
+      <p:sp>
+        <p:nvSpPr>
+          <p:cNvPr id="3" name="TextBox 2"/>
+          <p:cNvSpPr txBox="1"/>
+          <p:nvPr/>
+        </p:nvSpPr>
+        <p:spPr>
+          <a:xfrm>
+            <a:off x="502920" y="100584"/>
+            <a:ext cx="10058400" cy="274320"/>
+          </a:xfrm>
+          <a:prstGeom prst="rect">
+            <a:avLst/>
+          </a:prstGeom>
+          <a:noFill/>
+        </p:spPr>
+        <p:txBody>
+          <a:bodyPr wrap="square" anchor="t" lIns="0" rIns="0" tIns="0" bIns="0">
+            <a:spAutoFit/>
+          </a:bodyPr>
+          <a:lstStyle/>
+          <a:p>
+            <a:pPr algn="l">
+              <a:lnSpc>
+                <a:spcPct val="100000"/>
+              </a:lnSpc>
+            </a:pPr>
+            <a:r>
+              <a:rPr sz="1250" b="1" i="0">
+                <a:solidFill>
+                  <a:srgbClr val="9FC7D8"/>
+                </a:solidFill>
+                <a:latin typeface="Calibri"/>
+              </a:rPr>
+              <a:t>METHODS</a:t>
+            </a:r>
+          </a:p>
+        </p:txBody>
+      </p:sp>
+      <p:sp>
+        <p:nvSpPr>
+          <p:cNvPr id="4" name="TextBox 3"/>
+          <p:cNvSpPr txBox="1"/>
+          <p:nvPr/>
+        </p:nvSpPr>
+        <p:spPr>
+          <a:xfrm>
+            <a:off x="502920" y="338328"/>
+            <a:ext cx="11155680" cy="548640"/>
+          </a:xfrm>
+          <a:prstGeom prst="rect">
+            <a:avLst/>
+          </a:prstGeom>
+          <a:noFill/>
+        </p:spPr>
+        <p:txBody>
+          <a:bodyPr wrap="square" anchor="t" lIns="0" rIns="0" tIns="0" bIns="0">
+            <a:spAutoFit/>
+          </a:bodyPr>
+          <a:lstStyle/>
+          <a:p>
+            <a:pPr algn="l">
+              <a:lnSpc>
+                <a:spcPct val="100000"/>
+              </a:lnSpc>
+            </a:pPr>
+            <a:r>
+              <a:rPr sz="2600" b="1" i="0">
+                <a:solidFill>
+                  <a:srgbClr val="FFFFFF"/>
+                </a:solidFill>
+                <a:latin typeface="Calibri"/>
+              </a:rPr>
+              <a:t>Every parameter that changes the answer</a:t>
+            </a:r>
+          </a:p>
+        </p:txBody>
+      </p:sp>
+      <p:sp>
+        <p:nvSpPr>
+          <p:cNvPr id="5" name="Rectangle 4"/>
+          <p:cNvSpPr/>
+          <p:nvPr/>
+        </p:nvSpPr>
+        <p:spPr>
+          <a:xfrm>
+            <a:off x="0" y="932688"/>
+            <a:ext cx="12191695" cy="38100"/>
+          </a:xfrm>
+          <a:prstGeom prst="rect">
+            <a:avLst/>
+          </a:prstGeom>
+          <a:solidFill>
+            <a:srgbClr val="1F8A70"/>
+          </a:solidFill>
+          <a:ln>
+            <a:noFill/>
+          </a:ln>
+          <a:effectLst/>
+        </p:spPr>
+        <p:style>
+          <a:lnRef idx="1">
+            <a:schemeClr val="accent1"/>
+          </a:lnRef>
+          <a:fillRef idx="3">
+            <a:schemeClr val="accent1"/>
+          </a:fillRef>
+          <a:effectRef idx="2">
+            <a:schemeClr val="accent1"/>
+          </a:effectRef>
+          <a:fontRef idx="minor">
+            <a:schemeClr val="lt1"/>
+          </a:fontRef>
+        </p:style>
+        <p:txBody>
+          <a:bodyPr rtlCol="0" anchor="ctr"/>
+          <a:lstStyle/>
+          <a:p>
+            <a:pPr algn="ctr"/>
+          </a:p>
+        </p:txBody>
+      </p:sp>
+      <p:sp>
+        <p:nvSpPr>
+          <p:cNvPr id="6" name="Rectangle 5"/>
+          <p:cNvSpPr/>
+          <p:nvPr/>
+        </p:nvSpPr>
+        <p:spPr>
+          <a:xfrm>
+            <a:off x="502920" y="1280160"/>
+            <a:ext cx="11201400" cy="342900"/>
+          </a:xfrm>
+          <a:prstGeom prst="rect">
+            <a:avLst/>
+          </a:prstGeom>
+          <a:solidFill>
+            <a:srgbClr val="EEF1F3"/>
+          </a:solidFill>
+          <a:ln>
+            <a:noFill/>
+          </a:ln>
+          <a:effectLst/>
+        </p:spPr>
+        <p:style>
+          <a:lnRef idx="1">
+            <a:schemeClr val="accent1"/>
+          </a:lnRef>
+          <a:fillRef idx="3">
+            <a:schemeClr val="accent1"/>
+          </a:fillRef>
+          <a:effectRef idx="2">
+            <a:schemeClr val="accent1"/>
+          </a:effectRef>
+          <a:fontRef idx="minor">
+            <a:schemeClr val="lt1"/>
+          </a:fontRef>
+        </p:style>
+        <p:txBody>
+          <a:bodyPr rtlCol="0" anchor="ctr"/>
+          <a:lstStyle/>
+          <a:p>
+            <a:pPr algn="ctr"/>
+          </a:p>
+        </p:txBody>
+      </p:sp>
+      <p:sp>
+        <p:nvSpPr>
+          <p:cNvPr id="7" name="TextBox 6"/>
+          <p:cNvSpPr txBox="1"/>
+          <p:nvPr/>
+        </p:nvSpPr>
+        <p:spPr>
+          <a:xfrm>
+            <a:off x="658368" y="1357884"/>
+            <a:ext cx="2606040" cy="274320"/>
+          </a:xfrm>
+          <a:prstGeom prst="rect">
+            <a:avLst/>
+          </a:prstGeom>
+          <a:noFill/>
+        </p:spPr>
+        <p:txBody>
+          <a:bodyPr wrap="square" anchor="t" lIns="0" rIns="0" tIns="0" bIns="0">
+            <a:spAutoFit/>
+          </a:bodyPr>
+          <a:lstStyle/>
+          <a:p>
+            <a:pPr algn="l">
+              <a:lnSpc>
+                <a:spcPct val="100000"/>
+              </a:lnSpc>
+            </a:pPr>
+            <a:r>
+              <a:rPr sz="1150" b="1" i="0">
+                <a:solidFill>
+                  <a:srgbClr val="1B3A5C"/>
+                </a:solidFill>
+                <a:latin typeface="Calibri"/>
+              </a:rPr>
+              <a:t>Stage 0 · G4 prediction</a:t>
+            </a:r>
+          </a:p>
+        </p:txBody>
+      </p:sp>
+      <p:sp>
+        <p:nvSpPr>
+          <p:cNvPr id="8" name="TextBox 7"/>
+          <p:cNvSpPr txBox="1"/>
+          <p:nvPr/>
+        </p:nvSpPr>
+        <p:spPr>
+          <a:xfrm>
+            <a:off x="3383280" y="1357884"/>
+            <a:ext cx="2057400" cy="274320"/>
+          </a:xfrm>
+          <a:prstGeom prst="rect">
+            <a:avLst/>
+          </a:prstGeom>
+          <a:noFill/>
+        </p:spPr>
+        <p:txBody>
+          <a:bodyPr wrap="square" anchor="t" lIns="0" rIns="0" tIns="0" bIns="0">
+            <a:spAutoFit/>
+          </a:bodyPr>
+          <a:lstStyle/>
+          <a:p>
+            <a:pPr algn="l">
+              <a:lnSpc>
+                <a:spcPct val="100000"/>
+              </a:lnSpc>
+            </a:pPr>
+            <a:r>
+              <a:rPr sz="1150" b="0" i="0">
+                <a:solidFill>
+                  <a:srgbClr val="5A6670"/>
+                </a:solidFill>
+                <a:latin typeface="Calibri"/>
+              </a:rPr>
+              <a:t>G4Hunter</a:t>
+            </a:r>
+          </a:p>
+        </p:txBody>
+      </p:sp>
+      <p:sp>
+        <p:nvSpPr>
+          <p:cNvPr id="9" name="TextBox 8"/>
+          <p:cNvSpPr txBox="1"/>
+          <p:nvPr/>
+        </p:nvSpPr>
+        <p:spPr>
+          <a:xfrm>
+            <a:off x="5577840" y="1357884"/>
+            <a:ext cx="6035040" cy="274320"/>
+          </a:xfrm>
+          <a:prstGeom prst="rect">
+            <a:avLst/>
+          </a:prstGeom>
+          <a:noFill/>
+        </p:spPr>
+        <p:txBody>
+          <a:bodyPr wrap="square" anchor="t" lIns="0" rIns="0" tIns="0" bIns="0">
+            <a:spAutoFit/>
+          </a:bodyPr>
+          <a:lstStyle/>
+          <a:p>
+            <a:pPr algn="l">
+              <a:lnSpc>
+                <a:spcPct val="100000"/>
+              </a:lnSpc>
+            </a:pPr>
+            <a:r>
+              <a:rPr sz="1150" b="0" i="0">
+                <a:solidFill>
+                  <a:srgbClr val="222A30"/>
+                </a:solidFill>
+                <a:latin typeface="Consolas"/>
+              </a:rPr>
+              <a:t>window 25 · |score| ≥ 1.2 · flank 100 nt</a:t>
+            </a:r>
+          </a:p>
+        </p:txBody>
+      </p:sp>
+      <p:sp>
+        <p:nvSpPr>
+          <p:cNvPr id="10" name="TextBox 9"/>
+          <p:cNvSpPr txBox="1"/>
+          <p:nvPr/>
+        </p:nvSpPr>
+        <p:spPr>
+          <a:xfrm>
+            <a:off x="3383280" y="1700784"/>
+            <a:ext cx="2057400" cy="274320"/>
+          </a:xfrm>
+          <a:prstGeom prst="rect">
+            <a:avLst/>
+          </a:prstGeom>
+          <a:noFill/>
+        </p:spPr>
+        <p:txBody>
+          <a:bodyPr wrap="square" anchor="t" lIns="0" rIns="0" tIns="0" bIns="0">
+            <a:spAutoFit/>
+          </a:bodyPr>
+          <a:lstStyle/>
+          <a:p>
+            <a:pPr algn="l">
+              <a:lnSpc>
+                <a:spcPct val="100000"/>
+              </a:lnSpc>
+            </a:pPr>
+            <a:r>
+              <a:rPr sz="1150" b="0" i="0">
+                <a:solidFill>
+                  <a:srgbClr val="5A6670"/>
+                </a:solidFill>
+                <a:latin typeface="Calibri"/>
+              </a:rPr>
+              <a:t>regex motif</a:t>
+            </a:r>
+          </a:p>
+        </p:txBody>
+      </p:sp>
+      <p:sp>
+        <p:nvSpPr>
+          <p:cNvPr id="11" name="TextBox 10"/>
+          <p:cNvSpPr txBox="1"/>
+          <p:nvPr/>
+        </p:nvSpPr>
+        <p:spPr>
+          <a:xfrm>
+            <a:off x="5577840" y="1700784"/>
+            <a:ext cx="6035040" cy="274320"/>
+          </a:xfrm>
+          <a:prstGeom prst="rect">
+            <a:avLst/>
+          </a:prstGeom>
+          <a:noFill/>
+        </p:spPr>
+        <p:txBody>
+          <a:bodyPr wrap="square" anchor="t" lIns="0" rIns="0" tIns="0" bIns="0">
+            <a:spAutoFit/>
+          </a:bodyPr>
+          <a:lstStyle/>
+          <a:p>
+            <a:pPr algn="l">
+              <a:lnSpc>
+                <a:spcPct val="100000"/>
+              </a:lnSpc>
+            </a:pPr>
+            <a:r>
+              <a:rPr sz="1150" b="0" i="0">
+                <a:solidFill>
+                  <a:srgbClr val="222A30"/>
+                </a:solidFill>
+                <a:latin typeface="Consolas"/>
+              </a:rPr>
+              <a:t>enabled · concordance at ≥ 80% overlap</a:t>
+            </a:r>
+          </a:p>
+        </p:txBody>
+      </p:sp>
+      <p:sp>
+        <p:nvSpPr>
+          <p:cNvPr id="12" name="Rectangle 11"/>
+          <p:cNvSpPr/>
+          <p:nvPr/>
+        </p:nvSpPr>
+        <p:spPr>
+          <a:xfrm>
+            <a:off x="502920" y="1965960"/>
+            <a:ext cx="11201400" cy="342900"/>
+          </a:xfrm>
+          <a:prstGeom prst="rect">
+            <a:avLst/>
+          </a:prstGeom>
+          <a:solidFill>
+            <a:srgbClr val="EEF1F3"/>
+          </a:solidFill>
+          <a:ln>
+            <a:noFill/>
+          </a:ln>
+          <a:effectLst/>
+        </p:spPr>
+        <p:style>
+          <a:lnRef idx="1">
+            <a:schemeClr val="accent1"/>
+          </a:lnRef>
+          <a:fillRef idx="3">
+            <a:schemeClr val="accent1"/>
+          </a:fillRef>
+          <a:effectRef idx="2">
+            <a:schemeClr val="accent1"/>
+          </a:effectRef>
+          <a:fontRef idx="minor">
+            <a:schemeClr val="lt1"/>
+          </a:fontRef>
+        </p:style>
+        <p:txBody>
+          <a:bodyPr rtlCol="0" anchor="ctr"/>
+          <a:lstStyle/>
+          <a:p>
+            <a:pPr algn="ctr"/>
+          </a:p>
+        </p:txBody>
+      </p:sp>
+      <p:sp>
+        <p:nvSpPr>
+          <p:cNvPr id="13" name="TextBox 12"/>
+          <p:cNvSpPr txBox="1"/>
+          <p:nvPr/>
+        </p:nvSpPr>
+        <p:spPr>
+          <a:xfrm>
+            <a:off x="3383280" y="2043684"/>
+            <a:ext cx="2057400" cy="274320"/>
+          </a:xfrm>
+          <a:prstGeom prst="rect">
+            <a:avLst/>
+          </a:prstGeom>
+          <a:noFill/>
+        </p:spPr>
+        <p:txBody>
+          <a:bodyPr wrap="square" anchor="t" lIns="0" rIns="0" tIns="0" bIns="0">
+            <a:spAutoFit/>
+          </a:bodyPr>
+          <a:lstStyle/>
+          <a:p>
+            <a:pPr algn="l">
+              <a:lnSpc>
+                <a:spcPct val="100000"/>
+              </a:lnSpc>
+            </a:pPr>
+            <a:r>
+              <a:rPr sz="1150" b="0" i="0">
+                <a:solidFill>
+                  <a:srgbClr val="5A6670"/>
+                </a:solidFill>
+                <a:latin typeface="Calibri"/>
+              </a:rPr>
+              <a:t>not used</a:t>
+            </a:r>
+          </a:p>
+        </p:txBody>
+      </p:sp>
+      <p:sp>
+        <p:nvSpPr>
+          <p:cNvPr id="14" name="TextBox 13"/>
+          <p:cNvSpPr txBox="1"/>
+          <p:nvPr/>
+        </p:nvSpPr>
+        <p:spPr>
+          <a:xfrm>
+            <a:off x="5577840" y="2043684"/>
+            <a:ext cx="6035040" cy="274320"/>
+          </a:xfrm>
+          <a:prstGeom prst="rect">
+            <a:avLst/>
+          </a:prstGeom>
+          <a:noFill/>
+        </p:spPr>
+        <p:txBody>
+          <a:bodyPr wrap="square" anchor="t" lIns="0" rIns="0" tIns="0" bIns="0">
+            <a:spAutoFit/>
+          </a:bodyPr>
+          <a:lstStyle/>
+          <a:p>
+            <a:pPr algn="l">
+              <a:lnSpc>
+                <a:spcPct val="100000"/>
+              </a:lnSpc>
+            </a:pPr>
+            <a:r>
+              <a:rPr sz="1150" b="0" i="0">
+                <a:solidFill>
+                  <a:srgbClr val="222A30"/>
+                </a:solidFill>
+                <a:latin typeface="Consolas"/>
+              </a:rPr>
+              <a:t>G4RNA screener (Python 2 only) · pqsfinder (DNA-scoped)</a:t>
+            </a:r>
+          </a:p>
+        </p:txBody>
+      </p:sp>
+      <p:sp>
+        <p:nvSpPr>
+          <p:cNvPr id="15" name="TextBox 14"/>
+          <p:cNvSpPr txBox="1"/>
+          <p:nvPr/>
+        </p:nvSpPr>
+        <p:spPr>
+          <a:xfrm>
+            <a:off x="658368" y="2386584"/>
+            <a:ext cx="2606040" cy="274320"/>
+          </a:xfrm>
+          <a:prstGeom prst="rect">
+            <a:avLst/>
+          </a:prstGeom>
+          <a:noFill/>
+        </p:spPr>
+        <p:txBody>
+          <a:bodyPr wrap="square" anchor="t" lIns="0" rIns="0" tIns="0" bIns="0">
+            <a:spAutoFit/>
+          </a:bodyPr>
+          <a:lstStyle/>
+          <a:p>
+            <a:pPr algn="l">
+              <a:lnSpc>
+                <a:spcPct val="100000"/>
+              </a:lnSpc>
+            </a:pPr>
+            <a:r>
+              <a:rPr sz="1150" b="1" i="0">
+                <a:solidFill>
+                  <a:srgbClr val="1B3A5C"/>
+                </a:solidFill>
+                <a:latin typeface="Calibri"/>
+              </a:rPr>
+              <a:t>Stage 1 · QC</a:t>
+            </a:r>
+          </a:p>
+        </p:txBody>
+      </p:sp>
+      <p:sp>
+        <p:nvSpPr>
+          <p:cNvPr id="16" name="TextBox 15"/>
+          <p:cNvSpPr txBox="1"/>
+          <p:nvPr/>
+        </p:nvSpPr>
+        <p:spPr>
+          <a:xfrm>
+            <a:off x="3383280" y="2386584"/>
+            <a:ext cx="2057400" cy="274320"/>
+          </a:xfrm>
+          <a:prstGeom prst="rect">
+            <a:avLst/>
+          </a:prstGeom>
+          <a:noFill/>
+        </p:spPr>
+        <p:txBody>
+          <a:bodyPr wrap="square" anchor="t" lIns="0" rIns="0" tIns="0" bIns="0">
+            <a:spAutoFit/>
+          </a:bodyPr>
+          <a:lstStyle/>
+          <a:p>
+            <a:pPr algn="l">
+              <a:lnSpc>
+                <a:spcPct val="100000"/>
+              </a:lnSpc>
+            </a:pPr>
+            <a:r>
+              <a:rPr sz="1150" b="0" i="0">
+                <a:solidFill>
+                  <a:srgbClr val="5A6670"/>
+                </a:solidFill>
+                <a:latin typeface="Calibri"/>
+              </a:rPr>
+              <a:t>thresholds</a:t>
+            </a:r>
+          </a:p>
+        </p:txBody>
+      </p:sp>
+      <p:sp>
+        <p:nvSpPr>
+          <p:cNvPr id="17" name="TextBox 16"/>
+          <p:cNvSpPr txBox="1"/>
+          <p:nvPr/>
+        </p:nvSpPr>
+        <p:spPr>
+          <a:xfrm>
+            <a:off x="5577840" y="2386584"/>
+            <a:ext cx="6035040" cy="274320"/>
+          </a:xfrm>
+          <a:prstGeom prst="rect">
+            <a:avLst/>
+          </a:prstGeom>
+          <a:noFill/>
+        </p:spPr>
+        <p:txBody>
+          <a:bodyPr wrap="square" anchor="t" lIns="0" rIns="0" tIns="0" bIns="0">
+            <a:spAutoFit/>
+          </a:bodyPr>
+          <a:lstStyle/>
+          <a:p>
+            <a:pPr algn="l">
+              <a:lnSpc>
+                <a:spcPct val="100000"/>
+              </a:lnSpc>
+            </a:pPr>
+            <a:r>
+              <a:rPr sz="1150" b="0" i="0">
+                <a:solidFill>
+                  <a:srgbClr val="222A30"/>
+                </a:solidFill>
+                <a:latin typeface="Consolas"/>
+              </a:rPr>
+              <a:t>completeness ≥ 0.90 · N ≤ 0.05 · year-precision date</a:t>
+            </a:r>
+          </a:p>
+        </p:txBody>
+      </p:sp>
+      <p:sp>
+        <p:nvSpPr>
+          <p:cNvPr id="18" name="Rectangle 17"/>
+          <p:cNvSpPr/>
+          <p:nvPr/>
+        </p:nvSpPr>
+        <p:spPr>
+          <a:xfrm>
+            <a:off x="502920" y="2651760"/>
+            <a:ext cx="11201400" cy="342900"/>
+          </a:xfrm>
+          <a:prstGeom prst="rect">
+            <a:avLst/>
+          </a:prstGeom>
+          <a:solidFill>
+            <a:srgbClr val="EEF1F3"/>
+          </a:solidFill>
+          <a:ln>
+            <a:noFill/>
+          </a:ln>
+          <a:effectLst/>
+        </p:spPr>
+        <p:style>
+          <a:lnRef idx="1">
+            <a:schemeClr val="accent1"/>
+          </a:lnRef>
+          <a:fillRef idx="3">
+            <a:schemeClr val="accent1"/>
+          </a:fillRef>
+          <a:effectRef idx="2">
+            <a:schemeClr val="accent1"/>
+          </a:effectRef>
+          <a:fontRef idx="minor">
+            <a:schemeClr val="lt1"/>
+          </a:fontRef>
+        </p:style>
+        <p:txBody>
+          <a:bodyPr rtlCol="0" anchor="ctr"/>
+          <a:lstStyle/>
+          <a:p>
+            <a:pPr algn="ctr"/>
+          </a:p>
+        </p:txBody>
+      </p:sp>
+      <p:sp>
+        <p:nvSpPr>
+          <p:cNvPr id="19" name="TextBox 18"/>
+          <p:cNvSpPr txBox="1"/>
+          <p:nvPr/>
+        </p:nvSpPr>
+        <p:spPr>
+          <a:xfrm>
+            <a:off x="658368" y="2729484"/>
+            <a:ext cx="2606040" cy="274320"/>
+          </a:xfrm>
+          <a:prstGeom prst="rect">
+            <a:avLst/>
+          </a:prstGeom>
+          <a:noFill/>
+        </p:spPr>
+        <p:txBody>
+          <a:bodyPr wrap="square" anchor="t" lIns="0" rIns="0" tIns="0" bIns="0">
+            <a:spAutoFit/>
+          </a:bodyPr>
+          <a:lstStyle/>
+          <a:p>
+            <a:pPr algn="l">
+              <a:lnSpc>
+                <a:spcPct val="100000"/>
+              </a:lnSpc>
+            </a:pPr>
+            <a:r>
+              <a:rPr sz="1150" b="1" i="0">
+                <a:solidFill>
+                  <a:srgbClr val="1B3A5C"/>
+                </a:solidFill>
+                <a:latin typeface="Calibri"/>
+              </a:rPr>
+              <a:t>Stage 1 · Alignment</a:t>
+            </a:r>
+          </a:p>
+        </p:txBody>
+      </p:sp>
+      <p:sp>
+        <p:nvSpPr>
+          <p:cNvPr id="20" name="TextBox 19"/>
+          <p:cNvSpPr txBox="1"/>
+          <p:nvPr/>
+        </p:nvSpPr>
+        <p:spPr>
+          <a:xfrm>
+            <a:off x="3383280" y="2729484"/>
+            <a:ext cx="2057400" cy="274320"/>
+          </a:xfrm>
+          <a:prstGeom prst="rect">
+            <a:avLst/>
+          </a:prstGeom>
+          <a:noFill/>
+        </p:spPr>
+        <p:txBody>
+          <a:bodyPr wrap="square" anchor="t" lIns="0" rIns="0" tIns="0" bIns="0">
+            <a:spAutoFit/>
+          </a:bodyPr>
+          <a:lstStyle/>
+          <a:p>
+            <a:pPr algn="l">
+              <a:lnSpc>
+                <a:spcPct val="100000"/>
+              </a:lnSpc>
+            </a:pPr>
+            <a:r>
+              <a:rPr sz="1150" b="0" i="0">
+                <a:solidFill>
+                  <a:srgbClr val="5A6670"/>
+                </a:solidFill>
+                <a:latin typeface="Calibri"/>
+              </a:rPr>
+              <a:t>MAFFT v7.526</a:t>
+            </a:r>
+          </a:p>
+        </p:txBody>
+      </p:sp>
+      <p:sp>
+        <p:nvSpPr>
+          <p:cNvPr id="21" name="TextBox 20"/>
+          <p:cNvSpPr txBox="1"/>
+          <p:nvPr/>
+        </p:nvSpPr>
+        <p:spPr>
+          <a:xfrm>
+            <a:off x="5577840" y="2729484"/>
+            <a:ext cx="6035040" cy="274320"/>
+          </a:xfrm>
+          <a:prstGeom prst="rect">
+            <a:avLst/>
+          </a:prstGeom>
+          <a:noFill/>
+        </p:spPr>
+        <p:txBody>
+          <a:bodyPr wrap="square" anchor="t" lIns="0" rIns="0" tIns="0" bIns="0">
+            <a:spAutoFit/>
+          </a:bodyPr>
+          <a:lstStyle/>
+          <a:p>
+            <a:pPr algn="l">
+              <a:lnSpc>
+                <a:spcPct val="100000"/>
+              </a:lnSpc>
+            </a:pPr>
+            <a:r>
+              <a:rPr sz="1150" b="0" i="0">
+                <a:solidFill>
+                  <a:srgbClr val="222A30"/>
+                </a:solidFill>
+                <a:latin typeface="Consolas"/>
+              </a:rPr>
+              <a:t>--auto --keeplength --addfragments · gap cap 0.50</a:t>
+            </a:r>
+          </a:p>
+        </p:txBody>
+      </p:sp>
+      <p:sp>
+        <p:nvSpPr>
+          <p:cNvPr id="22" name="TextBox 21"/>
+          <p:cNvSpPr txBox="1"/>
+          <p:nvPr/>
+        </p:nvSpPr>
+        <p:spPr>
+          <a:xfrm>
+            <a:off x="658368" y="3072384"/>
+            <a:ext cx="2606040" cy="274320"/>
+          </a:xfrm>
+          <a:prstGeom prst="rect">
+            <a:avLst/>
+          </a:prstGeom>
+          <a:noFill/>
+        </p:spPr>
+        <p:txBody>
+          <a:bodyPr wrap="square" anchor="t" lIns="0" rIns="0" tIns="0" bIns="0">
+            <a:spAutoFit/>
+          </a:bodyPr>
+          <a:lstStyle/>
+          <a:p>
+            <a:pPr algn="l">
+              <a:lnSpc>
+                <a:spcPct val="100000"/>
+              </a:lnSpc>
+            </a:pPr>
+            <a:r>
+              <a:rPr sz="1150" b="1" i="0">
+                <a:solidFill>
+                  <a:srgbClr val="1B3A5C"/>
+                </a:solidFill>
+                <a:latin typeface="Calibri"/>
+              </a:rPr>
+              <a:t>Stage 1.5 · Recombination</a:t>
+            </a:r>
+          </a:p>
+        </p:txBody>
+      </p:sp>
+      <p:sp>
+        <p:nvSpPr>
+          <p:cNvPr id="23" name="TextBox 22"/>
+          <p:cNvSpPr txBox="1"/>
+          <p:nvPr/>
+        </p:nvSpPr>
+        <p:spPr>
+          <a:xfrm>
+            <a:off x="3383280" y="3072384"/>
+            <a:ext cx="2057400" cy="274320"/>
+          </a:xfrm>
+          <a:prstGeom prst="rect">
+            <a:avLst/>
+          </a:prstGeom>
+          <a:noFill/>
+        </p:spPr>
+        <p:txBody>
+          <a:bodyPr wrap="square" anchor="t" lIns="0" rIns="0" tIns="0" bIns="0">
+            <a:spAutoFit/>
+          </a:bodyPr>
+          <a:lstStyle/>
+          <a:p>
+            <a:pPr algn="l">
+              <a:lnSpc>
+                <a:spcPct val="100000"/>
+              </a:lnSpc>
+            </a:pPr>
+            <a:r>
+              <a:rPr sz="1150" b="0" i="0">
+                <a:solidFill>
+                  <a:srgbClr val="5A6670"/>
+                </a:solidFill>
+                <a:latin typeface="Calibri"/>
+              </a:rPr>
+              <a:t>PhiPack Φ</a:t>
+            </a:r>
+          </a:p>
+        </p:txBody>
+      </p:sp>
+      <p:sp>
+        <p:nvSpPr>
+          <p:cNvPr id="24" name="TextBox 23"/>
+          <p:cNvSpPr txBox="1"/>
+          <p:nvPr/>
+        </p:nvSpPr>
+        <p:spPr>
+          <a:xfrm>
+            <a:off x="5577840" y="3072384"/>
+            <a:ext cx="6035040" cy="274320"/>
+          </a:xfrm>
+          <a:prstGeom prst="rect">
+            <a:avLst/>
+          </a:prstGeom>
+          <a:noFill/>
+        </p:spPr>
+        <p:txBody>
+          <a:bodyPr wrap="square" anchor="t" lIns="0" rIns="0" tIns="0" bIns="0">
+            <a:spAutoFit/>
+          </a:bodyPr>
+          <a:lstStyle/>
+          <a:p>
+            <a:pPr algn="l">
+              <a:lnSpc>
+                <a:spcPct val="100000"/>
+              </a:lnSpc>
+            </a:pPr>
+            <a:r>
+              <a:rPr sz="1150" b="0" i="0">
+                <a:solidFill>
+                  <a:srgbClr val="222A30"/>
+                </a:solidFill>
+                <a:latin typeface="Consolas"/>
+              </a:rPr>
+              <a:t>α = 0.05 · mandatory · tier: standard</a:t>
+            </a:r>
+          </a:p>
+        </p:txBody>
+      </p:sp>
+      <p:sp>
+        <p:nvSpPr>
+          <p:cNvPr id="25" name="Rectangle 24"/>
+          <p:cNvSpPr/>
+          <p:nvPr/>
+        </p:nvSpPr>
+        <p:spPr>
+          <a:xfrm>
+            <a:off x="502920" y="3337560"/>
+            <a:ext cx="11201400" cy="342900"/>
+          </a:xfrm>
+          <a:prstGeom prst="rect">
+            <a:avLst/>
+          </a:prstGeom>
+          <a:solidFill>
+            <a:srgbClr val="EEF1F3"/>
+          </a:solidFill>
+          <a:ln>
+            <a:noFill/>
+          </a:ln>
+          <a:effectLst/>
+        </p:spPr>
+        <p:style>
+          <a:lnRef idx="1">
+            <a:schemeClr val="accent1"/>
+          </a:lnRef>
+          <a:fillRef idx="3">
+            <a:schemeClr val="accent1"/>
+          </a:fillRef>
+          <a:effectRef idx="2">
+            <a:schemeClr val="accent1"/>
+          </a:effectRef>
+          <a:fontRef idx="minor">
+            <a:schemeClr val="lt1"/>
+          </a:fontRef>
+        </p:style>
+        <p:txBody>
+          <a:bodyPr rtlCol="0" anchor="ctr"/>
+          <a:lstStyle/>
+          <a:p>
+            <a:pPr algn="ctr"/>
+          </a:p>
+        </p:txBody>
+      </p:sp>
+      <p:sp>
+        <p:nvSpPr>
+          <p:cNvPr id="26" name="TextBox 25"/>
+          <p:cNvSpPr txBox="1"/>
+          <p:nvPr/>
+        </p:nvSpPr>
+        <p:spPr>
+          <a:xfrm>
+            <a:off x="658368" y="3415284"/>
+            <a:ext cx="2606040" cy="274320"/>
+          </a:xfrm>
+          <a:prstGeom prst="rect">
+            <a:avLst/>
+          </a:prstGeom>
+          <a:noFill/>
+        </p:spPr>
+        <p:txBody>
+          <a:bodyPr wrap="square" anchor="t" lIns="0" rIns="0" tIns="0" bIns="0">
+            <a:spAutoFit/>
+          </a:bodyPr>
+          <a:lstStyle/>
+          <a:p>
+            <a:pPr algn="l">
+              <a:lnSpc>
+                <a:spcPct val="100000"/>
+              </a:lnSpc>
+            </a:pPr>
+            <a:r>
+              <a:rPr sz="1150" b="1" i="0">
+                <a:solidFill>
+                  <a:srgbClr val="1B3A5C"/>
+                </a:solidFill>
+                <a:latin typeface="Calibri"/>
+              </a:rPr>
+              <a:t>Stage 2 · Phylogeny</a:t>
+            </a:r>
+          </a:p>
+        </p:txBody>
+      </p:sp>
+      <p:sp>
+        <p:nvSpPr>
+          <p:cNvPr id="27" name="TextBox 26"/>
+          <p:cNvSpPr txBox="1"/>
+          <p:nvPr/>
+        </p:nvSpPr>
+        <p:spPr>
+          <a:xfrm>
+            <a:off x="3383280" y="3415284"/>
+            <a:ext cx="2057400" cy="274320"/>
+          </a:xfrm>
+          <a:prstGeom prst="rect">
+            <a:avLst/>
+          </a:prstGeom>
+          <a:noFill/>
+        </p:spPr>
+        <p:txBody>
+          <a:bodyPr wrap="square" anchor="t" lIns="0" rIns="0" tIns="0" bIns="0">
+            <a:spAutoFit/>
+          </a:bodyPr>
+          <a:lstStyle/>
+          <a:p>
+            <a:pPr algn="l">
+              <a:lnSpc>
+                <a:spcPct val="100000"/>
+              </a:lnSpc>
+            </a:pPr>
+            <a:r>
+              <a:rPr sz="1150" b="0" i="0">
+                <a:solidFill>
+                  <a:srgbClr val="5A6670"/>
+                </a:solidFill>
+                <a:latin typeface="Calibri"/>
+              </a:rPr>
+              <a:t>IQ-TREE 2.3.6</a:t>
+            </a:r>
+          </a:p>
+        </p:txBody>
+      </p:sp>
+      <p:sp>
+        <p:nvSpPr>
+          <p:cNvPr id="28" name="TextBox 27"/>
+          <p:cNvSpPr txBox="1"/>
+          <p:nvPr/>
+        </p:nvSpPr>
+        <p:spPr>
+          <a:xfrm>
+            <a:off x="5577840" y="3415284"/>
+            <a:ext cx="6035040" cy="274320"/>
+          </a:xfrm>
+          <a:prstGeom prst="rect">
+            <a:avLst/>
+          </a:prstGeom>
+          <a:noFill/>
+        </p:spPr>
+        <p:txBody>
+          <a:bodyPr wrap="square" anchor="t" lIns="0" rIns="0" tIns="0" bIns="0">
+            <a:spAutoFit/>
+          </a:bodyPr>
+          <a:lstStyle/>
+          <a:p>
+            <a:pPr algn="l">
+              <a:lnSpc>
+                <a:spcPct val="100000"/>
+              </a:lnSpc>
+            </a:pPr>
+            <a:r>
+              <a:rPr sz="1150" b="0" i="0">
+                <a:solidFill>
+                  <a:srgbClr val="222A30"/>
+                </a:solidFill>
+                <a:latin typeface="Consolas"/>
+              </a:rPr>
+              <a:t>GTR+F+I+G4 · 1,000 UFBoot · seed 20250823</a:t>
+            </a:r>
+          </a:p>
+        </p:txBody>
+      </p:sp>
+      <p:sp>
+        <p:nvSpPr>
+          <p:cNvPr id="29" name="TextBox 28"/>
+          <p:cNvSpPr txBox="1"/>
+          <p:nvPr/>
+        </p:nvSpPr>
+        <p:spPr>
+          <a:xfrm>
+            <a:off x="3383280" y="3758184"/>
+            <a:ext cx="2057400" cy="274320"/>
+          </a:xfrm>
+          <a:prstGeom prst="rect">
+            <a:avLst/>
+          </a:prstGeom>
+          <a:noFill/>
+        </p:spPr>
+        <p:txBody>
+          <a:bodyPr wrap="square" anchor="t" lIns="0" rIns="0" tIns="0" bIns="0">
+            <a:spAutoFit/>
+          </a:bodyPr>
+          <a:lstStyle/>
+          <a:p>
+            <a:pPr algn="l">
+              <a:lnSpc>
+                <a:spcPct val="100000"/>
+              </a:lnSpc>
+            </a:pPr>
+            <a:r>
+              <a:rPr sz="1150" b="0" i="0">
+                <a:solidFill>
+                  <a:srgbClr val="5A6670"/>
+                </a:solidFill>
+                <a:latin typeface="Calibri"/>
+              </a:rPr>
+              <a:t>TreeTime 0.11.4</a:t>
+            </a:r>
+          </a:p>
+        </p:txBody>
+      </p:sp>
+      <p:sp>
+        <p:nvSpPr>
+          <p:cNvPr id="30" name="TextBox 29"/>
+          <p:cNvSpPr txBox="1"/>
+          <p:nvPr/>
+        </p:nvSpPr>
+        <p:spPr>
+          <a:xfrm>
+            <a:off x="5577840" y="3758184"/>
+            <a:ext cx="6035040" cy="274320"/>
+          </a:xfrm>
+          <a:prstGeom prst="rect">
+            <a:avLst/>
+          </a:prstGeom>
+          <a:noFill/>
+        </p:spPr>
+        <p:txBody>
+          <a:bodyPr wrap="square" anchor="t" lIns="0" rIns="0" tIns="0" bIns="0">
+            <a:spAutoFit/>
+          </a:bodyPr>
+          <a:lstStyle/>
+          <a:p>
+            <a:pPr algn="l">
+              <a:lnSpc>
+                <a:spcPct val="100000"/>
+              </a:lnSpc>
+            </a:pPr>
+            <a:r>
+              <a:rPr sz="1150" b="0" i="0">
+                <a:solidFill>
+                  <a:srgbClr val="222A30"/>
+                </a:solidFill>
+                <a:latin typeface="Consolas"/>
+              </a:rPr>
+              <a:t>least-squares reroot · clock filter 3.0 IQD</a:t>
+            </a:r>
+          </a:p>
+        </p:txBody>
+      </p:sp>
+      <p:sp>
+        <p:nvSpPr>
+          <p:cNvPr id="31" name="Rectangle 30"/>
+          <p:cNvSpPr/>
+          <p:nvPr/>
+        </p:nvSpPr>
+        <p:spPr>
+          <a:xfrm>
+            <a:off x="502920" y="4023360"/>
+            <a:ext cx="11201400" cy="342900"/>
+          </a:xfrm>
+          <a:prstGeom prst="rect">
+            <a:avLst/>
+          </a:prstGeom>
+          <a:solidFill>
+            <a:srgbClr val="EEF1F3"/>
+          </a:solidFill>
+          <a:ln>
+            <a:noFill/>
+          </a:ln>
+          <a:effectLst/>
+        </p:spPr>
+        <p:style>
+          <a:lnRef idx="1">
+            <a:schemeClr val="accent1"/>
+          </a:lnRef>
+          <a:fillRef idx="3">
+            <a:schemeClr val="accent1"/>
+          </a:fillRef>
+          <a:effectRef idx="2">
+            <a:schemeClr val="accent1"/>
+          </a:effectRef>
+          <a:fontRef idx="minor">
+            <a:schemeClr val="lt1"/>
+          </a:fontRef>
+        </p:style>
+        <p:txBody>
+          <a:bodyPr rtlCol="0" anchor="ctr"/>
+          <a:lstStyle/>
+          <a:p>
+            <a:pPr algn="ctr"/>
+          </a:p>
+        </p:txBody>
+      </p:sp>
+      <p:sp>
+        <p:nvSpPr>
+          <p:cNvPr id="32" name="TextBox 31"/>
+          <p:cNvSpPr txBox="1"/>
+          <p:nvPr/>
+        </p:nvSpPr>
+        <p:spPr>
+          <a:xfrm>
+            <a:off x="3383280" y="4101084"/>
+            <a:ext cx="2057400" cy="274320"/>
+          </a:xfrm>
+          <a:prstGeom prst="rect">
+            <a:avLst/>
+          </a:prstGeom>
+          <a:noFill/>
+        </p:spPr>
+        <p:txBody>
+          <a:bodyPr wrap="square" anchor="t" lIns="0" rIns="0" tIns="0" bIns="0">
+            <a:spAutoFit/>
+          </a:bodyPr>
+          <a:lstStyle/>
+          <a:p>
+            <a:pPr algn="l">
+              <a:lnSpc>
+                <a:spcPct val="100000"/>
+              </a:lnSpc>
+            </a:pPr>
+            <a:r>
+              <a:rPr sz="1150" b="0" i="0">
+                <a:solidFill>
+                  <a:srgbClr val="5A6670"/>
+                </a:solidFill>
+                <a:latin typeface="Calibri"/>
+              </a:rPr>
+              <a:t>ancestral states</a:t>
+            </a:r>
+          </a:p>
+        </p:txBody>
+      </p:sp>
+      <p:sp>
+        <p:nvSpPr>
+          <p:cNvPr id="33" name="TextBox 32"/>
+          <p:cNvSpPr txBox="1"/>
+          <p:nvPr/>
+        </p:nvSpPr>
+        <p:spPr>
+          <a:xfrm>
+            <a:off x="5577840" y="4101084"/>
+            <a:ext cx="6035040" cy="274320"/>
+          </a:xfrm>
+          <a:prstGeom prst="rect">
+            <a:avLst/>
+          </a:prstGeom>
+          <a:noFill/>
+        </p:spPr>
+        <p:txBody>
+          <a:bodyPr wrap="square" anchor="t" lIns="0" rIns="0" tIns="0" bIns="0">
+            <a:spAutoFit/>
+          </a:bodyPr>
+          <a:lstStyle/>
+          <a:p>
+            <a:pPr algn="l">
+              <a:lnSpc>
+                <a:spcPct val="100000"/>
+              </a:lnSpc>
+            </a:pPr>
+            <a:r>
+              <a:rPr sz="1150" b="0" i="0">
+                <a:solidFill>
+                  <a:srgbClr val="222A30"/>
+                </a:solidFill>
+                <a:latin typeface="Consolas"/>
+              </a:rPr>
+              <a:t>ape::ace on the DIVERGENCE tree, not the timetree</a:t>
+            </a:r>
+          </a:p>
+        </p:txBody>
+      </p:sp>
+      <p:sp>
+        <p:nvSpPr>
+          <p:cNvPr id="34" name="TextBox 33"/>
+          <p:cNvSpPr txBox="1"/>
+          <p:nvPr/>
+        </p:nvSpPr>
+        <p:spPr>
+          <a:xfrm>
+            <a:off x="658368" y="4443984"/>
+            <a:ext cx="2606040" cy="274320"/>
+          </a:xfrm>
+          <a:prstGeom prst="rect">
+            <a:avLst/>
+          </a:prstGeom>
+          <a:noFill/>
+        </p:spPr>
+        <p:txBody>
+          <a:bodyPr wrap="square" anchor="t" lIns="0" rIns="0" tIns="0" bIns="0">
+            <a:spAutoFit/>
+          </a:bodyPr>
+          <a:lstStyle/>
+          <a:p>
+            <a:pPr algn="l">
+              <a:lnSpc>
+                <a:spcPct val="100000"/>
+              </a:lnSpc>
+            </a:pPr>
+            <a:r>
+              <a:rPr sz="1150" b="1" i="0">
+                <a:solidFill>
+                  <a:srgbClr val="1B3A5C"/>
+                </a:solidFill>
+                <a:latin typeface="Calibri"/>
+              </a:rPr>
+              <a:t>Stage 4 · Controls</a:t>
+            </a:r>
+          </a:p>
+        </p:txBody>
+      </p:sp>
+      <p:sp>
+        <p:nvSpPr>
+          <p:cNvPr id="35" name="TextBox 34"/>
+          <p:cNvSpPr txBox="1"/>
+          <p:nvPr/>
+        </p:nvSpPr>
+        <p:spPr>
+          <a:xfrm>
+            <a:off x="3383280" y="4443984"/>
+            <a:ext cx="2057400" cy="274320"/>
+          </a:xfrm>
+          <a:prstGeom prst="rect">
+            <a:avLst/>
+          </a:prstGeom>
+          <a:noFill/>
+        </p:spPr>
+        <p:txBody>
+          <a:bodyPr wrap="square" anchor="t" lIns="0" rIns="0" tIns="0" bIns="0">
+            <a:spAutoFit/>
+          </a:bodyPr>
+          <a:lstStyle/>
+          <a:p>
+            <a:pPr algn="l">
+              <a:lnSpc>
+                <a:spcPct val="100000"/>
+              </a:lnSpc>
+            </a:pPr>
+            <a:r>
+              <a:rPr sz="1150" b="0" i="0">
+                <a:solidFill>
+                  <a:srgbClr val="5A6670"/>
+                </a:solidFill>
+                <a:latin typeface="Calibri"/>
+              </a:rPr>
+              <a:t>per locus</a:t>
+            </a:r>
+          </a:p>
+        </p:txBody>
+      </p:sp>
+      <p:sp>
+        <p:nvSpPr>
+          <p:cNvPr id="36" name="TextBox 35"/>
+          <p:cNvSpPr txBox="1"/>
+          <p:nvPr/>
+        </p:nvSpPr>
+        <p:spPr>
+          <a:xfrm>
+            <a:off x="5577840" y="4443984"/>
+            <a:ext cx="6035040" cy="274320"/>
+          </a:xfrm>
+          <a:prstGeom prst="rect">
+            <a:avLst/>
+          </a:prstGeom>
+          <a:noFill/>
+        </p:spPr>
+        <p:txBody>
+          <a:bodyPr wrap="square" anchor="t" lIns="0" rIns="0" tIns="0" bIns="0">
+            <a:spAutoFit/>
+          </a:bodyPr>
+          <a:lstStyle/>
+          <a:p>
+            <a:pPr algn="l">
+              <a:lnSpc>
+                <a:spcPct val="100000"/>
+              </a:lnSpc>
+            </a:pPr>
+            <a:r>
+              <a:rPr sz="1150" b="0" i="0">
+                <a:solidFill>
+                  <a:srgbClr val="222A30"/>
+                </a:solidFill>
+                <a:latin typeface="Consolas"/>
+              </a:rPr>
+              <a:t>5 controls · length ±10% · GC ±5% · 50 nt buffer</a:t>
+            </a:r>
+          </a:p>
+        </p:txBody>
+      </p:sp>
+      <p:sp>
+        <p:nvSpPr>
+          <p:cNvPr id="37" name="Rectangle 36"/>
+          <p:cNvSpPr/>
+          <p:nvPr/>
+        </p:nvSpPr>
+        <p:spPr>
+          <a:xfrm>
+            <a:off x="502920" y="4709160"/>
+            <a:ext cx="11201400" cy="342900"/>
+          </a:xfrm>
+          <a:prstGeom prst="rect">
+            <a:avLst/>
+          </a:prstGeom>
+          <a:solidFill>
+            <a:srgbClr val="EEF1F3"/>
+          </a:solidFill>
+          <a:ln>
+            <a:noFill/>
+          </a:ln>
+          <a:effectLst/>
+        </p:spPr>
+        <p:style>
+          <a:lnRef idx="1">
+            <a:schemeClr val="accent1"/>
+          </a:lnRef>
+          <a:fillRef idx="3">
+            <a:schemeClr val="accent1"/>
+          </a:fillRef>
+          <a:effectRef idx="2">
+            <a:schemeClr val="accent1"/>
+          </a:effectRef>
+          <a:fontRef idx="minor">
+            <a:schemeClr val="lt1"/>
+          </a:fontRef>
+        </p:style>
+        <p:txBody>
+          <a:bodyPr rtlCol="0" anchor="ctr"/>
+          <a:lstStyle/>
+          <a:p>
+            <a:pPr algn="ctr"/>
+          </a:p>
+        </p:txBody>
+      </p:sp>
+      <p:sp>
+        <p:nvSpPr>
+          <p:cNvPr id="38" name="TextBox 37"/>
+          <p:cNvSpPr txBox="1"/>
+          <p:nvPr/>
+        </p:nvSpPr>
+        <p:spPr>
+          <a:xfrm>
+            <a:off x="3383280" y="4786884"/>
+            <a:ext cx="2057400" cy="274320"/>
+          </a:xfrm>
+          <a:prstGeom prst="rect">
+            <a:avLst/>
+          </a:prstGeom>
+          <a:noFill/>
+        </p:spPr>
+        <p:txBody>
+          <a:bodyPr wrap="square" anchor="t" lIns="0" rIns="0" tIns="0" bIns="0">
+            <a:spAutoFit/>
+          </a:bodyPr>
+          <a:lstStyle/>
+          <a:p>
+            <a:pPr algn="l">
+              <a:lnSpc>
+                <a:spcPct val="100000"/>
+              </a:lnSpc>
+            </a:pPr>
+            <a:r>
+              <a:rPr sz="1150" b="0" i="0">
+                <a:solidFill>
+                  <a:srgbClr val="5A6670"/>
+                </a:solidFill>
+                <a:latin typeface="Calibri"/>
+              </a:rPr>
+              <a:t>matched on</a:t>
+            </a:r>
+          </a:p>
+        </p:txBody>
+      </p:sp>
+      <p:sp>
+        <p:nvSpPr>
+          <p:cNvPr id="39" name="TextBox 38"/>
+          <p:cNvSpPr txBox="1"/>
+          <p:nvPr/>
+        </p:nvSpPr>
+        <p:spPr>
+          <a:xfrm>
+            <a:off x="5577840" y="4786884"/>
+            <a:ext cx="6035040" cy="274320"/>
+          </a:xfrm>
+          <a:prstGeom prst="rect">
+            <a:avLst/>
+          </a:prstGeom>
+          <a:noFill/>
+        </p:spPr>
+        <p:txBody>
+          <a:bodyPr wrap="square" anchor="t" lIns="0" rIns="0" tIns="0" bIns="0">
+            <a:spAutoFit/>
+          </a:bodyPr>
+          <a:lstStyle/>
+          <a:p>
+            <a:pPr algn="l">
+              <a:lnSpc>
+                <a:spcPct val="100000"/>
+              </a:lnSpc>
+            </a:pPr>
+            <a:r>
+              <a:rPr sz="1150" b="0" i="0">
+                <a:solidFill>
+                  <a:srgbClr val="222A30"/>
+                </a:solidFill>
+                <a:latin typeface="Consolas"/>
+              </a:rPr>
+              <a:t>the locus's own compartment (5'UTR / CDS / 3'UTR)</a:t>
+            </a:r>
+          </a:p>
+        </p:txBody>
+      </p:sp>
+      <p:sp>
+        <p:nvSpPr>
+          <p:cNvPr id="40" name="TextBox 39"/>
+          <p:cNvSpPr txBox="1"/>
+          <p:nvPr/>
+        </p:nvSpPr>
+        <p:spPr>
+          <a:xfrm>
+            <a:off x="658368" y="5129784"/>
+            <a:ext cx="2606040" cy="274320"/>
+          </a:xfrm>
+          <a:prstGeom prst="rect">
+            <a:avLst/>
+          </a:prstGeom>
+          <a:noFill/>
+        </p:spPr>
+        <p:txBody>
+          <a:bodyPr wrap="square" anchor="t" lIns="0" rIns="0" tIns="0" bIns="0">
+            <a:spAutoFit/>
+          </a:bodyPr>
+          <a:lstStyle/>
+          <a:p>
+            <a:pPr algn="l">
+              <a:lnSpc>
+                <a:spcPct val="100000"/>
+              </a:lnSpc>
+            </a:pPr>
+            <a:r>
+              <a:rPr sz="1150" b="1" i="0">
+                <a:solidFill>
+                  <a:srgbClr val="1B3A5C"/>
+                </a:solidFill>
+                <a:latin typeface="Calibri"/>
+              </a:rPr>
+              <a:t>Stage 4.5 · D.H1</a:t>
+            </a:r>
+          </a:p>
+        </p:txBody>
+      </p:sp>
+      <p:sp>
+        <p:nvSpPr>
+          <p:cNvPr id="41" name="TextBox 40"/>
+          <p:cNvSpPr txBox="1"/>
+          <p:nvPr/>
+        </p:nvSpPr>
+        <p:spPr>
+          <a:xfrm>
+            <a:off x="3383280" y="5129784"/>
+            <a:ext cx="2057400" cy="274320"/>
+          </a:xfrm>
+          <a:prstGeom prst="rect">
+            <a:avLst/>
+          </a:prstGeom>
+          <a:noFill/>
+        </p:spPr>
+        <p:txBody>
+          <a:bodyPr wrap="square" anchor="t" lIns="0" rIns="0" tIns="0" bIns="0">
+            <a:spAutoFit/>
+          </a:bodyPr>
+          <a:lstStyle/>
+          <a:p>
+            <a:pPr algn="l">
+              <a:lnSpc>
+                <a:spcPct val="100000"/>
+              </a:lnSpc>
+            </a:pPr>
+            <a:r>
+              <a:rPr sz="1150" b="0" i="0">
+                <a:solidFill>
+                  <a:srgbClr val="5A6670"/>
+                </a:solidFill>
+                <a:latin typeface="Calibri"/>
+              </a:rPr>
+              <a:t>tests</a:t>
+            </a:r>
+          </a:p>
+        </p:txBody>
+      </p:sp>
+      <p:sp>
+        <p:nvSpPr>
+          <p:cNvPr id="42" name="TextBox 41"/>
+          <p:cNvSpPr txBox="1"/>
+          <p:nvPr/>
+        </p:nvSpPr>
+        <p:spPr>
+          <a:xfrm>
+            <a:off x="5577840" y="5129784"/>
+            <a:ext cx="6035040" cy="274320"/>
+          </a:xfrm>
+          <a:prstGeom prst="rect">
+            <a:avLst/>
+          </a:prstGeom>
+          <a:noFill/>
+        </p:spPr>
+        <p:txBody>
+          <a:bodyPr wrap="square" anchor="t" lIns="0" rIns="0" tIns="0" bIns="0">
+            <a:spAutoFit/>
+          </a:bodyPr>
+          <a:lstStyle/>
+          <a:p>
+            <a:pPr algn="l">
+              <a:lnSpc>
+                <a:spcPct val="100000"/>
+              </a:lnSpc>
+            </a:pPr>
+            <a:r>
+              <a:rPr sz="1150" b="0" i="0">
+                <a:solidFill>
+                  <a:srgbClr val="222A30"/>
+                </a:solidFill>
+                <a:latin typeface="Consolas"/>
+              </a:rPr>
+              <a:t>Fisher exact + pooled GC-adjusted logistic</a:t>
+            </a:r>
+          </a:p>
+        </p:txBody>
+      </p:sp>
+      <p:sp>
+        <p:nvSpPr>
+          <p:cNvPr id="43" name="Rectangle 42"/>
+          <p:cNvSpPr/>
+          <p:nvPr/>
+        </p:nvSpPr>
+        <p:spPr>
+          <a:xfrm>
+            <a:off x="502920" y="5394960"/>
+            <a:ext cx="11201400" cy="342900"/>
+          </a:xfrm>
+          <a:prstGeom prst="rect">
+            <a:avLst/>
+          </a:prstGeom>
+          <a:solidFill>
+            <a:srgbClr val="EEF1F3"/>
+          </a:solidFill>
+          <a:ln>
+            <a:noFill/>
+          </a:ln>
+          <a:effectLst/>
+        </p:spPr>
+        <p:style>
+          <a:lnRef idx="1">
+            <a:schemeClr val="accent1"/>
+          </a:lnRef>
+          <a:fillRef idx="3">
+            <a:schemeClr val="accent1"/>
+          </a:fillRef>
+          <a:effectRef idx="2">
+            <a:schemeClr val="accent1"/>
+          </a:effectRef>
+          <a:fontRef idx="minor">
+            <a:schemeClr val="lt1"/>
+          </a:fontRef>
+        </p:style>
+        <p:txBody>
+          <a:bodyPr rtlCol="0" anchor="ctr"/>
+          <a:lstStyle/>
+          <a:p>
+            <a:pPr algn="ctr"/>
+          </a:p>
+        </p:txBody>
+      </p:sp>
+      <p:sp>
+        <p:nvSpPr>
+          <p:cNvPr id="44" name="TextBox 43"/>
+          <p:cNvSpPr txBox="1"/>
+          <p:nvPr/>
+        </p:nvSpPr>
+        <p:spPr>
+          <a:xfrm>
+            <a:off x="3383280" y="5472684"/>
+            <a:ext cx="2057400" cy="274320"/>
+          </a:xfrm>
+          <a:prstGeom prst="rect">
+            <a:avLst/>
+          </a:prstGeom>
+          <a:noFill/>
+        </p:spPr>
+        <p:txBody>
+          <a:bodyPr wrap="square" anchor="t" lIns="0" rIns="0" tIns="0" bIns="0">
+            <a:spAutoFit/>
+          </a:bodyPr>
+          <a:lstStyle/>
+          <a:p>
+            <a:pPr algn="l">
+              <a:lnSpc>
+                <a:spcPct val="100000"/>
+              </a:lnSpc>
+            </a:pPr>
+            <a:r>
+              <a:rPr sz="1150" b="0" i="0">
+                <a:solidFill>
+                  <a:srgbClr val="5A6670"/>
+                </a:solidFill>
+                <a:latin typeface="Calibri"/>
+              </a:rPr>
+              <a:t>correction</a:t>
+            </a:r>
+          </a:p>
+        </p:txBody>
+      </p:sp>
+      <p:sp>
+        <p:nvSpPr>
+          <p:cNvPr id="45" name="TextBox 44"/>
+          <p:cNvSpPr txBox="1"/>
+          <p:nvPr/>
+        </p:nvSpPr>
+        <p:spPr>
+          <a:xfrm>
+            <a:off x="5577840" y="5472684"/>
+            <a:ext cx="6035040" cy="274320"/>
+          </a:xfrm>
+          <a:prstGeom prst="rect">
+            <a:avLst/>
+          </a:prstGeom>
+          <a:noFill/>
+        </p:spPr>
+        <p:txBody>
+          <a:bodyPr wrap="square" anchor="t" lIns="0" rIns="0" tIns="0" bIns="0">
+            <a:spAutoFit/>
+          </a:bodyPr>
+          <a:lstStyle/>
+          <a:p>
+            <a:pPr algn="l">
+              <a:lnSpc>
+                <a:spcPct val="100000"/>
+              </a:lnSpc>
+            </a:pPr>
+            <a:r>
+              <a:rPr sz="1150" b="0" i="0">
+                <a:solidFill>
+                  <a:srgbClr val="222A30"/>
+                </a:solidFill>
+                <a:latin typeface="Consolas"/>
+              </a:rPr>
+              <a:t>Benjamini–Hochberg · α = 0.05 · decision: GC-adjusted alone</a:t>
+            </a:r>
+          </a:p>
+        </p:txBody>
+      </p:sp>
+      <p:sp>
+        <p:nvSpPr>
+          <p:cNvPr id="46" name="TextBox 45"/>
+          <p:cNvSpPr txBox="1"/>
+          <p:nvPr/>
+        </p:nvSpPr>
+        <p:spPr>
+          <a:xfrm>
+            <a:off x="3383280" y="5815584"/>
+            <a:ext cx="2057400" cy="274320"/>
+          </a:xfrm>
+          <a:prstGeom prst="rect">
+            <a:avLst/>
+          </a:prstGeom>
+          <a:noFill/>
+        </p:spPr>
+        <p:txBody>
+          <a:bodyPr wrap="square" anchor="t" lIns="0" rIns="0" tIns="0" bIns="0">
+            <a:spAutoFit/>
+          </a:bodyPr>
+          <a:lstStyle/>
+          <a:p>
+            <a:pPr algn="l">
+              <a:lnSpc>
+                <a:spcPct val="100000"/>
+              </a:lnSpc>
+            </a:pPr>
+            <a:r>
+              <a:rPr sz="1150" b="0" i="0">
+                <a:solidFill>
+                  <a:srgbClr val="5A6670"/>
+                </a:solidFill>
+                <a:latin typeface="Calibri"/>
+              </a:rPr>
+              <a:t>analysis set</a:t>
+            </a:r>
+          </a:p>
+        </p:txBody>
+      </p:sp>
+      <p:sp>
+        <p:nvSpPr>
+          <p:cNvPr id="47" name="TextBox 46"/>
+          <p:cNvSpPr txBox="1"/>
+          <p:nvPr/>
+        </p:nvSpPr>
+        <p:spPr>
+          <a:xfrm>
+            <a:off x="5577840" y="5815584"/>
+            <a:ext cx="6035040" cy="274320"/>
+          </a:xfrm>
+          <a:prstGeom prst="rect">
+            <a:avLst/>
+          </a:prstGeom>
+          <a:noFill/>
+        </p:spPr>
+        <p:txBody>
+          <a:bodyPr wrap="square" anchor="t" lIns="0" rIns="0" tIns="0" bIns="0">
+            <a:spAutoFit/>
+          </a:bodyPr>
+          <a:lstStyle/>
+          <a:p>
+            <a:pPr algn="l">
+              <a:lnSpc>
+                <a:spcPct val="100000"/>
+              </a:lnSpc>
+            </a:pPr>
+            <a:r>
+              <a:rPr sz="1150" b="0" i="0">
+                <a:solidFill>
+                  <a:srgbClr val="222A30"/>
+                </a:solidFill>
+                <a:latin typeface="Consolas"/>
+              </a:rPr>
+              <a:t>loci in ≥ 20 genomes — pre-specified, score-blind</a:t>
+            </a:r>
+          </a:p>
+        </p:txBody>
+      </p:sp>
+      <p:sp>
+        <p:nvSpPr>
+          <p:cNvPr id="48" name="TextBox 47"/>
+          <p:cNvSpPr txBox="1"/>
+          <p:nvPr/>
+        </p:nvSpPr>
+        <p:spPr>
+          <a:xfrm>
+            <a:off x="502920" y="6263640"/>
+            <a:ext cx="11155680" cy="320040"/>
+          </a:xfrm>
+          <a:prstGeom prst="rect">
+            <a:avLst/>
+          </a:prstGeom>
+          <a:noFill/>
+        </p:spPr>
+        <p:txBody>
+          <a:bodyPr wrap="square" anchor="t" lIns="0" rIns="0" tIns="0" bIns="0">
+            <a:spAutoFit/>
+          </a:bodyPr>
+          <a:lstStyle/>
+          <a:p>
+            <a:pPr algn="l">
+              <a:lnSpc>
+                <a:spcPct val="100000"/>
+              </a:lnSpc>
+            </a:pPr>
+            <a:r>
+              <a:rPr sz="1150" b="0" i="1">
+                <a:solidFill>
+                  <a:srgbClr val="D98C1A"/>
+                </a:solidFill>
+                <a:latin typeface="Calibri"/>
+              </a:rPr>
+              <a:t>Two of these moved after data were seen, and both are recorded as post-hoc: the SC operating point (R-11) and the GC-adjusted decision rule (R-12).</a:t>
+            </a:r>
+          </a:p>
+        </p:txBody>
+      </p:sp>
+      <p:sp>
+        <p:nvSpPr>
+          <p:cNvPr id="49" name="TextBox 48"/>
+          <p:cNvSpPr txBox="1"/>
+          <p:nvPr/>
+        </p:nvSpPr>
+        <p:spPr>
+          <a:xfrm>
+            <a:off x="502920" y="6510528"/>
+            <a:ext cx="10241280" cy="274320"/>
+          </a:xfrm>
+          <a:prstGeom prst="rect">
+            <a:avLst/>
+          </a:prstGeom>
+          <a:noFill/>
+        </p:spPr>
+        <p:txBody>
+          <a:bodyPr wrap="square" anchor="t" lIns="0" rIns="0" tIns="0" bIns="0">
+            <a:spAutoFit/>
+          </a:bodyPr>
+          <a:lstStyle/>
+          <a:p>
+            <a:pPr algn="l">
+              <a:lnSpc>
+                <a:spcPct val="100000"/>
+              </a:lnSpc>
+            </a:pPr>
+            <a:r>
+              <a:rPr sz="950" b="0" i="1">
+                <a:solidFill>
+                  <a:srgbClr val="5A6670"/>
+                </a:solidFill>
+                <a:latin typeface="Calibri"/>
+              </a:rPr>
+              <a:t>config/fmdv2026.yaml and `g4watch doctor`. Changing any of these changes the result, so none is buried in nextflow.config</a:t>
+            </a:r>
+          </a:p>
+        </p:txBody>
+      </p:sp>
+      <p:sp>
+        <p:nvSpPr>
+          <p:cNvPr id="50" name="TextBox 49"/>
+          <p:cNvSpPr txBox="1"/>
+          <p:nvPr/>
+        </p:nvSpPr>
+        <p:spPr>
+          <a:xfrm>
+            <a:off x="11155680" y="6510528"/>
+            <a:ext cx="548640" cy="274320"/>
+          </a:xfrm>
+          <a:prstGeom prst="rect">
+            <a:avLst/>
+          </a:prstGeom>
+          <a:noFill/>
+        </p:spPr>
+        <p:txBody>
+          <a:bodyPr wrap="square" anchor="t" lIns="0" rIns="0" tIns="0" bIns="0">
+            <a:spAutoFit/>
+          </a:bodyPr>
+          <a:lstStyle/>
+          <a:p>
+            <a:pPr algn="r">
+              <a:lnSpc>
+                <a:spcPct val="100000"/>
+              </a:lnSpc>
+            </a:pPr>
+            <a:r>
+              <a:rPr sz="950" b="0" i="0">
+                <a:solidFill>
+                  <a:srgbClr val="5A6670"/>
+                </a:solidFill>
+                <a:latin typeface="Calibri"/>
+              </a:rPr>
+              <a:t>13</a:t>
+            </a:r>
+          </a:p>
+        </p:txBody>
+      </p:sp>
+    </p:spTree>
+  </p:cSld>
+  <p:clrMapOvr>
+    <a:masterClrMapping/>
+  </p:clrMapOvr>
+</p:sld>
+</file>
+
+<file path=ppt/slides/slide14.xml><?xml version="1.0" encoding="utf-8"?>
+<p:sld xmlns:a="http://schemas.openxmlformats.org/drawingml/2006/main" xmlns:p="http://schemas.openxmlformats.org/presentationml/2006/main" xmlns:r="http://schemas.openxmlformats.org/officeDocument/2006/relationships">
+  <p:cSld>
+    <p:bg>
+      <p:bgPr>
+        <a:solidFill>
+          <a:srgbClr val="FFFFFF"/>
+        </a:solidFill>
+        <a:effectLst/>
+      </p:bgPr>
+    </p:bg>
+    <p:spTree>
+      <p:nvGrpSpPr>
+        <p:cNvPr id="1" name=""/>
+        <p:cNvGrpSpPr/>
+        <p:nvPr/>
+      </p:nvGrpSpPr>
+      <p:grpSpPr/>
+      <p:sp>
+        <p:nvSpPr>
+          <p:cNvPr id="2" name="Rectangle 1"/>
+          <p:cNvSpPr/>
+          <p:nvPr/>
+        </p:nvSpPr>
+        <p:spPr>
+          <a:xfrm>
+            <a:off x="0" y="0"/>
+            <a:ext cx="12191695" cy="932688"/>
+          </a:xfrm>
+          <a:prstGeom prst="rect">
+            <a:avLst/>
+          </a:prstGeom>
+          <a:solidFill>
+            <a:srgbClr val="1B3A5C"/>
+          </a:solidFill>
+          <a:ln>
+            <a:noFill/>
+          </a:ln>
+          <a:effectLst/>
+        </p:spPr>
+        <p:style>
+          <a:lnRef idx="1">
+            <a:schemeClr val="accent1"/>
+          </a:lnRef>
+          <a:fillRef idx="3">
+            <a:schemeClr val="accent1"/>
+          </a:fillRef>
+          <a:effectRef idx="2">
+            <a:schemeClr val="accent1"/>
+          </a:effectRef>
+          <a:fontRef idx="minor">
+            <a:schemeClr val="lt1"/>
+          </a:fontRef>
+        </p:style>
+        <p:txBody>
+          <a:bodyPr rtlCol="0" anchor="ctr"/>
+          <a:lstStyle/>
+          <a:p>
+            <a:pPr algn="ctr"/>
+          </a:p>
+        </p:txBody>
+      </p:sp>
+      <p:sp>
+        <p:nvSpPr>
+          <p:cNvPr id="3" name="TextBox 2"/>
+          <p:cNvSpPr txBox="1"/>
+          <p:nvPr/>
+        </p:nvSpPr>
+        <p:spPr>
+          <a:xfrm>
+            <a:off x="502920" y="100584"/>
+            <a:ext cx="10058400" cy="274320"/>
+          </a:xfrm>
+          <a:prstGeom prst="rect">
+            <a:avLst/>
+          </a:prstGeom>
+          <a:noFill/>
+        </p:spPr>
+        <p:txBody>
+          <a:bodyPr wrap="square" anchor="t" lIns="0" rIns="0" tIns="0" bIns="0">
+            <a:spAutoFit/>
+          </a:bodyPr>
+          <a:lstStyle/>
+          <a:p>
+            <a:pPr algn="l">
+              <a:lnSpc>
+                <a:spcPct val="100000"/>
+              </a:lnSpc>
+            </a:pPr>
+            <a:r>
+              <a:rPr sz="1250" b="1" i="0">
+                <a:solidFill>
+                  <a:srgbClr val="9FC7D8"/>
+                </a:solidFill>
+                <a:latin typeface="Calibri"/>
+              </a:rPr>
               <a:t>REPRODUCIBILITY</a:t>
             </a:r>
           </a:p>
@@ -6002,7 +8871,7 @@
                 </a:solidFill>
                 <a:latin typeface="Calibri"/>
               </a:rPr>
-              <a:t>12</a:t>
+              <a:t>14</a:t>
             </a:r>
           </a:p>
         </p:txBody>
@@ -6015,7 +8884,7 @@
 </p:sld>
 </file>
 
-<file path=ppt/slides/slide13.xml><?xml version="1.0" encoding="utf-8"?>
+<file path=ppt/slides/slide15.xml><?xml version="1.0" encoding="utf-8"?>
 <p:sld xmlns:a="http://schemas.openxmlformats.org/drawingml/2006/main" xmlns:p="http://schemas.openxmlformats.org/presentationml/2006/main" xmlns:r="http://schemas.openxmlformats.org/officeDocument/2006/relationships">
   <p:cSld>
     <p:bg>
@@ -6442,8 +9311,8 @@
         </p:nvSpPr>
         <p:spPr>
           <a:xfrm>
-            <a:off x="502920" y="1325880"/>
-            <a:ext cx="5943600" cy="4206240"/>
+            <a:off x="502920" y="1298448"/>
+            <a:ext cx="5943600" cy="4297680"/>
           </a:xfrm>
           <a:prstGeom prst="rect">
             <a:avLst/>
@@ -6461,17 +9330,17 @@
                 <a:spcPct val="108000"/>
               </a:lnSpc>
               <a:spcAft>
-                <a:spcPts val="1500"/>
+                <a:spcPts val="1300"/>
               </a:spcAft>
             </a:pPr>
             <a:r>
-              <a:rPr sz="1550" b="0" i="0">
+              <a:rPr sz="1450" b="0" i="0">
                 <a:solidFill>
                   <a:srgbClr val="222A30"/>
                 </a:solidFill>
                 <a:latin typeface="Calibri"/>
               </a:rPr>
-              <a:t>▪  Four runs of guanine can fold the strand back on itself into a stacked four-stranded knot — a G-quadruplex, or G4.</a:t>
+              <a:t>▪  Four runs of guanine, separated by short loops, can fold the strand back on itself into a stack of G-tetrads held together by Hoogsteen bonds — a G-quadruplex, or G4.</a:t>
             </a:r>
           </a:p>
           <a:p>
@@ -6480,17 +9349,17 @@
                 <a:spcPct val="108000"/>
               </a:lnSpc>
               <a:spcAft>
-                <a:spcPts val="1500"/>
+                <a:spcPts val="1300"/>
               </a:spcAft>
             </a:pPr>
             <a:r>
-              <a:rPr sz="1550" b="0" i="0">
+              <a:rPr sz="1450" b="0" i="0">
                 <a:solidFill>
                   <a:srgbClr val="222A30"/>
                 </a:solidFill>
                 <a:latin typeface="Calibri"/>
               </a:rPr>
-              <a:t>▪  Where one forms, it physically obstructs the machinery that copies and reads the genome. Viruses that carry one are under pressure either to keep it or to lose it.</a:t>
+              <a:t>▪  Where one forms it obstructs polymerase and ribosome. A virus carrying one is under selection either to keep it or to lose it, so the site is a place worth watching.</a:t>
             </a:r>
           </a:p>
           <a:p>
@@ -6499,17 +9368,17 @@
                 <a:spcPct val="108000"/>
               </a:lnSpc>
               <a:spcAft>
-                <a:spcPts val="1500"/>
+                <a:spcPts val="1300"/>
               </a:spcAft>
             </a:pPr>
             <a:r>
-              <a:rPr sz="1550" b="0" i="0">
+              <a:rPr sz="1450" b="0" i="0">
                 <a:solidFill>
                   <a:srgbClr val="222A30"/>
                 </a:solidFill>
                 <a:latin typeface="Calibri"/>
               </a:rPr>
-              <a:t>▪  That makes a G4 site a candidate place to watch: if a virus population starts losing or gaining structure at a known site, something about its biology is changing.</a:t>
+              <a:t>▪  Detection here is G4Hunter: a sliding window (w = 25) scoring G-skew from +4 to −4, with |score| ≥ 1.2 called, plus an independent regex motif. Two methods must overlap by ≥ 80% to count as concordant.</a:t>
             </a:r>
           </a:p>
           <a:p>
@@ -6518,17 +9387,36 @@
                 <a:spcPct val="108000"/>
               </a:lnSpc>
               <a:spcAft>
-                <a:spcPts val="1500"/>
+                <a:spcPts val="1300"/>
               </a:spcAft>
             </a:pPr>
             <a:r>
-              <a:rPr sz="1550" b="1" i="0">
+              <a:rPr sz="1450" b="0" i="0">
+                <a:solidFill>
+                  <a:srgbClr val="222A30"/>
+                </a:solidFill>
+                <a:latin typeface="Calibri"/>
+              </a:rPr>
+              <a:t>▪  Negative scores are C-rich windows — a G4 on the opposite strand. They are kept, and strand is reported as a covariate rather than settled by exclusion.</a:t>
+            </a:r>
+          </a:p>
+          <a:p>
+            <a:pPr>
+              <a:lnSpc>
+                <a:spcPct val="108000"/>
+              </a:lnSpc>
+              <a:spcAft>
+                <a:spcPts val="1300"/>
+              </a:spcAft>
+            </a:pPr>
+            <a:r>
+              <a:rPr sz="1450" b="1" i="0">
                 <a:solidFill>
                   <a:srgbClr val="1B3A5C"/>
                 </a:solidFill>
                 <a:latin typeface="Calibri"/>
               </a:rPr>
-              <a:t>▪  The whole framework rests on one testable claim about that — stated on the next slide. It is stated as a claim precisely so it can fail.</a:t>
+              <a:t>▪  The framework rests on one testable claim about these sites, stated on the next slide. It is stated as a claim precisely so that it can fail.</a:t>
             </a:r>
           </a:p>
         </p:txBody>
@@ -7335,7 +10223,7 @@
                 </a:solidFill>
                 <a:latin typeface="Calibri"/>
               </a:rPr>
-              <a:t>The locus disruption rate must differ from its matched controls by more than chance, after Benjamini–Hochberg correction across every locus tested.</a:t>
+              <a:t>Fisher exact test on the locus's clade-level disruption counts against those of its 5 matched controls, then Benjamini–Hochberg across the whole pre-specified set.</a:t>
             </a:r>
           </a:p>
         </p:txBody>
@@ -7457,7 +10345,7 @@
                 </a:solidFill>
                 <a:latin typeface="Calibri"/>
               </a:rPr>
-              <a:t>Lower, not merely different. A locus that is significantly MORE disrupted contradicts D.H1 — it does not support it.</a:t>
+              <a:t>Lower, not merely different. Both tests are two-sided, so the sign is checked explicitly: a locus significantly MORE disrupted returns SIGNAL_OPPOSITE_DIRECTION.</a:t>
             </a:r>
           </a:p>
         </p:txBody>
@@ -7579,7 +10467,7 @@
                 </a:solidFill>
                 <a:latin typeface="Calibri"/>
               </a:rPr>
-              <a:t>G4 sites are G-rich by definition, and GC-rich DNA mutates differently. The difference must survive GC adjustment or it is a composition artefact.</a:t>
+              <a:t>G4 sites are G-rich by definition and GC-rich sequence mutates differently. A pooled logistic model with flanking GC as a covariate must keep the locus term significant.</a:t>
             </a:r>
           </a:p>
         </p:txBody>
@@ -9560,7 +12448,7 @@
                 </a:solidFill>
                 <a:latin typeface="Calibri"/>
               </a:rPr>
-              <a:t>BEFORE ANY TEST RUNS</a:t>
+              <a:t>THE WORKFLOW, IN ONE FIGURE</a:t>
             </a:r>
           </a:p>
         </p:txBody>
@@ -9599,7 +12487,7 @@
                 </a:solidFill>
                 <a:latin typeface="Calibri"/>
               </a:rPr>
-              <a:t>A minimum-data floor, fixed in advance</a:t>
+              <a:t>Where everything goes</a:t>
             </a:r>
           </a:p>
         </p:txBody>
@@ -9648,869 +12536,72 @@
           </a:p>
         </p:txBody>
       </p:sp>
-      <p:sp>
-        <p:nvSpPr>
-          <p:cNvPr id="6" name="TextBox 5"/>
-          <p:cNvSpPr txBox="1"/>
-          <p:nvPr/>
-        </p:nvSpPr>
-        <p:spPr>
-          <a:xfrm>
-            <a:off x="502920" y="1325880"/>
-            <a:ext cx="11155680" cy="822960"/>
-          </a:xfrm>
-          <a:prstGeom prst="rect">
-            <a:avLst/>
-          </a:prstGeom>
-          <a:noFill/>
-        </p:spPr>
-        <p:txBody>
-          <a:bodyPr wrap="square" anchor="t" lIns="0" rIns="0" tIns="0" bIns="0">
-            <a:spAutoFit/>
-          </a:bodyPr>
-          <a:lstStyle/>
-          <a:p>
-            <a:pPr algn="l">
-              <a:lnSpc>
-                <a:spcPct val="130000"/>
-              </a:lnSpc>
-            </a:pPr>
-            <a:r>
-              <a:rPr sz="1450" b="0" i="0">
-                <a:solidFill>
-                  <a:srgbClr val="222A30"/>
-                </a:solidFill>
-                <a:latin typeface="Calibri"/>
-              </a:rPr>
-              <a:t>A statistic computed on four sequences is not a weak result — it is not a result. Every locus is checked against these</a:t>
-            </a:r>
-          </a:p>
-          <a:p>
-            <a:pPr algn="l">
-              <a:lnSpc>
-                <a:spcPct val="130000"/>
-              </a:lnSpc>
-            </a:pPr>
-            <a:r>
-              <a:rPr sz="1450" b="0" i="0">
-                <a:solidFill>
-                  <a:srgbClr val="222A30"/>
-                </a:solidFill>
-                <a:latin typeface="Calibri"/>
-              </a:rPr>
-              <a:t>thresholds first, and a locus that fails them returns INSUFFICIENT_DATA rather than a number nobody should read.</a:t>
-            </a:r>
-          </a:p>
-        </p:txBody>
-      </p:sp>
-      <p:sp>
-        <p:nvSpPr>
-          <p:cNvPr id="7" name="Rectangle 6"/>
-          <p:cNvSpPr/>
-          <p:nvPr/>
-        </p:nvSpPr>
-        <p:spPr>
-          <a:xfrm>
-            <a:off x="502920" y="2514600"/>
-            <a:ext cx="2103120" cy="1417320"/>
-          </a:xfrm>
-          <a:prstGeom prst="rect">
-            <a:avLst/>
-          </a:prstGeom>
-          <a:solidFill>
-            <a:srgbClr val="EEF1F3"/>
-          </a:solidFill>
-          <a:ln>
-            <a:noFill/>
-          </a:ln>
-          <a:effectLst/>
-        </p:spPr>
-        <p:style>
-          <a:lnRef idx="1">
-            <a:schemeClr val="accent1"/>
-          </a:lnRef>
-          <a:fillRef idx="3">
-            <a:schemeClr val="accent1"/>
-          </a:fillRef>
-          <a:effectRef idx="2">
-            <a:schemeClr val="accent1"/>
-          </a:effectRef>
-          <a:fontRef idx="minor">
-            <a:schemeClr val="lt1"/>
-          </a:fontRef>
-        </p:style>
-        <p:txBody>
-          <a:bodyPr rtlCol="0" anchor="ctr"/>
-          <a:lstStyle/>
-          <a:p>
-            <a:pPr algn="ctr"/>
+      <p:pic>
+        <p:nvPicPr>
+          <p:cNvPr id="6" name="Picture 5" descr="fig_cone.png"/>
+          <p:cNvPicPr>
+            <a:picLocks noChangeAspect="1"/>
+          </p:cNvPicPr>
+          <p:nvPr/>
+        </p:nvPicPr>
+        <p:blipFill>
+          <a:blip r:embed="rId2"/>
+          <a:stretch>
+            <a:fillRect/>
+          </a:stretch>
+        </p:blipFill>
+        <p:spPr>
+          <a:xfrm>
+            <a:off x="384048" y="1097280"/>
+            <a:ext cx="11430000" cy="5233806"/>
+          </a:xfrm>
+          <a:prstGeom prst="rect">
+            <a:avLst/>
+          </a:prstGeom>
+        </p:spPr>
+      </p:pic>
+      <p:sp>
+        <p:nvSpPr>
+          <p:cNvPr id="7" name="TextBox 6"/>
+          <p:cNvSpPr txBox="1"/>
+          <p:nvPr/>
+        </p:nvSpPr>
+        <p:spPr>
+          <a:xfrm>
+            <a:off x="502920" y="6309360"/>
+            <a:ext cx="11155680" cy="274320"/>
+          </a:xfrm>
+          <a:prstGeom prst="rect">
+            <a:avLst/>
+          </a:prstGeom>
+          <a:noFill/>
+        </p:spPr>
+        <p:txBody>
+          <a:bodyPr wrap="square" anchor="t" lIns="0" rIns="0" tIns="0" bIns="0">
+            <a:spAutoFit/>
+          </a:bodyPr>
+          <a:lstStyle/>
+          <a:p>
+            <a:pPr algn="l">
+              <a:lnSpc>
+                <a:spcPct val="100000"/>
+              </a:lnSpc>
+            </a:pPr>
+            <a:r>
+              <a:rPr sz="1100" b="0" i="1">
+                <a:solidFill>
+                  <a:srgbClr val="5A6670"/>
+                </a:solidFill>
+                <a:latin typeface="Calibri"/>
+              </a:rPr>
+              <a:t>Green bands are the statistical gates; red is the outcome. Two bands go UP — the alignment adds the reference, which is why 936 follows 935.</a:t>
+            </a:r>
           </a:p>
         </p:txBody>
       </p:sp>
       <p:sp>
         <p:nvSpPr>
           <p:cNvPr id="8" name="TextBox 7"/>
-          <p:cNvSpPr txBox="1"/>
-          <p:nvPr/>
-        </p:nvSpPr>
-        <p:spPr>
-          <a:xfrm>
-            <a:off x="502920" y="2670048"/>
-            <a:ext cx="2103120" cy="548640"/>
-          </a:xfrm>
-          <a:prstGeom prst="rect">
-            <a:avLst/>
-          </a:prstGeom>
-          <a:noFill/>
-        </p:spPr>
-        <p:txBody>
-          <a:bodyPr wrap="square" anchor="t" lIns="0" rIns="0" tIns="0" bIns="0">
-            <a:spAutoFit/>
-          </a:bodyPr>
-          <a:lstStyle/>
-          <a:p>
-            <a:pPr algn="ctr">
-              <a:lnSpc>
-                <a:spcPct val="100000"/>
-              </a:lnSpc>
-            </a:pPr>
-            <a:r>
-              <a:rPr sz="3300" b="1" i="0">
-                <a:solidFill>
-                  <a:srgbClr val="1B3A5C"/>
-                </a:solidFill>
-                <a:latin typeface="Calibri"/>
-              </a:rPr>
-              <a:t>30</a:t>
-            </a:r>
-          </a:p>
-        </p:txBody>
-      </p:sp>
-      <p:sp>
-        <p:nvSpPr>
-          <p:cNvPr id="9" name="TextBox 8"/>
-          <p:cNvSpPr txBox="1"/>
-          <p:nvPr/>
-        </p:nvSpPr>
-        <p:spPr>
-          <a:xfrm>
-            <a:off x="502920" y="3246120"/>
-            <a:ext cx="2103120" cy="640080"/>
-          </a:xfrm>
-          <a:prstGeom prst="rect">
-            <a:avLst/>
-          </a:prstGeom>
-          <a:noFill/>
-        </p:spPr>
-        <p:txBody>
-          <a:bodyPr wrap="square" anchor="t" lIns="0" rIns="0" tIns="0" bIns="0">
-            <a:spAutoFit/>
-          </a:bodyPr>
-          <a:lstStyle/>
-          <a:p>
-            <a:pPr algn="ctr">
-              <a:lnSpc>
-                <a:spcPct val="110000"/>
-              </a:lnSpc>
-            </a:pPr>
-            <a:r>
-              <a:rPr sz="1150" b="0" i="0">
-                <a:solidFill>
-                  <a:srgbClr val="5A6670"/>
-                </a:solidFill>
-                <a:latin typeface="Calibri"/>
-              </a:rPr>
-              <a:t>sequences in the</a:t>
-            </a:r>
-          </a:p>
-          <a:p>
-            <a:pPr algn="ctr">
-              <a:lnSpc>
-                <a:spcPct val="110000"/>
-              </a:lnSpc>
-            </a:pPr>
-            <a:r>
-              <a:rPr sz="1150" b="0" i="0">
-                <a:solidFill>
-                  <a:srgbClr val="5A6670"/>
-                </a:solidFill>
-                <a:latin typeface="Calibri"/>
-              </a:rPr>
-              <a:t>analysis window</a:t>
-            </a:r>
-          </a:p>
-        </p:txBody>
-      </p:sp>
-      <p:sp>
-        <p:nvSpPr>
-          <p:cNvPr id="10" name="Rectangle 9"/>
-          <p:cNvSpPr/>
-          <p:nvPr/>
-        </p:nvSpPr>
-        <p:spPr>
-          <a:xfrm>
-            <a:off x="2761488" y="2514600"/>
-            <a:ext cx="2103120" cy="1417320"/>
-          </a:xfrm>
-          <a:prstGeom prst="rect">
-            <a:avLst/>
-          </a:prstGeom>
-          <a:solidFill>
-            <a:srgbClr val="EEF1F3"/>
-          </a:solidFill>
-          <a:ln>
-            <a:noFill/>
-          </a:ln>
-          <a:effectLst/>
-        </p:spPr>
-        <p:style>
-          <a:lnRef idx="1">
-            <a:schemeClr val="accent1"/>
-          </a:lnRef>
-          <a:fillRef idx="3">
-            <a:schemeClr val="accent1"/>
-          </a:fillRef>
-          <a:effectRef idx="2">
-            <a:schemeClr val="accent1"/>
-          </a:effectRef>
-          <a:fontRef idx="minor">
-            <a:schemeClr val="lt1"/>
-          </a:fontRef>
-        </p:style>
-        <p:txBody>
-          <a:bodyPr rtlCol="0" anchor="ctr"/>
-          <a:lstStyle/>
-          <a:p>
-            <a:pPr algn="ctr"/>
-          </a:p>
-        </p:txBody>
-      </p:sp>
-      <p:sp>
-        <p:nvSpPr>
-          <p:cNvPr id="11" name="TextBox 10"/>
-          <p:cNvSpPr txBox="1"/>
-          <p:nvPr/>
-        </p:nvSpPr>
-        <p:spPr>
-          <a:xfrm>
-            <a:off x="2761488" y="2670048"/>
-            <a:ext cx="2103120" cy="548640"/>
-          </a:xfrm>
-          <a:prstGeom prst="rect">
-            <a:avLst/>
-          </a:prstGeom>
-          <a:noFill/>
-        </p:spPr>
-        <p:txBody>
-          <a:bodyPr wrap="square" anchor="t" lIns="0" rIns="0" tIns="0" bIns="0">
-            <a:spAutoFit/>
-          </a:bodyPr>
-          <a:lstStyle/>
-          <a:p>
-            <a:pPr algn="ctr">
-              <a:lnSpc>
-                <a:spcPct val="100000"/>
-              </a:lnSpc>
-            </a:pPr>
-            <a:r>
-              <a:rPr sz="3300" b="1" i="0">
-                <a:solidFill>
-                  <a:srgbClr val="1B3A5C"/>
-                </a:solidFill>
-                <a:latin typeface="Calibri"/>
-              </a:rPr>
-              <a:t>20</a:t>
-            </a:r>
-          </a:p>
-        </p:txBody>
-      </p:sp>
-      <p:sp>
-        <p:nvSpPr>
-          <p:cNvPr id="12" name="TextBox 11"/>
-          <p:cNvSpPr txBox="1"/>
-          <p:nvPr/>
-        </p:nvSpPr>
-        <p:spPr>
-          <a:xfrm>
-            <a:off x="2761488" y="3246120"/>
-            <a:ext cx="2103120" cy="640080"/>
-          </a:xfrm>
-          <a:prstGeom prst="rect">
-            <a:avLst/>
-          </a:prstGeom>
-          <a:noFill/>
-        </p:spPr>
-        <p:txBody>
-          <a:bodyPr wrap="square" anchor="t" lIns="0" rIns="0" tIns="0" bIns="0">
-            <a:spAutoFit/>
-          </a:bodyPr>
-          <a:lstStyle/>
-          <a:p>
-            <a:pPr algn="ctr">
-              <a:lnSpc>
-                <a:spcPct val="110000"/>
-              </a:lnSpc>
-            </a:pPr>
-            <a:r>
-              <a:rPr sz="1150" b="0" i="0">
-                <a:solidFill>
-                  <a:srgbClr val="5A6670"/>
-                </a:solidFill>
-                <a:latin typeface="Calibri"/>
-              </a:rPr>
-              <a:t>sequences in every</a:t>
-            </a:r>
-          </a:p>
-          <a:p>
-            <a:pPr algn="ctr">
-              <a:lnSpc>
-                <a:spcPct val="110000"/>
-              </a:lnSpc>
-            </a:pPr>
-            <a:r>
-              <a:rPr sz="1150" b="0" i="0">
-                <a:solidFill>
-                  <a:srgbClr val="5A6670"/>
-                </a:solidFill>
-                <a:latin typeface="Calibri"/>
-              </a:rPr>
-              <a:t>lineage</a:t>
-            </a:r>
-          </a:p>
-        </p:txBody>
-      </p:sp>
-      <p:sp>
-        <p:nvSpPr>
-          <p:cNvPr id="13" name="Rectangle 12"/>
-          <p:cNvSpPr/>
-          <p:nvPr/>
-        </p:nvSpPr>
-        <p:spPr>
-          <a:xfrm>
-            <a:off x="5020056" y="2514600"/>
-            <a:ext cx="2103120" cy="1417320"/>
-          </a:xfrm>
-          <a:prstGeom prst="rect">
-            <a:avLst/>
-          </a:prstGeom>
-          <a:solidFill>
-            <a:srgbClr val="EEF1F3"/>
-          </a:solidFill>
-          <a:ln>
-            <a:noFill/>
-          </a:ln>
-          <a:effectLst/>
-        </p:spPr>
-        <p:style>
-          <a:lnRef idx="1">
-            <a:schemeClr val="accent1"/>
-          </a:lnRef>
-          <a:fillRef idx="3">
-            <a:schemeClr val="accent1"/>
-          </a:fillRef>
-          <a:effectRef idx="2">
-            <a:schemeClr val="accent1"/>
-          </a:effectRef>
-          <a:fontRef idx="minor">
-            <a:schemeClr val="lt1"/>
-          </a:fontRef>
-        </p:style>
-        <p:txBody>
-          <a:bodyPr rtlCol="0" anchor="ctr"/>
-          <a:lstStyle/>
-          <a:p>
-            <a:pPr algn="ctr"/>
-          </a:p>
-        </p:txBody>
-      </p:sp>
-      <p:sp>
-        <p:nvSpPr>
-          <p:cNvPr id="14" name="TextBox 13"/>
-          <p:cNvSpPr txBox="1"/>
-          <p:nvPr/>
-        </p:nvSpPr>
-        <p:spPr>
-          <a:xfrm>
-            <a:off x="5020056" y="2670048"/>
-            <a:ext cx="2103120" cy="548640"/>
-          </a:xfrm>
-          <a:prstGeom prst="rect">
-            <a:avLst/>
-          </a:prstGeom>
-          <a:noFill/>
-        </p:spPr>
-        <p:txBody>
-          <a:bodyPr wrap="square" anchor="t" lIns="0" rIns="0" tIns="0" bIns="0">
-            <a:spAutoFit/>
-          </a:bodyPr>
-          <a:lstStyle/>
-          <a:p>
-            <a:pPr algn="ctr">
-              <a:lnSpc>
-                <a:spcPct val="100000"/>
-              </a:lnSpc>
-            </a:pPr>
-            <a:r>
-              <a:rPr sz="3300" b="1" i="0">
-                <a:solidFill>
-                  <a:srgbClr val="1B3A5C"/>
-                </a:solidFill>
-                <a:latin typeface="Calibri"/>
-              </a:rPr>
-              <a:t>3</a:t>
-            </a:r>
-          </a:p>
-        </p:txBody>
-      </p:sp>
-      <p:sp>
-        <p:nvSpPr>
-          <p:cNvPr id="15" name="TextBox 14"/>
-          <p:cNvSpPr txBox="1"/>
-          <p:nvPr/>
-        </p:nvSpPr>
-        <p:spPr>
-          <a:xfrm>
-            <a:off x="5020056" y="3246120"/>
-            <a:ext cx="2103120" cy="640080"/>
-          </a:xfrm>
-          <a:prstGeom prst="rect">
-            <a:avLst/>
-          </a:prstGeom>
-          <a:noFill/>
-        </p:spPr>
-        <p:txBody>
-          <a:bodyPr wrap="square" anchor="t" lIns="0" rIns="0" tIns="0" bIns="0">
-            <a:spAutoFit/>
-          </a:bodyPr>
-          <a:lstStyle/>
-          <a:p>
-            <a:pPr algn="ctr">
-              <a:lnSpc>
-                <a:spcPct val="110000"/>
-              </a:lnSpc>
-            </a:pPr>
-            <a:r>
-              <a:rPr sz="1150" b="0" i="0">
-                <a:solidFill>
-                  <a:srgbClr val="5A6670"/>
-                </a:solidFill>
-                <a:latin typeface="Calibri"/>
-              </a:rPr>
-              <a:t>distinct sampling</a:t>
-            </a:r>
-          </a:p>
-          <a:p>
-            <a:pPr algn="ctr">
-              <a:lnSpc>
-                <a:spcPct val="110000"/>
-              </a:lnSpc>
-            </a:pPr>
-            <a:r>
-              <a:rPr sz="1150" b="0" i="0">
-                <a:solidFill>
-                  <a:srgbClr val="5A6670"/>
-                </a:solidFill>
-                <a:latin typeface="Calibri"/>
-              </a:rPr>
-              <a:t>timepoints</a:t>
-            </a:r>
-          </a:p>
-        </p:txBody>
-      </p:sp>
-      <p:sp>
-        <p:nvSpPr>
-          <p:cNvPr id="16" name="Rectangle 15"/>
-          <p:cNvSpPr/>
-          <p:nvPr/>
-        </p:nvSpPr>
-        <p:spPr>
-          <a:xfrm>
-            <a:off x="7278624" y="2514600"/>
-            <a:ext cx="2103120" cy="1417320"/>
-          </a:xfrm>
-          <a:prstGeom prst="rect">
-            <a:avLst/>
-          </a:prstGeom>
-          <a:solidFill>
-            <a:srgbClr val="EEF1F3"/>
-          </a:solidFill>
-          <a:ln>
-            <a:noFill/>
-          </a:ln>
-          <a:effectLst/>
-        </p:spPr>
-        <p:style>
-          <a:lnRef idx="1">
-            <a:schemeClr val="accent1"/>
-          </a:lnRef>
-          <a:fillRef idx="3">
-            <a:schemeClr val="accent1"/>
-          </a:fillRef>
-          <a:effectRef idx="2">
-            <a:schemeClr val="accent1"/>
-          </a:effectRef>
-          <a:fontRef idx="minor">
-            <a:schemeClr val="lt1"/>
-          </a:fontRef>
-        </p:style>
-        <p:txBody>
-          <a:bodyPr rtlCol="0" anchor="ctr"/>
-          <a:lstStyle/>
-          <a:p>
-            <a:pPr algn="ctr"/>
-          </a:p>
-        </p:txBody>
-      </p:sp>
-      <p:sp>
-        <p:nvSpPr>
-          <p:cNvPr id="17" name="TextBox 16"/>
-          <p:cNvSpPr txBox="1"/>
-          <p:nvPr/>
-        </p:nvSpPr>
-        <p:spPr>
-          <a:xfrm>
-            <a:off x="7278624" y="2670048"/>
-            <a:ext cx="2103120" cy="548640"/>
-          </a:xfrm>
-          <a:prstGeom prst="rect">
-            <a:avLst/>
-          </a:prstGeom>
-          <a:noFill/>
-        </p:spPr>
-        <p:txBody>
-          <a:bodyPr wrap="square" anchor="t" lIns="0" rIns="0" tIns="0" bIns="0">
-            <a:spAutoFit/>
-          </a:bodyPr>
-          <a:lstStyle/>
-          <a:p>
-            <a:pPr algn="ctr">
-              <a:lnSpc>
-                <a:spcPct val="100000"/>
-              </a:lnSpc>
-            </a:pPr>
-            <a:r>
-              <a:rPr sz="3300" b="1" i="0">
-                <a:solidFill>
-                  <a:srgbClr val="1B3A5C"/>
-                </a:solidFill>
-                <a:latin typeface="Calibri"/>
-              </a:rPr>
-              <a:t>90%</a:t>
-            </a:r>
-          </a:p>
-        </p:txBody>
-      </p:sp>
-      <p:sp>
-        <p:nvSpPr>
-          <p:cNvPr id="18" name="TextBox 17"/>
-          <p:cNvSpPr txBox="1"/>
-          <p:nvPr/>
-        </p:nvSpPr>
-        <p:spPr>
-          <a:xfrm>
-            <a:off x="7278624" y="3246120"/>
-            <a:ext cx="2103120" cy="640080"/>
-          </a:xfrm>
-          <a:prstGeom prst="rect">
-            <a:avLst/>
-          </a:prstGeom>
-          <a:noFill/>
-        </p:spPr>
-        <p:txBody>
-          <a:bodyPr wrap="square" anchor="t" lIns="0" rIns="0" tIns="0" bIns="0">
-            <a:spAutoFit/>
-          </a:bodyPr>
-          <a:lstStyle/>
-          <a:p>
-            <a:pPr algn="ctr">
-              <a:lnSpc>
-                <a:spcPct val="110000"/>
-              </a:lnSpc>
-            </a:pPr>
-            <a:r>
-              <a:rPr sz="1150" b="0" i="0">
-                <a:solidFill>
-                  <a:srgbClr val="5A6670"/>
-                </a:solidFill>
-                <a:latin typeface="Calibri"/>
-              </a:rPr>
-              <a:t>metadata</a:t>
-            </a:r>
-          </a:p>
-          <a:p>
-            <a:pPr algn="ctr">
-              <a:lnSpc>
-                <a:spcPct val="110000"/>
-              </a:lnSpc>
-            </a:pPr>
-            <a:r>
-              <a:rPr sz="1150" b="0" i="0">
-                <a:solidFill>
-                  <a:srgbClr val="5A6670"/>
-                </a:solidFill>
-                <a:latin typeface="Calibri"/>
-              </a:rPr>
-              <a:t>completeness</a:t>
-            </a:r>
-          </a:p>
-        </p:txBody>
-      </p:sp>
-      <p:sp>
-        <p:nvSpPr>
-          <p:cNvPr id="19" name="Rectangle 18"/>
-          <p:cNvSpPr/>
-          <p:nvPr/>
-        </p:nvSpPr>
-        <p:spPr>
-          <a:xfrm>
-            <a:off x="9537192" y="2514600"/>
-            <a:ext cx="2103120" cy="1417320"/>
-          </a:xfrm>
-          <a:prstGeom prst="rect">
-            <a:avLst/>
-          </a:prstGeom>
-          <a:solidFill>
-            <a:srgbClr val="EEF1F3"/>
-          </a:solidFill>
-          <a:ln>
-            <a:noFill/>
-          </a:ln>
-          <a:effectLst/>
-        </p:spPr>
-        <p:style>
-          <a:lnRef idx="1">
-            <a:schemeClr val="accent1"/>
-          </a:lnRef>
-          <a:fillRef idx="3">
-            <a:schemeClr val="accent1"/>
-          </a:fillRef>
-          <a:effectRef idx="2">
-            <a:schemeClr val="accent1"/>
-          </a:effectRef>
-          <a:fontRef idx="minor">
-            <a:schemeClr val="lt1"/>
-          </a:fontRef>
-        </p:style>
-        <p:txBody>
-          <a:bodyPr rtlCol="0" anchor="ctr"/>
-          <a:lstStyle/>
-          <a:p>
-            <a:pPr algn="ctr"/>
-          </a:p>
-        </p:txBody>
-      </p:sp>
-      <p:sp>
-        <p:nvSpPr>
-          <p:cNvPr id="20" name="TextBox 19"/>
-          <p:cNvSpPr txBox="1"/>
-          <p:nvPr/>
-        </p:nvSpPr>
-        <p:spPr>
-          <a:xfrm>
-            <a:off x="9537192" y="2670048"/>
-            <a:ext cx="2103120" cy="548640"/>
-          </a:xfrm>
-          <a:prstGeom prst="rect">
-            <a:avLst/>
-          </a:prstGeom>
-          <a:noFill/>
-        </p:spPr>
-        <p:txBody>
-          <a:bodyPr wrap="square" anchor="t" lIns="0" rIns="0" tIns="0" bIns="0">
-            <a:spAutoFit/>
-          </a:bodyPr>
-          <a:lstStyle/>
-          <a:p>
-            <a:pPr algn="ctr">
-              <a:lnSpc>
-                <a:spcPct val="100000"/>
-              </a:lnSpc>
-            </a:pPr>
-            <a:r>
-              <a:rPr sz="3300" b="1" i="0">
-                <a:solidFill>
-                  <a:srgbClr val="1B3A5C"/>
-                </a:solidFill>
-                <a:latin typeface="Calibri"/>
-              </a:rPr>
-              <a:t>3</a:t>
-            </a:r>
-          </a:p>
-        </p:txBody>
-      </p:sp>
-      <p:sp>
-        <p:nvSpPr>
-          <p:cNvPr id="21" name="TextBox 20"/>
-          <p:cNvSpPr txBox="1"/>
-          <p:nvPr/>
-        </p:nvSpPr>
-        <p:spPr>
-          <a:xfrm>
-            <a:off x="9537192" y="3246120"/>
-            <a:ext cx="2103120" cy="640080"/>
-          </a:xfrm>
-          <a:prstGeom prst="rect">
-            <a:avLst/>
-          </a:prstGeom>
-          <a:noFill/>
-        </p:spPr>
-        <p:txBody>
-          <a:bodyPr wrap="square" anchor="t" lIns="0" rIns="0" tIns="0" bIns="0">
-            <a:spAutoFit/>
-          </a:bodyPr>
-          <a:lstStyle/>
-          <a:p>
-            <a:pPr algn="ctr">
-              <a:lnSpc>
-                <a:spcPct val="110000"/>
-              </a:lnSpc>
-            </a:pPr>
-            <a:r>
-              <a:rPr sz="1150" b="0" i="0">
-                <a:solidFill>
-                  <a:srgbClr val="5A6670"/>
-                </a:solidFill>
-                <a:latin typeface="Calibri"/>
-              </a:rPr>
-              <a:t>informative clades</a:t>
-            </a:r>
-          </a:p>
-          <a:p>
-            <a:pPr algn="ctr">
-              <a:lnSpc>
-                <a:spcPct val="110000"/>
-              </a:lnSpc>
-            </a:pPr>
-            <a:r>
-              <a:rPr sz="1150" b="0" i="0">
-                <a:solidFill>
-                  <a:srgbClr val="5A6670"/>
-                </a:solidFill>
-                <a:latin typeface="Calibri"/>
-              </a:rPr>
-              <a:t>per group</a:t>
-            </a:r>
-          </a:p>
-        </p:txBody>
-      </p:sp>
-      <p:sp>
-        <p:nvSpPr>
-          <p:cNvPr id="22" name="Rectangle 21"/>
-          <p:cNvSpPr/>
-          <p:nvPr/>
-        </p:nvSpPr>
-        <p:spPr>
-          <a:xfrm>
-            <a:off x="502920" y="4343400"/>
-            <a:ext cx="50800" cy="1554480"/>
-          </a:xfrm>
-          <a:prstGeom prst="rect">
-            <a:avLst/>
-          </a:prstGeom>
-          <a:solidFill>
-            <a:srgbClr val="1F8A70"/>
-          </a:solidFill>
-          <a:ln>
-            <a:noFill/>
-          </a:ln>
-          <a:effectLst/>
-        </p:spPr>
-        <p:style>
-          <a:lnRef idx="1">
-            <a:schemeClr val="accent1"/>
-          </a:lnRef>
-          <a:fillRef idx="3">
-            <a:schemeClr val="accent1"/>
-          </a:fillRef>
-          <a:effectRef idx="2">
-            <a:schemeClr val="accent1"/>
-          </a:effectRef>
-          <a:fontRef idx="minor">
-            <a:schemeClr val="lt1"/>
-          </a:fontRef>
-        </p:style>
-        <p:txBody>
-          <a:bodyPr rtlCol="0" anchor="ctr"/>
-          <a:lstStyle/>
-          <a:p>
-            <a:pPr algn="ctr"/>
-          </a:p>
-        </p:txBody>
-      </p:sp>
-      <p:sp>
-        <p:nvSpPr>
-          <p:cNvPr id="23" name="TextBox 22"/>
-          <p:cNvSpPr txBox="1"/>
-          <p:nvPr/>
-        </p:nvSpPr>
-        <p:spPr>
-          <a:xfrm>
-            <a:off x="868680" y="4370832"/>
-            <a:ext cx="10789920" cy="1554480"/>
-          </a:xfrm>
-          <a:prstGeom prst="rect">
-            <a:avLst/>
-          </a:prstGeom>
-          <a:noFill/>
-        </p:spPr>
-        <p:txBody>
-          <a:bodyPr wrap="square" anchor="t" lIns="0" rIns="0" tIns="0" bIns="0">
-            <a:spAutoFit/>
-          </a:bodyPr>
-          <a:lstStyle/>
-          <a:p>
-            <a:pPr algn="l">
-              <a:lnSpc>
-                <a:spcPct val="140000"/>
-              </a:lnSpc>
-            </a:pPr>
-            <a:r>
-              <a:rPr sz="1350" b="0" i="0">
-                <a:solidFill>
-                  <a:srgbClr val="222A30"/>
-                </a:solidFill>
-                <a:latin typeface="Calibri"/>
-              </a:rPr>
-              <a:t>Why this is a threshold and not a list of exclusions</a:t>
-            </a:r>
-          </a:p>
-          <a:p>
-            <a:pPr algn="l">
-              <a:lnSpc>
-                <a:spcPct val="140000"/>
-              </a:lnSpc>
-            </a:pPr>
-            <a:r>
-              <a:rPr sz="1350" b="0" i="0">
-                <a:solidFill>
-                  <a:srgbClr val="222A30"/>
-                </a:solidFill>
-                <a:latin typeface="Calibri"/>
-              </a:rPr>
-              <a:t>Writing down which lineages to drop AFTER seeing the corpus is selection on the outcome. A threshold is a property of sampling,</a:t>
-            </a:r>
-          </a:p>
-          <a:p>
-            <a:pPr algn="l">
-              <a:lnSpc>
-                <a:spcPct val="140000"/>
-              </a:lnSpc>
-            </a:pPr>
-            <a:r>
-              <a:rPr sz="1350" b="0" i="0">
-                <a:solidFill>
-                  <a:srgbClr val="222A30"/>
-                </a:solidFill>
-                <a:latin typeface="Calibri"/>
-              </a:rPr>
-              <a:t>knowable before any test runs, and it lives in the config — so a run stays fully described by (commit, config, accession list).</a:t>
-            </a:r>
-          </a:p>
-        </p:txBody>
-      </p:sp>
-      <p:sp>
-        <p:nvSpPr>
-          <p:cNvPr id="24" name="TextBox 23"/>
           <p:cNvSpPr txBox="1"/>
           <p:nvPr/>
         </p:nvSpPr>
@@ -10542,14 +12633,14 @@
                 </a:solidFill>
                 <a:latin typeface="Calibri"/>
               </a:rPr>
-              <a:t>g4watch/validation/minimum_data_gate.py — thresholds from Build Architecture Appendix C</a:t>
-            </a:r>
-          </a:p>
-        </p:txBody>
-      </p:sp>
-      <p:sp>
-        <p:nvSpPr>
-          <p:cNvPr id="25" name="TextBox 24"/>
+              <a:t>FMDV2026 throughout — one pathogen end to end, not totals that mix corpora stopped at different stages</a:t>
+            </a:r>
+          </a:p>
+        </p:txBody>
+      </p:sp>
+      <p:sp>
+        <p:nvSpPr>
+          <p:cNvPr id="9" name="TextBox 8"/>
           <p:cNvSpPr txBox="1"/>
           <p:nvPr/>
         </p:nvSpPr>
@@ -10690,7 +12781,7 @@
                 </a:solidFill>
                 <a:latin typeface="Calibri"/>
               </a:rPr>
-              <a:t>WHAT IT WAS RUN ON</a:t>
+              <a:t>BEFORE ANY TEST RUNS</a:t>
             </a:r>
           </a:p>
         </p:txBody>
@@ -10729,7 +12820,7 @@
                 </a:solidFill>
                 <a:latin typeface="Calibri"/>
               </a:rPr>
-              <a:t>Eleven pathogens, real GenBank corpora</a:t>
+              <a:t>A minimum-data floor, fixed in advance</a:t>
             </a:r>
           </a:p>
         </p:txBody>
@@ -10778,104 +12869,869 @@
           </a:p>
         </p:txBody>
       </p:sp>
-      <p:pic>
-        <p:nvPicPr>
-          <p:cNvPr id="6" name="Picture 5" descr="fig_corpus.png"/>
-          <p:cNvPicPr>
-            <a:picLocks noChangeAspect="1"/>
-          </p:cNvPicPr>
-          <p:nvPr/>
-        </p:nvPicPr>
-        <p:blipFill>
-          <a:blip r:embed="rId2"/>
-          <a:stretch>
-            <a:fillRect/>
-          </a:stretch>
-        </p:blipFill>
-        <p:spPr>
-          <a:xfrm>
-            <a:off x="1527048" y="1280160"/>
-            <a:ext cx="9144000" cy="3938740"/>
-          </a:xfrm>
-          <a:prstGeom prst="rect">
-            <a:avLst/>
-          </a:prstGeom>
-        </p:spPr>
-      </p:pic>
-      <p:sp>
-        <p:nvSpPr>
-          <p:cNvPr id="7" name="TextBox 6"/>
-          <p:cNvSpPr txBox="1"/>
-          <p:nvPr/>
-        </p:nvSpPr>
-        <p:spPr>
-          <a:xfrm>
-            <a:off x="502920" y="5440680"/>
-            <a:ext cx="11155680" cy="914400"/>
-          </a:xfrm>
-          <a:prstGeom prst="rect">
-            <a:avLst/>
-          </a:prstGeom>
-          <a:noFill/>
-        </p:spPr>
-        <p:txBody>
-          <a:bodyPr wrap="square" anchor="t" lIns="0" rIns="0" tIns="0" bIns="0">
-            <a:spAutoFit/>
-          </a:bodyPr>
-          <a:lstStyle/>
-          <a:p>
-            <a:pPr algn="l">
-              <a:lnSpc>
-                <a:spcPct val="135000"/>
-              </a:lnSpc>
-            </a:pPr>
-            <a:r>
-              <a:rPr sz="1250" b="0" i="0">
+      <p:sp>
+        <p:nvSpPr>
+          <p:cNvPr id="6" name="TextBox 5"/>
+          <p:cNvSpPr txBox="1"/>
+          <p:nvPr/>
+        </p:nvSpPr>
+        <p:spPr>
+          <a:xfrm>
+            <a:off x="502920" y="1325880"/>
+            <a:ext cx="11155680" cy="822960"/>
+          </a:xfrm>
+          <a:prstGeom prst="rect">
+            <a:avLst/>
+          </a:prstGeom>
+          <a:noFill/>
+        </p:spPr>
+        <p:txBody>
+          <a:bodyPr wrap="square" anchor="t" lIns="0" rIns="0" tIns="0" bIns="0">
+            <a:spAutoFit/>
+          </a:bodyPr>
+          <a:lstStyle/>
+          <a:p>
+            <a:pPr algn="l">
+              <a:lnSpc>
+                <a:spcPct val="130000"/>
+              </a:lnSpc>
+            </a:pPr>
+            <a:r>
+              <a:rPr sz="1450" b="0" i="0">
+                <a:solidFill>
+                  <a:srgbClr val="222A30"/>
+                </a:solidFill>
+                <a:latin typeface="Calibri"/>
+              </a:rPr>
+              <a:t>A statistic computed on four sequences is not a weak result — it is not a result. Every locus is checked against these</a:t>
+            </a:r>
+          </a:p>
+          <a:p>
+            <a:pPr algn="l">
+              <a:lnSpc>
+                <a:spcPct val="130000"/>
+              </a:lnSpc>
+            </a:pPr>
+            <a:r>
+              <a:rPr sz="1450" b="0" i="0">
+                <a:solidFill>
+                  <a:srgbClr val="222A30"/>
+                </a:solidFill>
+                <a:latin typeface="Calibri"/>
+              </a:rPr>
+              <a:t>thresholds first, and a locus that fails them returns INSUFFICIENT_DATA rather than a number nobody should read.</a:t>
+            </a:r>
+          </a:p>
+        </p:txBody>
+      </p:sp>
+      <p:sp>
+        <p:nvSpPr>
+          <p:cNvPr id="7" name="Rectangle 6"/>
+          <p:cNvSpPr/>
+          <p:nvPr/>
+        </p:nvSpPr>
+        <p:spPr>
+          <a:xfrm>
+            <a:off x="502920" y="2514600"/>
+            <a:ext cx="2103120" cy="1417320"/>
+          </a:xfrm>
+          <a:prstGeom prst="rect">
+            <a:avLst/>
+          </a:prstGeom>
+          <a:solidFill>
+            <a:srgbClr val="EEF1F3"/>
+          </a:solidFill>
+          <a:ln>
+            <a:noFill/>
+          </a:ln>
+          <a:effectLst/>
+        </p:spPr>
+        <p:style>
+          <a:lnRef idx="1">
+            <a:schemeClr val="accent1"/>
+          </a:lnRef>
+          <a:fillRef idx="3">
+            <a:schemeClr val="accent1"/>
+          </a:fillRef>
+          <a:effectRef idx="2">
+            <a:schemeClr val="accent1"/>
+          </a:effectRef>
+          <a:fontRef idx="minor">
+            <a:schemeClr val="lt1"/>
+          </a:fontRef>
+        </p:style>
+        <p:txBody>
+          <a:bodyPr rtlCol="0" anchor="ctr"/>
+          <a:lstStyle/>
+          <a:p>
+            <a:pPr algn="ctr"/>
+          </a:p>
+        </p:txBody>
+      </p:sp>
+      <p:sp>
+        <p:nvSpPr>
+          <p:cNvPr id="8" name="TextBox 7"/>
+          <p:cNvSpPr txBox="1"/>
+          <p:nvPr/>
+        </p:nvSpPr>
+        <p:spPr>
+          <a:xfrm>
+            <a:off x="502920" y="2670048"/>
+            <a:ext cx="2103120" cy="548640"/>
+          </a:xfrm>
+          <a:prstGeom prst="rect">
+            <a:avLst/>
+          </a:prstGeom>
+          <a:noFill/>
+        </p:spPr>
+        <p:txBody>
+          <a:bodyPr wrap="square" anchor="t" lIns="0" rIns="0" tIns="0" bIns="0">
+            <a:spAutoFit/>
+          </a:bodyPr>
+          <a:lstStyle/>
+          <a:p>
+            <a:pPr algn="ctr">
+              <a:lnSpc>
+                <a:spcPct val="100000"/>
+              </a:lnSpc>
+            </a:pPr>
+            <a:r>
+              <a:rPr sz="3300" b="1" i="0">
+                <a:solidFill>
+                  <a:srgbClr val="1B3A5C"/>
+                </a:solidFill>
+                <a:latin typeface="Calibri"/>
+              </a:rPr>
+              <a:t>30</a:t>
+            </a:r>
+          </a:p>
+        </p:txBody>
+      </p:sp>
+      <p:sp>
+        <p:nvSpPr>
+          <p:cNvPr id="9" name="TextBox 8"/>
+          <p:cNvSpPr txBox="1"/>
+          <p:nvPr/>
+        </p:nvSpPr>
+        <p:spPr>
+          <a:xfrm>
+            <a:off x="502920" y="3246120"/>
+            <a:ext cx="2103120" cy="640080"/>
+          </a:xfrm>
+          <a:prstGeom prst="rect">
+            <a:avLst/>
+          </a:prstGeom>
+          <a:noFill/>
+        </p:spPr>
+        <p:txBody>
+          <a:bodyPr wrap="square" anchor="t" lIns="0" rIns="0" tIns="0" bIns="0">
+            <a:spAutoFit/>
+          </a:bodyPr>
+          <a:lstStyle/>
+          <a:p>
+            <a:pPr algn="ctr">
+              <a:lnSpc>
+                <a:spcPct val="110000"/>
+              </a:lnSpc>
+            </a:pPr>
+            <a:r>
+              <a:rPr sz="1150" b="0" i="0">
                 <a:solidFill>
                   <a:srgbClr val="5A6670"/>
                 </a:solidFill>
                 <a:latin typeface="Calibri"/>
               </a:rPr>
-              <a:t>Ten livestock viruses across four genome types — positive- and negative-sense RNA, segmented dsRNA, and large dsDNA — plus</a:t>
-            </a:r>
-          </a:p>
-          <a:p>
-            <a:pPr algn="l">
-              <a:lnSpc>
-                <a:spcPct val="135000"/>
-              </a:lnSpc>
-            </a:pPr>
-            <a:r>
-              <a:rPr sz="1250" b="0" i="0">
+              <a:t>sequences in the</a:t>
+            </a:r>
+          </a:p>
+          <a:p>
+            <a:pPr algn="ctr">
+              <a:lnSpc>
+                <a:spcPct val="110000"/>
+              </a:lnSpc>
+            </a:pPr>
+            <a:r>
+              <a:rPr sz="1150" b="0" i="0">
                 <a:solidFill>
                   <a:srgbClr val="5A6670"/>
                 </a:solidFill>
                 <a:latin typeface="Calibri"/>
               </a:rPr>
-              <a:t>Epstein–Barr virus as a cross-species check on a GC-rich human herpesvirus. No synthetic sequence appears in any of these counts; the</a:t>
-            </a:r>
-          </a:p>
-          <a:p>
-            <a:pPr algn="l">
-              <a:lnSpc>
-                <a:spcPct val="135000"/>
-              </a:lnSpc>
-            </a:pPr>
-            <a:r>
-              <a:rPr sz="1250" b="0" i="0">
+              <a:t>analysis window</a:t>
+            </a:r>
+          </a:p>
+        </p:txBody>
+      </p:sp>
+      <p:sp>
+        <p:nvSpPr>
+          <p:cNvPr id="10" name="Rectangle 9"/>
+          <p:cNvSpPr/>
+          <p:nvPr/>
+        </p:nvSpPr>
+        <p:spPr>
+          <a:xfrm>
+            <a:off x="2761488" y="2514600"/>
+            <a:ext cx="2103120" cy="1417320"/>
+          </a:xfrm>
+          <a:prstGeom prst="rect">
+            <a:avLst/>
+          </a:prstGeom>
+          <a:solidFill>
+            <a:srgbClr val="EEF1F3"/>
+          </a:solidFill>
+          <a:ln>
+            <a:noFill/>
+          </a:ln>
+          <a:effectLst/>
+        </p:spPr>
+        <p:style>
+          <a:lnRef idx="1">
+            <a:schemeClr val="accent1"/>
+          </a:lnRef>
+          <a:fillRef idx="3">
+            <a:schemeClr val="accent1"/>
+          </a:fillRef>
+          <a:effectRef idx="2">
+            <a:schemeClr val="accent1"/>
+          </a:effectRef>
+          <a:fontRef idx="minor">
+            <a:schemeClr val="lt1"/>
+          </a:fontRef>
+        </p:style>
+        <p:txBody>
+          <a:bodyPr rtlCol="0" anchor="ctr"/>
+          <a:lstStyle/>
+          <a:p>
+            <a:pPr algn="ctr"/>
+          </a:p>
+        </p:txBody>
+      </p:sp>
+      <p:sp>
+        <p:nvSpPr>
+          <p:cNvPr id="11" name="TextBox 10"/>
+          <p:cNvSpPr txBox="1"/>
+          <p:nvPr/>
+        </p:nvSpPr>
+        <p:spPr>
+          <a:xfrm>
+            <a:off x="2761488" y="2670048"/>
+            <a:ext cx="2103120" cy="548640"/>
+          </a:xfrm>
+          <a:prstGeom prst="rect">
+            <a:avLst/>
+          </a:prstGeom>
+          <a:noFill/>
+        </p:spPr>
+        <p:txBody>
+          <a:bodyPr wrap="square" anchor="t" lIns="0" rIns="0" tIns="0" bIns="0">
+            <a:spAutoFit/>
+          </a:bodyPr>
+          <a:lstStyle/>
+          <a:p>
+            <a:pPr algn="ctr">
+              <a:lnSpc>
+                <a:spcPct val="100000"/>
+              </a:lnSpc>
+            </a:pPr>
+            <a:r>
+              <a:rPr sz="3300" b="1" i="0">
+                <a:solidFill>
+                  <a:srgbClr val="1B3A5C"/>
+                </a:solidFill>
+                <a:latin typeface="Calibri"/>
+              </a:rPr>
+              <a:t>20</a:t>
+            </a:r>
+          </a:p>
+        </p:txBody>
+      </p:sp>
+      <p:sp>
+        <p:nvSpPr>
+          <p:cNvPr id="12" name="TextBox 11"/>
+          <p:cNvSpPr txBox="1"/>
+          <p:nvPr/>
+        </p:nvSpPr>
+        <p:spPr>
+          <a:xfrm>
+            <a:off x="2761488" y="3246120"/>
+            <a:ext cx="2103120" cy="640080"/>
+          </a:xfrm>
+          <a:prstGeom prst="rect">
+            <a:avLst/>
+          </a:prstGeom>
+          <a:noFill/>
+        </p:spPr>
+        <p:txBody>
+          <a:bodyPr wrap="square" anchor="t" lIns="0" rIns="0" tIns="0" bIns="0">
+            <a:spAutoFit/>
+          </a:bodyPr>
+          <a:lstStyle/>
+          <a:p>
+            <a:pPr algn="ctr">
+              <a:lnSpc>
+                <a:spcPct val="110000"/>
+              </a:lnSpc>
+            </a:pPr>
+            <a:r>
+              <a:rPr sz="1150" b="0" i="0">
                 <a:solidFill>
                   <a:srgbClr val="5A6670"/>
                 </a:solidFill>
                 <a:latin typeface="Calibri"/>
               </a:rPr>
-              <a:t>synthetic datasets used to test the software live separately under data/synthetic/ and are prefixed SYNTH-.</a:t>
-            </a:r>
-          </a:p>
-        </p:txBody>
-      </p:sp>
-      <p:sp>
-        <p:nvSpPr>
-          <p:cNvPr id="8" name="TextBox 7"/>
+              <a:t>sequences in every</a:t>
+            </a:r>
+          </a:p>
+          <a:p>
+            <a:pPr algn="ctr">
+              <a:lnSpc>
+                <a:spcPct val="110000"/>
+              </a:lnSpc>
+            </a:pPr>
+            <a:r>
+              <a:rPr sz="1150" b="0" i="0">
+                <a:solidFill>
+                  <a:srgbClr val="5A6670"/>
+                </a:solidFill>
+                <a:latin typeface="Calibri"/>
+              </a:rPr>
+              <a:t>lineage</a:t>
+            </a:r>
+          </a:p>
+        </p:txBody>
+      </p:sp>
+      <p:sp>
+        <p:nvSpPr>
+          <p:cNvPr id="13" name="Rectangle 12"/>
+          <p:cNvSpPr/>
+          <p:nvPr/>
+        </p:nvSpPr>
+        <p:spPr>
+          <a:xfrm>
+            <a:off x="5020056" y="2514600"/>
+            <a:ext cx="2103120" cy="1417320"/>
+          </a:xfrm>
+          <a:prstGeom prst="rect">
+            <a:avLst/>
+          </a:prstGeom>
+          <a:solidFill>
+            <a:srgbClr val="EEF1F3"/>
+          </a:solidFill>
+          <a:ln>
+            <a:noFill/>
+          </a:ln>
+          <a:effectLst/>
+        </p:spPr>
+        <p:style>
+          <a:lnRef idx="1">
+            <a:schemeClr val="accent1"/>
+          </a:lnRef>
+          <a:fillRef idx="3">
+            <a:schemeClr val="accent1"/>
+          </a:fillRef>
+          <a:effectRef idx="2">
+            <a:schemeClr val="accent1"/>
+          </a:effectRef>
+          <a:fontRef idx="minor">
+            <a:schemeClr val="lt1"/>
+          </a:fontRef>
+        </p:style>
+        <p:txBody>
+          <a:bodyPr rtlCol="0" anchor="ctr"/>
+          <a:lstStyle/>
+          <a:p>
+            <a:pPr algn="ctr"/>
+          </a:p>
+        </p:txBody>
+      </p:sp>
+      <p:sp>
+        <p:nvSpPr>
+          <p:cNvPr id="14" name="TextBox 13"/>
+          <p:cNvSpPr txBox="1"/>
+          <p:nvPr/>
+        </p:nvSpPr>
+        <p:spPr>
+          <a:xfrm>
+            <a:off x="5020056" y="2670048"/>
+            <a:ext cx="2103120" cy="548640"/>
+          </a:xfrm>
+          <a:prstGeom prst="rect">
+            <a:avLst/>
+          </a:prstGeom>
+          <a:noFill/>
+        </p:spPr>
+        <p:txBody>
+          <a:bodyPr wrap="square" anchor="t" lIns="0" rIns="0" tIns="0" bIns="0">
+            <a:spAutoFit/>
+          </a:bodyPr>
+          <a:lstStyle/>
+          <a:p>
+            <a:pPr algn="ctr">
+              <a:lnSpc>
+                <a:spcPct val="100000"/>
+              </a:lnSpc>
+            </a:pPr>
+            <a:r>
+              <a:rPr sz="3300" b="1" i="0">
+                <a:solidFill>
+                  <a:srgbClr val="1B3A5C"/>
+                </a:solidFill>
+                <a:latin typeface="Calibri"/>
+              </a:rPr>
+              <a:t>3</a:t>
+            </a:r>
+          </a:p>
+        </p:txBody>
+      </p:sp>
+      <p:sp>
+        <p:nvSpPr>
+          <p:cNvPr id="15" name="TextBox 14"/>
+          <p:cNvSpPr txBox="1"/>
+          <p:nvPr/>
+        </p:nvSpPr>
+        <p:spPr>
+          <a:xfrm>
+            <a:off x="5020056" y="3246120"/>
+            <a:ext cx="2103120" cy="640080"/>
+          </a:xfrm>
+          <a:prstGeom prst="rect">
+            <a:avLst/>
+          </a:prstGeom>
+          <a:noFill/>
+        </p:spPr>
+        <p:txBody>
+          <a:bodyPr wrap="square" anchor="t" lIns="0" rIns="0" tIns="0" bIns="0">
+            <a:spAutoFit/>
+          </a:bodyPr>
+          <a:lstStyle/>
+          <a:p>
+            <a:pPr algn="ctr">
+              <a:lnSpc>
+                <a:spcPct val="110000"/>
+              </a:lnSpc>
+            </a:pPr>
+            <a:r>
+              <a:rPr sz="1150" b="0" i="0">
+                <a:solidFill>
+                  <a:srgbClr val="5A6670"/>
+                </a:solidFill>
+                <a:latin typeface="Calibri"/>
+              </a:rPr>
+              <a:t>distinct sampling</a:t>
+            </a:r>
+          </a:p>
+          <a:p>
+            <a:pPr algn="ctr">
+              <a:lnSpc>
+                <a:spcPct val="110000"/>
+              </a:lnSpc>
+            </a:pPr>
+            <a:r>
+              <a:rPr sz="1150" b="0" i="0">
+                <a:solidFill>
+                  <a:srgbClr val="5A6670"/>
+                </a:solidFill>
+                <a:latin typeface="Calibri"/>
+              </a:rPr>
+              <a:t>timepoints</a:t>
+            </a:r>
+          </a:p>
+        </p:txBody>
+      </p:sp>
+      <p:sp>
+        <p:nvSpPr>
+          <p:cNvPr id="16" name="Rectangle 15"/>
+          <p:cNvSpPr/>
+          <p:nvPr/>
+        </p:nvSpPr>
+        <p:spPr>
+          <a:xfrm>
+            <a:off x="7278624" y="2514600"/>
+            <a:ext cx="2103120" cy="1417320"/>
+          </a:xfrm>
+          <a:prstGeom prst="rect">
+            <a:avLst/>
+          </a:prstGeom>
+          <a:solidFill>
+            <a:srgbClr val="EEF1F3"/>
+          </a:solidFill>
+          <a:ln>
+            <a:noFill/>
+          </a:ln>
+          <a:effectLst/>
+        </p:spPr>
+        <p:style>
+          <a:lnRef idx="1">
+            <a:schemeClr val="accent1"/>
+          </a:lnRef>
+          <a:fillRef idx="3">
+            <a:schemeClr val="accent1"/>
+          </a:fillRef>
+          <a:effectRef idx="2">
+            <a:schemeClr val="accent1"/>
+          </a:effectRef>
+          <a:fontRef idx="minor">
+            <a:schemeClr val="lt1"/>
+          </a:fontRef>
+        </p:style>
+        <p:txBody>
+          <a:bodyPr rtlCol="0" anchor="ctr"/>
+          <a:lstStyle/>
+          <a:p>
+            <a:pPr algn="ctr"/>
+          </a:p>
+        </p:txBody>
+      </p:sp>
+      <p:sp>
+        <p:nvSpPr>
+          <p:cNvPr id="17" name="TextBox 16"/>
+          <p:cNvSpPr txBox="1"/>
+          <p:nvPr/>
+        </p:nvSpPr>
+        <p:spPr>
+          <a:xfrm>
+            <a:off x="7278624" y="2670048"/>
+            <a:ext cx="2103120" cy="548640"/>
+          </a:xfrm>
+          <a:prstGeom prst="rect">
+            <a:avLst/>
+          </a:prstGeom>
+          <a:noFill/>
+        </p:spPr>
+        <p:txBody>
+          <a:bodyPr wrap="square" anchor="t" lIns="0" rIns="0" tIns="0" bIns="0">
+            <a:spAutoFit/>
+          </a:bodyPr>
+          <a:lstStyle/>
+          <a:p>
+            <a:pPr algn="ctr">
+              <a:lnSpc>
+                <a:spcPct val="100000"/>
+              </a:lnSpc>
+            </a:pPr>
+            <a:r>
+              <a:rPr sz="3300" b="1" i="0">
+                <a:solidFill>
+                  <a:srgbClr val="1B3A5C"/>
+                </a:solidFill>
+                <a:latin typeface="Calibri"/>
+              </a:rPr>
+              <a:t>90%</a:t>
+            </a:r>
+          </a:p>
+        </p:txBody>
+      </p:sp>
+      <p:sp>
+        <p:nvSpPr>
+          <p:cNvPr id="18" name="TextBox 17"/>
+          <p:cNvSpPr txBox="1"/>
+          <p:nvPr/>
+        </p:nvSpPr>
+        <p:spPr>
+          <a:xfrm>
+            <a:off x="7278624" y="3246120"/>
+            <a:ext cx="2103120" cy="640080"/>
+          </a:xfrm>
+          <a:prstGeom prst="rect">
+            <a:avLst/>
+          </a:prstGeom>
+          <a:noFill/>
+        </p:spPr>
+        <p:txBody>
+          <a:bodyPr wrap="square" anchor="t" lIns="0" rIns="0" tIns="0" bIns="0">
+            <a:spAutoFit/>
+          </a:bodyPr>
+          <a:lstStyle/>
+          <a:p>
+            <a:pPr algn="ctr">
+              <a:lnSpc>
+                <a:spcPct val="110000"/>
+              </a:lnSpc>
+            </a:pPr>
+            <a:r>
+              <a:rPr sz="1150" b="0" i="0">
+                <a:solidFill>
+                  <a:srgbClr val="5A6670"/>
+                </a:solidFill>
+                <a:latin typeface="Calibri"/>
+              </a:rPr>
+              <a:t>metadata</a:t>
+            </a:r>
+          </a:p>
+          <a:p>
+            <a:pPr algn="ctr">
+              <a:lnSpc>
+                <a:spcPct val="110000"/>
+              </a:lnSpc>
+            </a:pPr>
+            <a:r>
+              <a:rPr sz="1150" b="0" i="0">
+                <a:solidFill>
+                  <a:srgbClr val="5A6670"/>
+                </a:solidFill>
+                <a:latin typeface="Calibri"/>
+              </a:rPr>
+              <a:t>completeness</a:t>
+            </a:r>
+          </a:p>
+        </p:txBody>
+      </p:sp>
+      <p:sp>
+        <p:nvSpPr>
+          <p:cNvPr id="19" name="Rectangle 18"/>
+          <p:cNvSpPr/>
+          <p:nvPr/>
+        </p:nvSpPr>
+        <p:spPr>
+          <a:xfrm>
+            <a:off x="9537192" y="2514600"/>
+            <a:ext cx="2103120" cy="1417320"/>
+          </a:xfrm>
+          <a:prstGeom prst="rect">
+            <a:avLst/>
+          </a:prstGeom>
+          <a:solidFill>
+            <a:srgbClr val="EEF1F3"/>
+          </a:solidFill>
+          <a:ln>
+            <a:noFill/>
+          </a:ln>
+          <a:effectLst/>
+        </p:spPr>
+        <p:style>
+          <a:lnRef idx="1">
+            <a:schemeClr val="accent1"/>
+          </a:lnRef>
+          <a:fillRef idx="3">
+            <a:schemeClr val="accent1"/>
+          </a:fillRef>
+          <a:effectRef idx="2">
+            <a:schemeClr val="accent1"/>
+          </a:effectRef>
+          <a:fontRef idx="minor">
+            <a:schemeClr val="lt1"/>
+          </a:fontRef>
+        </p:style>
+        <p:txBody>
+          <a:bodyPr rtlCol="0" anchor="ctr"/>
+          <a:lstStyle/>
+          <a:p>
+            <a:pPr algn="ctr"/>
+          </a:p>
+        </p:txBody>
+      </p:sp>
+      <p:sp>
+        <p:nvSpPr>
+          <p:cNvPr id="20" name="TextBox 19"/>
+          <p:cNvSpPr txBox="1"/>
+          <p:nvPr/>
+        </p:nvSpPr>
+        <p:spPr>
+          <a:xfrm>
+            <a:off x="9537192" y="2670048"/>
+            <a:ext cx="2103120" cy="548640"/>
+          </a:xfrm>
+          <a:prstGeom prst="rect">
+            <a:avLst/>
+          </a:prstGeom>
+          <a:noFill/>
+        </p:spPr>
+        <p:txBody>
+          <a:bodyPr wrap="square" anchor="t" lIns="0" rIns="0" tIns="0" bIns="0">
+            <a:spAutoFit/>
+          </a:bodyPr>
+          <a:lstStyle/>
+          <a:p>
+            <a:pPr algn="ctr">
+              <a:lnSpc>
+                <a:spcPct val="100000"/>
+              </a:lnSpc>
+            </a:pPr>
+            <a:r>
+              <a:rPr sz="3300" b="1" i="0">
+                <a:solidFill>
+                  <a:srgbClr val="1B3A5C"/>
+                </a:solidFill>
+                <a:latin typeface="Calibri"/>
+              </a:rPr>
+              <a:t>3</a:t>
+            </a:r>
+          </a:p>
+        </p:txBody>
+      </p:sp>
+      <p:sp>
+        <p:nvSpPr>
+          <p:cNvPr id="21" name="TextBox 20"/>
+          <p:cNvSpPr txBox="1"/>
+          <p:nvPr/>
+        </p:nvSpPr>
+        <p:spPr>
+          <a:xfrm>
+            <a:off x="9537192" y="3246120"/>
+            <a:ext cx="2103120" cy="640080"/>
+          </a:xfrm>
+          <a:prstGeom prst="rect">
+            <a:avLst/>
+          </a:prstGeom>
+          <a:noFill/>
+        </p:spPr>
+        <p:txBody>
+          <a:bodyPr wrap="square" anchor="t" lIns="0" rIns="0" tIns="0" bIns="0">
+            <a:spAutoFit/>
+          </a:bodyPr>
+          <a:lstStyle/>
+          <a:p>
+            <a:pPr algn="ctr">
+              <a:lnSpc>
+                <a:spcPct val="110000"/>
+              </a:lnSpc>
+            </a:pPr>
+            <a:r>
+              <a:rPr sz="1150" b="0" i="0">
+                <a:solidFill>
+                  <a:srgbClr val="5A6670"/>
+                </a:solidFill>
+                <a:latin typeface="Calibri"/>
+              </a:rPr>
+              <a:t>informative clades</a:t>
+            </a:r>
+          </a:p>
+          <a:p>
+            <a:pPr algn="ctr">
+              <a:lnSpc>
+                <a:spcPct val="110000"/>
+              </a:lnSpc>
+            </a:pPr>
+            <a:r>
+              <a:rPr sz="1150" b="0" i="0">
+                <a:solidFill>
+                  <a:srgbClr val="5A6670"/>
+                </a:solidFill>
+                <a:latin typeface="Calibri"/>
+              </a:rPr>
+              <a:t>per group</a:t>
+            </a:r>
+          </a:p>
+        </p:txBody>
+      </p:sp>
+      <p:sp>
+        <p:nvSpPr>
+          <p:cNvPr id="22" name="Rectangle 21"/>
+          <p:cNvSpPr/>
+          <p:nvPr/>
+        </p:nvSpPr>
+        <p:spPr>
+          <a:xfrm>
+            <a:off x="502920" y="4343400"/>
+            <a:ext cx="50800" cy="1554480"/>
+          </a:xfrm>
+          <a:prstGeom prst="rect">
+            <a:avLst/>
+          </a:prstGeom>
+          <a:solidFill>
+            <a:srgbClr val="1F8A70"/>
+          </a:solidFill>
+          <a:ln>
+            <a:noFill/>
+          </a:ln>
+          <a:effectLst/>
+        </p:spPr>
+        <p:style>
+          <a:lnRef idx="1">
+            <a:schemeClr val="accent1"/>
+          </a:lnRef>
+          <a:fillRef idx="3">
+            <a:schemeClr val="accent1"/>
+          </a:fillRef>
+          <a:effectRef idx="2">
+            <a:schemeClr val="accent1"/>
+          </a:effectRef>
+          <a:fontRef idx="minor">
+            <a:schemeClr val="lt1"/>
+          </a:fontRef>
+        </p:style>
+        <p:txBody>
+          <a:bodyPr rtlCol="0" anchor="ctr"/>
+          <a:lstStyle/>
+          <a:p>
+            <a:pPr algn="ctr"/>
+          </a:p>
+        </p:txBody>
+      </p:sp>
+      <p:sp>
+        <p:nvSpPr>
+          <p:cNvPr id="23" name="TextBox 22"/>
+          <p:cNvSpPr txBox="1"/>
+          <p:nvPr/>
+        </p:nvSpPr>
+        <p:spPr>
+          <a:xfrm>
+            <a:off x="868680" y="4370832"/>
+            <a:ext cx="10789920" cy="1554480"/>
+          </a:xfrm>
+          <a:prstGeom prst="rect">
+            <a:avLst/>
+          </a:prstGeom>
+          <a:noFill/>
+        </p:spPr>
+        <p:txBody>
+          <a:bodyPr wrap="square" anchor="t" lIns="0" rIns="0" tIns="0" bIns="0">
+            <a:spAutoFit/>
+          </a:bodyPr>
+          <a:lstStyle/>
+          <a:p>
+            <a:pPr algn="l">
+              <a:lnSpc>
+                <a:spcPct val="140000"/>
+              </a:lnSpc>
+            </a:pPr>
+            <a:r>
+              <a:rPr sz="1350" b="0" i="0">
+                <a:solidFill>
+                  <a:srgbClr val="222A30"/>
+                </a:solidFill>
+                <a:latin typeface="Calibri"/>
+              </a:rPr>
+              <a:t>Why this is a threshold and not a list of exclusions</a:t>
+            </a:r>
+          </a:p>
+          <a:p>
+            <a:pPr algn="l">
+              <a:lnSpc>
+                <a:spcPct val="140000"/>
+              </a:lnSpc>
+            </a:pPr>
+            <a:r>
+              <a:rPr sz="1350" b="0" i="0">
+                <a:solidFill>
+                  <a:srgbClr val="222A30"/>
+                </a:solidFill>
+                <a:latin typeface="Calibri"/>
+              </a:rPr>
+              <a:t>Writing down which lineages to drop AFTER seeing the corpus is selection on the outcome. A threshold is a property of sampling,</a:t>
+            </a:r>
+          </a:p>
+          <a:p>
+            <a:pPr algn="l">
+              <a:lnSpc>
+                <a:spcPct val="140000"/>
+              </a:lnSpc>
+            </a:pPr>
+            <a:r>
+              <a:rPr sz="1350" b="0" i="0">
+                <a:solidFill>
+                  <a:srgbClr val="222A30"/>
+                </a:solidFill>
+                <a:latin typeface="Calibri"/>
+              </a:rPr>
+              <a:t>knowable before any test runs, and it lives in the config — so a run stays fully described by (commit, config, accession list).</a:t>
+            </a:r>
+          </a:p>
+        </p:txBody>
+      </p:sp>
+      <p:sp>
+        <p:nvSpPr>
+          <p:cNvPr id="24" name="TextBox 23"/>
           <p:cNvSpPr txBox="1"/>
           <p:nvPr/>
         </p:nvSpPr>
@@ -10907,14 +13763,14 @@
                 </a:solidFill>
                 <a:latin typeface="Calibri"/>
               </a:rPr>
-              <a:t>Counted from config/*.yaml and the aligned FASTA on disk by overview_assets/make_figures.py</a:t>
-            </a:r>
-          </a:p>
-        </p:txBody>
-      </p:sp>
-      <p:sp>
-        <p:nvSpPr>
-          <p:cNvPr id="9" name="TextBox 8"/>
+              <a:t>g4watch/validation/minimum_data_gate.py — thresholds from Build Architecture Appendix C</a:t>
+            </a:r>
+          </a:p>
+        </p:txBody>
+      </p:sp>
+      <p:sp>
+        <p:nvSpPr>
+          <p:cNvPr id="25" name="TextBox 24"/>
           <p:cNvSpPr txBox="1"/>
           <p:nvPr/>
         </p:nvSpPr>
@@ -11055,7 +13911,7 @@
                 </a:solidFill>
                 <a:latin typeface="Calibri"/>
               </a:rPr>
-              <a:t>RESULT 1</a:t>
+              <a:t>WHAT IT WAS RUN ON</a:t>
             </a:r>
           </a:p>
         </p:txBody>
@@ -11094,7 +13950,7 @@
                 </a:solidFill>
                 <a:latin typeface="Calibri"/>
               </a:rPr>
-              <a:t>The Atlas: plenty of predictions, little evidence</a:t>
+              <a:t>Eleven pathogens, real GenBank corpora</a:t>
             </a:r>
           </a:p>
         </p:txBody>
@@ -11145,7 +14001,7 @@
       </p:sp>
       <p:pic>
         <p:nvPicPr>
-          <p:cNvPr id="6" name="Picture 5" descr="fig_atlas.png"/>
+          <p:cNvPr id="6" name="Picture 5" descr="fig_corpus.png"/>
           <p:cNvPicPr>
             <a:picLocks noChangeAspect="1"/>
           </p:cNvPicPr>
@@ -11159,8 +14015,8 @@
         </p:blipFill>
         <p:spPr>
           <a:xfrm>
-            <a:off x="1527048" y="1261872"/>
-            <a:ext cx="9144000" cy="3965374"/>
+            <a:off x="1527048" y="1280160"/>
+            <a:ext cx="9144000" cy="3938740"/>
           </a:xfrm>
           <a:prstGeom prst="rect">
             <a:avLst/>
@@ -11201,7 +14057,7 @@
                 </a:solidFill>
                 <a:latin typeface="Calibri"/>
               </a:rPr>
-              <a:t>Prediction is cheap; evidence is not. A locus reaches SC only when its conservation across phylogenetically independent lineages</a:t>
+              <a:t>Ten livestock viruses across four genome types — positive- and negative-sense RNA, segmented dsRNA, and large dsDNA — plus</a:t>
             </a:r>
           </a:p>
           <a:p>
@@ -11217,7 +14073,7 @@
                 </a:solidFill>
                 <a:latin typeface="Calibri"/>
               </a:rPr>
-              <a:t>supports it, and that conservation is computed from the alignment — deliberately NOT from the disruption rate, which would make</a:t>
+              <a:t>Epstein–Barr virus as a cross-species check on a GC-rich human herpesvirus. No synthetic sequence appears in any of these counts; the</a:t>
             </a:r>
           </a:p>
           <a:p>
@@ -11233,7 +14089,7 @@
                 </a:solidFill>
                 <a:latin typeface="Calibri"/>
               </a:rPr>
-              <a:t>eligibility restate the very outcome D.H1 is meant to test.</a:t>
+              <a:t>synthetic datasets used to test the software live separately under data/synthetic/ and are prefixed SYNTH-.</a:t>
             </a:r>
           </a:p>
         </p:txBody>
@@ -11272,7 +14128,7 @@
                 </a:solidFill>
                 <a:latin typeface="Calibri"/>
               </a:rPr>
-              <a:t>Tiers: EC / BC / SC / MC / WC / AA. Scoring eligibility is SC and above</a:t>
+              <a:t>Counted from config/*.yaml and the aligned FASTA on disk by overview_assets/make_figures.py</a:t>
             </a:r>
           </a:p>
         </p:txBody>
@@ -11420,7 +14276,7 @@
                 </a:solidFill>
                 <a:latin typeface="Calibri"/>
               </a:rPr>
-              <a:t>RESULT 2</a:t>
+              <a:t>RESULT 1</a:t>
             </a:r>
           </a:p>
         </p:txBody>
@@ -11459,7 +14315,7 @@
                 </a:solidFill>
                 <a:latin typeface="Calibri"/>
               </a:rPr>
-              <a:t>The D.H1 test on its best-powered corpus</a:t>
+              <a:t>The Atlas: plenty of predictions, little evidence</a:t>
             </a:r>
           </a:p>
         </p:txBody>
@@ -11479,7 +14335,7 @@
             <a:avLst/>
           </a:prstGeom>
           <a:solidFill>
-            <a:srgbClr val="C0392B"/>
+            <a:srgbClr val="1F8A70"/>
           </a:solidFill>
           <a:ln>
             <a:noFill/>
@@ -11510,7 +14366,7 @@
       </p:sp>
       <p:pic>
         <p:nvPicPr>
-          <p:cNvPr id="6" name="Picture 5" descr="fig_dh1.png"/>
+          <p:cNvPr id="6" name="Picture 5" descr="fig_atlas.png"/>
           <p:cNvPicPr>
             <a:picLocks noChangeAspect="1"/>
           </p:cNvPicPr>
@@ -11524,8 +14380,8 @@
         </p:blipFill>
         <p:spPr>
           <a:xfrm>
-            <a:off x="685800" y="1188720"/>
-            <a:ext cx="4892040" cy="4587021"/>
+            <a:off x="1527048" y="1261872"/>
+            <a:ext cx="9144000" cy="3965374"/>
           </a:xfrm>
           <a:prstGeom prst="rect">
             <a:avLst/>
@@ -11540,112 +14396,65 @@
         </p:nvSpPr>
         <p:spPr>
           <a:xfrm>
-            <a:off x="6172200" y="1463040"/>
-            <a:ext cx="5532120" cy="4572000"/>
-          </a:xfrm>
-          <a:prstGeom prst="rect">
-            <a:avLst/>
-          </a:prstGeom>
-          <a:noFill/>
-        </p:spPr>
-        <p:txBody>
-          <a:bodyPr wrap="square" lIns="0" rIns="0" tIns="0" bIns="0">
-            <a:spAutoFit/>
-          </a:bodyPr>
-          <a:lstStyle/>
-          <a:p>
-            <a:pPr>
-              <a:lnSpc>
-                <a:spcPct val="108000"/>
-              </a:lnSpc>
-              <a:spcAft>
-                <a:spcPts val="1600"/>
-              </a:spcAft>
-            </a:pPr>
-            <a:r>
-              <a:rPr sz="1450" b="0" i="0">
-                <a:solidFill>
-                  <a:srgbClr val="222A30"/>
-                </a:solidFill>
-                <a:latin typeface="Calibri"/>
-              </a:rPr>
-              <a:t>▪  37 loci were tested on FMDV2026 (936 genomes, the deepest corpus here). 19 did not clear the data floor.</a:t>
-            </a:r>
-          </a:p>
-          <a:p>
-            <a:pPr>
-              <a:lnSpc>
-                <a:spcPct val="108000"/>
-              </a:lnSpc>
-              <a:spcAft>
-                <a:spcPts val="1600"/>
-              </a:spcAft>
-            </a:pPr>
-            <a:r>
-              <a:rPr sz="1450" b="0" i="0">
-                <a:solidFill>
-                  <a:srgbClr val="222A30"/>
-                </a:solidFill>
-                <a:latin typeface="Calibri"/>
-              </a:rPr>
-              <a:t>▪  Of the 18 that did: 15 NOT_SUPPORTED, 2 explained by GC, 1 significant in the opposite direction.</a:t>
-            </a:r>
-          </a:p>
-          <a:p>
-            <a:pPr>
-              <a:lnSpc>
-                <a:spcPct val="108000"/>
-              </a:lnSpc>
-              <a:spcAft>
-                <a:spcPts val="1600"/>
-              </a:spcAft>
-            </a:pPr>
-            <a:r>
-              <a:rPr sz="1900" b="1" i="0">
-                <a:solidFill>
-                  <a:srgbClr val="C0392B"/>
-                </a:solidFill>
-                <a:latin typeface="Calibri"/>
-              </a:rPr>
-              <a:t>▪  Zero SUPPORTED.</a:t>
-            </a:r>
-          </a:p>
-          <a:p>
-            <a:pPr>
-              <a:lnSpc>
-                <a:spcPct val="108000"/>
-              </a:lnSpc>
-              <a:spcAft>
-                <a:spcPts val="1600"/>
-              </a:spcAft>
-            </a:pPr>
-            <a:r>
-              <a:rPr sz="1450" b="0" i="0">
-                <a:solidFill>
-                  <a:srgbClr val="222A30"/>
-                </a:solidFill>
-                <a:latin typeface="Calibri"/>
-              </a:rPr>
-              <a:t>▪  Most loci do sit below the diagonal — the direction D.H1 predicts — but none of those differences survive GC adjustment and FDR correction. A trend that does not reach significance is not a finding.</a:t>
-            </a:r>
-          </a:p>
-          <a:p>
-            <a:pPr>
-              <a:lnSpc>
-                <a:spcPct val="108000"/>
-              </a:lnSpc>
-              <a:spcAft>
-                <a:spcPts val="1600"/>
-              </a:spcAft>
-            </a:pPr>
-            <a:r>
-              <a:rPr sz="1450" b="0" i="0">
-                <a:solidFill>
-                  <a:srgbClr val="C0392B"/>
-                </a:solidFill>
-                <a:latin typeface="Calibri"/>
-              </a:rPr>
-              <a:t>▪  The one locus that IS significant sits above the diagonal: more disrupted than its controls, not less.</a:t>
+            <a:off x="502920" y="5440680"/>
+            <a:ext cx="11155680" cy="914400"/>
+          </a:xfrm>
+          <a:prstGeom prst="rect">
+            <a:avLst/>
+          </a:prstGeom>
+          <a:noFill/>
+        </p:spPr>
+        <p:txBody>
+          <a:bodyPr wrap="square" anchor="t" lIns="0" rIns="0" tIns="0" bIns="0">
+            <a:spAutoFit/>
+          </a:bodyPr>
+          <a:lstStyle/>
+          <a:p>
+            <a:pPr algn="l">
+              <a:lnSpc>
+                <a:spcPct val="135000"/>
+              </a:lnSpc>
+            </a:pPr>
+            <a:r>
+              <a:rPr sz="1250" b="0" i="0">
+                <a:solidFill>
+                  <a:srgbClr val="5A6670"/>
+                </a:solidFill>
+                <a:latin typeface="Calibri"/>
+              </a:rPr>
+              <a:t>Prediction is cheap; evidence is not. A locus reaches SC only when its conservation across phylogenetically independent lineages</a:t>
+            </a:r>
+          </a:p>
+          <a:p>
+            <a:pPr algn="l">
+              <a:lnSpc>
+                <a:spcPct val="135000"/>
+              </a:lnSpc>
+            </a:pPr>
+            <a:r>
+              <a:rPr sz="1250" b="0" i="0">
+                <a:solidFill>
+                  <a:srgbClr val="5A6670"/>
+                </a:solidFill>
+                <a:latin typeface="Calibri"/>
+              </a:rPr>
+              <a:t>supports it, and that conservation is computed from the alignment — deliberately NOT from the disruption rate, which would make</a:t>
+            </a:r>
+          </a:p>
+          <a:p>
+            <a:pPr algn="l">
+              <a:lnSpc>
+                <a:spcPct val="135000"/>
+              </a:lnSpc>
+            </a:pPr>
+            <a:r>
+              <a:rPr sz="1250" b="0" i="0">
+                <a:solidFill>
+                  <a:srgbClr val="5A6670"/>
+                </a:solidFill>
+                <a:latin typeface="Calibri"/>
+              </a:rPr>
+              <a:t>eligibility restate the very outcome D.H1 is meant to test.</a:t>
             </a:r>
           </a:p>
         </p:txBody>
@@ -11684,7 +14493,7 @@
                 </a:solidFill>
                 <a:latin typeface="Calibri"/>
               </a:rPr>
-              <a:t>data/atlases/testing_ledger.tsv, latest run per pathogen. q = Benjamini-Hochberg adjusted p</a:t>
+              <a:t>Tiers: EC / BC / SC / MC / WC / AA. Scoring eligibility is SC and above</a:t>
             </a:r>
           </a:p>
         </p:txBody>
@@ -11832,7 +14641,7 @@
                 </a:solidFill>
                 <a:latin typeface="Calibri"/>
               </a:rPr>
-              <a:t>RESULT 3</a:t>
+              <a:t>RESULT 2</a:t>
             </a:r>
           </a:p>
         </p:txBody>
@@ -11871,7 +14680,7 @@
                 </a:solidFill>
                 <a:latin typeface="Calibri"/>
               </a:rPr>
-              <a:t>The one locus that moved — and it moved the wrong way</a:t>
+              <a:t>The D.H1 test on its best-powered corpus</a:t>
             </a:r>
           </a:p>
         </p:txBody>
@@ -11920,52 +14729,30 @@
           </a:p>
         </p:txBody>
       </p:sp>
-      <p:sp>
-        <p:nvSpPr>
-          <p:cNvPr id="6" name="Rectangle 5"/>
-          <p:cNvSpPr/>
-          <p:nvPr/>
-        </p:nvSpPr>
-        <p:spPr>
-          <a:xfrm>
-            <a:off x="502920" y="1280160"/>
-            <a:ext cx="11201400" cy="1170432"/>
-          </a:xfrm>
-          <a:prstGeom prst="rect">
-            <a:avLst/>
-          </a:prstGeom>
-          <a:solidFill>
-            <a:srgbClr val="EEF1F3"/>
-          </a:solidFill>
-          <a:ln w="12700">
-            <a:solidFill>
-              <a:srgbClr val="CED8DE"/>
-            </a:solidFill>
-          </a:ln>
-          <a:effectLst/>
-        </p:spPr>
-        <p:style>
-          <a:lnRef idx="1">
-            <a:schemeClr val="accent1"/>
-          </a:lnRef>
-          <a:fillRef idx="3">
-            <a:schemeClr val="accent1"/>
-          </a:fillRef>
-          <a:effectRef idx="2">
-            <a:schemeClr val="accent1"/>
-          </a:effectRef>
-          <a:fontRef idx="minor">
-            <a:schemeClr val="lt1"/>
-          </a:fontRef>
-        </p:style>
-        <p:txBody>
-          <a:bodyPr rtlCol="0" anchor="ctr"/>
-          <a:lstStyle/>
-          <a:p>
-            <a:pPr algn="ctr"/>
-          </a:p>
-        </p:txBody>
-      </p:sp>
+      <p:pic>
+        <p:nvPicPr>
+          <p:cNvPr id="6" name="Picture 5" descr="fig_dh1.png"/>
+          <p:cNvPicPr>
+            <a:picLocks noChangeAspect="1"/>
+          </p:cNvPicPr>
+          <p:nvPr/>
+        </p:nvPicPr>
+        <p:blipFill>
+          <a:blip r:embed="rId2"/>
+          <a:stretch>
+            <a:fillRect/>
+          </a:stretch>
+        </p:blipFill>
+        <p:spPr>
+          <a:xfrm>
+            <a:off x="685800" y="1188720"/>
+            <a:ext cx="4892040" cy="4587021"/>
+          </a:xfrm>
+          <a:prstGeom prst="rect">
+            <a:avLst/>
+          </a:prstGeom>
+        </p:spPr>
+      </p:pic>
       <p:sp>
         <p:nvSpPr>
           <p:cNvPr id="7" name="TextBox 6"/>
@@ -11974,33 +14761,112 @@
         </p:nvSpPr>
         <p:spPr>
           <a:xfrm>
-            <a:off x="822960" y="1463040"/>
-            <a:ext cx="5120640" cy="457200"/>
-          </a:xfrm>
-          <a:prstGeom prst="rect">
-            <a:avLst/>
-          </a:prstGeom>
-          <a:noFill/>
-        </p:spPr>
-        <p:txBody>
-          <a:bodyPr wrap="square" anchor="t" lIns="0" rIns="0" tIns="0" bIns="0">
-            <a:spAutoFit/>
-          </a:bodyPr>
-          <a:lstStyle/>
-          <a:p>
-            <a:pPr algn="l">
-              <a:lnSpc>
-                <a:spcPct val="100000"/>
-              </a:lnSpc>
-            </a:pPr>
-            <a:r>
-              <a:rPr sz="2400" b="1" i="0">
+            <a:off x="6172200" y="1463040"/>
+            <a:ext cx="5532120" cy="4572000"/>
+          </a:xfrm>
+          <a:prstGeom prst="rect">
+            <a:avLst/>
+          </a:prstGeom>
+          <a:noFill/>
+        </p:spPr>
+        <p:txBody>
+          <a:bodyPr wrap="square" lIns="0" rIns="0" tIns="0" bIns="0">
+            <a:spAutoFit/>
+          </a:bodyPr>
+          <a:lstStyle/>
+          <a:p>
+            <a:pPr>
+              <a:lnSpc>
+                <a:spcPct val="108000"/>
+              </a:lnSpc>
+              <a:spcAft>
+                <a:spcPts val="1600"/>
+              </a:spcAft>
+            </a:pPr>
+            <a:r>
+              <a:rPr sz="1450" b="0" i="0">
+                <a:solidFill>
+                  <a:srgbClr val="222A30"/>
+                </a:solidFill>
+                <a:latin typeface="Calibri"/>
+              </a:rPr>
+              <a:t>▪  37 loci were tested on FMDV2026 (936 genomes, the deepest corpus here). 19 did not clear the data floor.</a:t>
+            </a:r>
+          </a:p>
+          <a:p>
+            <a:pPr>
+              <a:lnSpc>
+                <a:spcPct val="108000"/>
+              </a:lnSpc>
+              <a:spcAft>
+                <a:spcPts val="1600"/>
+              </a:spcAft>
+            </a:pPr>
+            <a:r>
+              <a:rPr sz="1450" b="0" i="0">
+                <a:solidFill>
+                  <a:srgbClr val="222A30"/>
+                </a:solidFill>
+                <a:latin typeface="Calibri"/>
+              </a:rPr>
+              <a:t>▪  Of the 18 that did: 15 NOT_SUPPORTED, 2 explained by GC, 1 significant in the opposite direction.</a:t>
+            </a:r>
+          </a:p>
+          <a:p>
+            <a:pPr>
+              <a:lnSpc>
+                <a:spcPct val="108000"/>
+              </a:lnSpc>
+              <a:spcAft>
+                <a:spcPts val="1600"/>
+              </a:spcAft>
+            </a:pPr>
+            <a:r>
+              <a:rPr sz="1900" b="1" i="0">
                 <a:solidFill>
                   <a:srgbClr val="C0392B"/>
                 </a:solidFill>
-                <a:latin typeface="Consolas"/>
-              </a:rPr>
-              <a:t>FMDV2026-G4-004</a:t>
+                <a:latin typeface="Calibri"/>
+              </a:rPr>
+              <a:t>▪  Zero SUPPORTED.</a:t>
+            </a:r>
+          </a:p>
+          <a:p>
+            <a:pPr>
+              <a:lnSpc>
+                <a:spcPct val="108000"/>
+              </a:lnSpc>
+              <a:spcAft>
+                <a:spcPts val="1600"/>
+              </a:spcAft>
+            </a:pPr>
+            <a:r>
+              <a:rPr sz="1450" b="0" i="0">
+                <a:solidFill>
+                  <a:srgbClr val="222A30"/>
+                </a:solidFill>
+                <a:latin typeface="Calibri"/>
+              </a:rPr>
+              <a:t>▪  Most loci do sit below the diagonal — the direction D.H1 predicts — but none of those differences survive GC adjustment and FDR correction. A trend that does not reach significance is not a finding.</a:t>
+            </a:r>
+          </a:p>
+          <a:p>
+            <a:pPr>
+              <a:lnSpc>
+                <a:spcPct val="108000"/>
+              </a:lnSpc>
+              <a:spcAft>
+                <a:spcPts val="1600"/>
+              </a:spcAft>
+            </a:pPr>
+            <a:r>
+              <a:rPr sz="1450" b="0" i="0">
+                <a:solidFill>
+                  <a:srgbClr val="C0392B"/>
+                </a:solidFill>
+                <a:latin typeface="Calibri"/>
+              </a:rPr>
+              <a:t>▪  The one locus that IS significant sits above the diagonal: more disrupted than its controls, not less.</a:t>
             </a:r>
           </a:p>
         </p:txBody>
@@ -12008,536 +14874,6 @@
       <p:sp>
         <p:nvSpPr>
           <p:cNvPr id="8" name="TextBox 7"/>
-          <p:cNvSpPr txBox="1"/>
-          <p:nvPr/>
-        </p:nvSpPr>
-        <p:spPr>
-          <a:xfrm>
-            <a:off x="822960" y="1920240"/>
-            <a:ext cx="5486400" cy="411480"/>
-          </a:xfrm>
-          <a:prstGeom prst="rect">
-            <a:avLst/>
-          </a:prstGeom>
-          <a:noFill/>
-        </p:spPr>
-        <p:txBody>
-          <a:bodyPr wrap="square" anchor="t" lIns="0" rIns="0" tIns="0" bIns="0">
-            <a:spAutoFit/>
-          </a:bodyPr>
-          <a:lstStyle/>
-          <a:p>
-            <a:pPr algn="l">
-              <a:lnSpc>
-                <a:spcPct val="100000"/>
-              </a:lnSpc>
-            </a:pPr>
-            <a:r>
-              <a:rPr sz="1350" b="0" i="0">
-                <a:solidFill>
-                  <a:srgbClr val="5A6670"/>
-                </a:solidFill>
-                <a:latin typeface="Consolas"/>
-              </a:rPr>
-              <a:t>nt 4313–4337  ·  CDS (polyprotein)  ·  RNA_G4</a:t>
-            </a:r>
-          </a:p>
-        </p:txBody>
-      </p:sp>
-      <p:sp>
-        <p:nvSpPr>
-          <p:cNvPr id="9" name="TextBox 8"/>
-          <p:cNvSpPr txBox="1"/>
-          <p:nvPr/>
-        </p:nvSpPr>
-        <p:spPr>
-          <a:xfrm>
-            <a:off x="6263640" y="1463040"/>
-            <a:ext cx="1691640" cy="566928"/>
-          </a:xfrm>
-          <a:prstGeom prst="rect">
-            <a:avLst/>
-          </a:prstGeom>
-          <a:noFill/>
-        </p:spPr>
-        <p:txBody>
-          <a:bodyPr wrap="square" anchor="t" lIns="0" rIns="0" tIns="0" bIns="0">
-            <a:spAutoFit/>
-          </a:bodyPr>
-          <a:lstStyle/>
-          <a:p>
-            <a:pPr algn="l">
-              <a:lnSpc>
-                <a:spcPct val="100000"/>
-              </a:lnSpc>
-            </a:pPr>
-            <a:r>
-              <a:rPr sz="3800" b="1" i="0">
-                <a:solidFill>
-                  <a:srgbClr val="C0392B"/>
-                </a:solidFill>
-                <a:latin typeface="Calibri"/>
-              </a:rPr>
-              <a:t>0.775</a:t>
-            </a:r>
-          </a:p>
-        </p:txBody>
-      </p:sp>
-      <p:sp>
-        <p:nvSpPr>
-          <p:cNvPr id="10" name="TextBox 9"/>
-          <p:cNvSpPr txBox="1"/>
-          <p:nvPr/>
-        </p:nvSpPr>
-        <p:spPr>
-          <a:xfrm>
-            <a:off x="6263640" y="2029968"/>
-            <a:ext cx="1691640" cy="457200"/>
-          </a:xfrm>
-          <a:prstGeom prst="rect">
-            <a:avLst/>
-          </a:prstGeom>
-          <a:noFill/>
-        </p:spPr>
-        <p:txBody>
-          <a:bodyPr wrap="square" anchor="t" lIns="0" rIns="0" tIns="0" bIns="0">
-            <a:spAutoFit/>
-          </a:bodyPr>
-          <a:lstStyle/>
-          <a:p>
-            <a:pPr algn="l">
-              <a:lnSpc>
-                <a:spcPct val="100000"/>
-              </a:lnSpc>
-            </a:pPr>
-            <a:r>
-              <a:rPr sz="1150" b="0" i="0">
-                <a:solidFill>
-                  <a:srgbClr val="5A6670"/>
-                </a:solidFill>
-                <a:latin typeface="Calibri"/>
-              </a:rPr>
-              <a:t>disruption, locus</a:t>
-            </a:r>
-          </a:p>
-        </p:txBody>
-      </p:sp>
-      <p:sp>
-        <p:nvSpPr>
-          <p:cNvPr id="11" name="TextBox 10"/>
-          <p:cNvSpPr txBox="1"/>
-          <p:nvPr/>
-        </p:nvSpPr>
-        <p:spPr>
-          <a:xfrm>
-            <a:off x="8046720" y="1463040"/>
-            <a:ext cx="1691640" cy="566928"/>
-          </a:xfrm>
-          <a:prstGeom prst="rect">
-            <a:avLst/>
-          </a:prstGeom>
-          <a:noFill/>
-        </p:spPr>
-        <p:txBody>
-          <a:bodyPr wrap="square" anchor="t" lIns="0" rIns="0" tIns="0" bIns="0">
-            <a:spAutoFit/>
-          </a:bodyPr>
-          <a:lstStyle/>
-          <a:p>
-            <a:pPr algn="l">
-              <a:lnSpc>
-                <a:spcPct val="100000"/>
-              </a:lnSpc>
-            </a:pPr>
-            <a:r>
-              <a:rPr sz="3800" b="1" i="0">
-                <a:solidFill>
-                  <a:srgbClr val="1B3A5C"/>
-                </a:solidFill>
-                <a:latin typeface="Calibri"/>
-              </a:rPr>
-              <a:t>0.288</a:t>
-            </a:r>
-          </a:p>
-        </p:txBody>
-      </p:sp>
-      <p:sp>
-        <p:nvSpPr>
-          <p:cNvPr id="12" name="TextBox 11"/>
-          <p:cNvSpPr txBox="1"/>
-          <p:nvPr/>
-        </p:nvSpPr>
-        <p:spPr>
-          <a:xfrm>
-            <a:off x="8046720" y="2029968"/>
-            <a:ext cx="1691640" cy="457200"/>
-          </a:xfrm>
-          <a:prstGeom prst="rect">
-            <a:avLst/>
-          </a:prstGeom>
-          <a:noFill/>
-        </p:spPr>
-        <p:txBody>
-          <a:bodyPr wrap="square" anchor="t" lIns="0" rIns="0" tIns="0" bIns="0">
-            <a:spAutoFit/>
-          </a:bodyPr>
-          <a:lstStyle/>
-          <a:p>
-            <a:pPr algn="l">
-              <a:lnSpc>
-                <a:spcPct val="100000"/>
-              </a:lnSpc>
-            </a:pPr>
-            <a:r>
-              <a:rPr sz="1150" b="0" i="0">
-                <a:solidFill>
-                  <a:srgbClr val="5A6670"/>
-                </a:solidFill>
-                <a:latin typeface="Calibri"/>
-              </a:rPr>
-              <a:t>disruption, controls</a:t>
-            </a:r>
-          </a:p>
-        </p:txBody>
-      </p:sp>
-      <p:sp>
-        <p:nvSpPr>
-          <p:cNvPr id="13" name="TextBox 12"/>
-          <p:cNvSpPr txBox="1"/>
-          <p:nvPr/>
-        </p:nvSpPr>
-        <p:spPr>
-          <a:xfrm>
-            <a:off x="9829800" y="1481328"/>
-            <a:ext cx="1783080" cy="502920"/>
-          </a:xfrm>
-          <a:prstGeom prst="rect">
-            <a:avLst/>
-          </a:prstGeom>
-          <a:noFill/>
-        </p:spPr>
-        <p:txBody>
-          <a:bodyPr wrap="square" anchor="t" lIns="0" rIns="0" tIns="0" bIns="0">
-            <a:spAutoFit/>
-          </a:bodyPr>
-          <a:lstStyle/>
-          <a:p>
-            <a:pPr algn="l">
-              <a:lnSpc>
-                <a:spcPct val="100000"/>
-              </a:lnSpc>
-            </a:pPr>
-            <a:r>
-              <a:rPr sz="2700" b="1" i="0">
-                <a:solidFill>
-                  <a:srgbClr val="C0392B"/>
-                </a:solidFill>
-                <a:latin typeface="Calibri"/>
-              </a:rPr>
-              <a:t>1.08e-09</a:t>
-            </a:r>
-          </a:p>
-        </p:txBody>
-      </p:sp>
-      <p:sp>
-        <p:nvSpPr>
-          <p:cNvPr id="14" name="TextBox 13"/>
-          <p:cNvSpPr txBox="1"/>
-          <p:nvPr/>
-        </p:nvSpPr>
-        <p:spPr>
-          <a:xfrm>
-            <a:off x="9829800" y="1993392"/>
-            <a:ext cx="1828800" cy="457200"/>
-          </a:xfrm>
-          <a:prstGeom prst="rect">
-            <a:avLst/>
-          </a:prstGeom>
-          <a:noFill/>
-        </p:spPr>
-        <p:txBody>
-          <a:bodyPr wrap="square" anchor="t" lIns="0" rIns="0" tIns="0" bIns="0">
-            <a:spAutoFit/>
-          </a:bodyPr>
-          <a:lstStyle/>
-          <a:p>
-            <a:pPr algn="l">
-              <a:lnSpc>
-                <a:spcPct val="100000"/>
-              </a:lnSpc>
-            </a:pPr>
-            <a:r>
-              <a:rPr sz="1150" b="0" i="0">
-                <a:solidFill>
-                  <a:srgbClr val="5A6670"/>
-                </a:solidFill>
-                <a:latin typeface="Calibri"/>
-              </a:rPr>
-              <a:t>q, GC-adjusted + FDR</a:t>
-            </a:r>
-          </a:p>
-        </p:txBody>
-      </p:sp>
-      <p:sp>
-        <p:nvSpPr>
-          <p:cNvPr id="15" name="TextBox 14"/>
-          <p:cNvSpPr txBox="1"/>
-          <p:nvPr/>
-        </p:nvSpPr>
-        <p:spPr>
-          <a:xfrm>
-            <a:off x="502920" y="2788920"/>
-            <a:ext cx="5486400" cy="3291840"/>
-          </a:xfrm>
-          <a:prstGeom prst="rect">
-            <a:avLst/>
-          </a:prstGeom>
-          <a:noFill/>
-        </p:spPr>
-        <p:txBody>
-          <a:bodyPr wrap="square" lIns="0" rIns="0" tIns="0" bIns="0">
-            <a:spAutoFit/>
-          </a:bodyPr>
-          <a:lstStyle/>
-          <a:p>
-            <a:pPr>
-              <a:lnSpc>
-                <a:spcPct val="108000"/>
-              </a:lnSpc>
-              <a:spcAft>
-                <a:spcPts val="1500"/>
-              </a:spcAft>
-            </a:pPr>
-            <a:r>
-              <a:rPr sz="1400" b="0" i="0">
-                <a:solidFill>
-                  <a:srgbClr val="222A30"/>
-                </a:solidFill>
-                <a:latin typeface="Calibri"/>
-              </a:rPr>
-              <a:t>▪  Highly conserved: 94.86% across independent lineages — this is not a poorly aligned region.</a:t>
-            </a:r>
-          </a:p>
-          <a:p>
-            <a:pPr>
-              <a:lnSpc>
-                <a:spcPct val="108000"/>
-              </a:lnSpc>
-              <a:spcAft>
-                <a:spcPts val="1500"/>
-              </a:spcAft>
-            </a:pPr>
-            <a:r>
-              <a:rPr sz="1400" b="0" i="0">
-                <a:solidFill>
-                  <a:srgbClr val="222A30"/>
-                </a:solidFill>
-                <a:latin typeface="Calibri"/>
-              </a:rPr>
-              <a:t>▪  Not a GC artefact: flanking GC is 55.56%, and the signal STRENGTHENED when GC-matched controls were used.</a:t>
-            </a:r>
-          </a:p>
-          <a:p>
-            <a:pPr>
-              <a:lnSpc>
-                <a:spcPct val="108000"/>
-              </a:lnSpc>
-              <a:spcAft>
-                <a:spcPts val="1500"/>
-              </a:spcAft>
-            </a:pPr>
-            <a:r>
-              <a:rPr sz="1400" b="1" i="0">
-                <a:solidFill>
-                  <a:srgbClr val="1B3A5C"/>
-                </a:solidFill>
-                <a:latin typeface="Calibri"/>
-              </a:rPr>
-              <a:t>▪  Not a control artefact either. When control selection was rebuilt to stop it collapsing onto the genome's 5' end, p moved from 0.14 to 1.08e-09.</a:t>
-            </a:r>
-          </a:p>
-        </p:txBody>
-      </p:sp>
-      <p:sp>
-        <p:nvSpPr>
-          <p:cNvPr id="16" name="Rectangle 15"/>
-          <p:cNvSpPr/>
-          <p:nvPr/>
-        </p:nvSpPr>
-        <p:spPr>
-          <a:xfrm>
-            <a:off x="6309360" y="2788920"/>
-            <a:ext cx="5413248" cy="2148840"/>
-          </a:xfrm>
-          <a:prstGeom prst="rect">
-            <a:avLst/>
-          </a:prstGeom>
-          <a:solidFill>
-            <a:srgbClr val="1B3A5C"/>
-          </a:solidFill>
-          <a:ln>
-            <a:noFill/>
-          </a:ln>
-          <a:effectLst/>
-        </p:spPr>
-        <p:style>
-          <a:lnRef idx="1">
-            <a:schemeClr val="accent1"/>
-          </a:lnRef>
-          <a:fillRef idx="3">
-            <a:schemeClr val="accent1"/>
-          </a:fillRef>
-          <a:effectRef idx="2">
-            <a:schemeClr val="accent1"/>
-          </a:effectRef>
-          <a:fontRef idx="minor">
-            <a:schemeClr val="lt1"/>
-          </a:fontRef>
-        </p:style>
-        <p:txBody>
-          <a:bodyPr rtlCol="0" anchor="ctr"/>
-          <a:lstStyle/>
-          <a:p>
-            <a:pPr algn="ctr"/>
-          </a:p>
-        </p:txBody>
-      </p:sp>
-      <p:sp>
-        <p:nvSpPr>
-          <p:cNvPr id="17" name="TextBox 16"/>
-          <p:cNvSpPr txBox="1"/>
-          <p:nvPr/>
-        </p:nvSpPr>
-        <p:spPr>
-          <a:xfrm>
-            <a:off x="6583680" y="2999232"/>
-            <a:ext cx="4846320" cy="320040"/>
-          </a:xfrm>
-          <a:prstGeom prst="rect">
-            <a:avLst/>
-          </a:prstGeom>
-          <a:noFill/>
-        </p:spPr>
-        <p:txBody>
-          <a:bodyPr wrap="square" anchor="t" lIns="0" rIns="0" tIns="0" bIns="0">
-            <a:spAutoFit/>
-          </a:bodyPr>
-          <a:lstStyle/>
-          <a:p>
-            <a:pPr algn="l">
-              <a:lnSpc>
-                <a:spcPct val="100000"/>
-              </a:lnSpc>
-            </a:pPr>
-            <a:r>
-              <a:rPr sz="1150" b="1" i="0">
-                <a:solidFill>
-                  <a:srgbClr val="9FC7D8"/>
-                </a:solidFill>
-                <a:latin typeface="Calibri"/>
-              </a:rPr>
-              <a:t>THE CAVEAT THAT COMES WITH IT</a:t>
-            </a:r>
-          </a:p>
-        </p:txBody>
-      </p:sp>
-      <p:sp>
-        <p:nvSpPr>
-          <p:cNvPr id="18" name="TextBox 17"/>
-          <p:cNvSpPr txBox="1"/>
-          <p:nvPr/>
-        </p:nvSpPr>
-        <p:spPr>
-          <a:xfrm>
-            <a:off x="6583680" y="3383280"/>
-            <a:ext cx="4892040" cy="1463040"/>
-          </a:xfrm>
-          <a:prstGeom prst="rect">
-            <a:avLst/>
-          </a:prstGeom>
-          <a:noFill/>
-        </p:spPr>
-        <p:txBody>
-          <a:bodyPr wrap="square" anchor="t" lIns="0" rIns="0" tIns="0" bIns="0">
-            <a:spAutoFit/>
-          </a:bodyPr>
-          <a:lstStyle/>
-          <a:p>
-            <a:pPr algn="l">
-              <a:lnSpc>
-                <a:spcPct val="128000"/>
-              </a:lnSpc>
-            </a:pPr>
-            <a:r>
-              <a:rPr sz="1250" b="0" i="0">
-                <a:solidFill>
-                  <a:srgbClr val="FFFFFF"/>
-                </a:solidFill>
-                <a:latin typeface="Calibri"/>
-              </a:rPr>
-              <a:t>Disruption at this locus is strongly serotype-structured — Asia1 is nearly invariant (0.03) while SAT2 is completely diverged (1.00). The pathogen-level verdict pools lineages that behave very differently. Before this locus is interpreted biologically, D.H1 must be run per serotype.</a:t>
-            </a:r>
-          </a:p>
-        </p:txBody>
-      </p:sp>
-      <p:sp>
-        <p:nvSpPr>
-          <p:cNvPr id="19" name="TextBox 18"/>
-          <p:cNvSpPr txBox="1"/>
-          <p:nvPr/>
-        </p:nvSpPr>
-        <p:spPr>
-          <a:xfrm>
-            <a:off x="502920" y="5623560"/>
-            <a:ext cx="11155680" cy="685800"/>
-          </a:xfrm>
-          <a:prstGeom prst="rect">
-            <a:avLst/>
-          </a:prstGeom>
-          <a:noFill/>
-        </p:spPr>
-        <p:txBody>
-          <a:bodyPr wrap="square" anchor="t" lIns="0" rIns="0" tIns="0" bIns="0">
-            <a:spAutoFit/>
-          </a:bodyPr>
-          <a:lstStyle/>
-          <a:p>
-            <a:pPr algn="l">
-              <a:lnSpc>
-                <a:spcPct val="135000"/>
-              </a:lnSpc>
-            </a:pPr>
-            <a:r>
-              <a:rPr sz="1350" b="1" i="0">
-                <a:solidFill>
-                  <a:srgbClr val="222A30"/>
-                </a:solidFill>
-                <a:latin typeface="Calibri"/>
-              </a:rPr>
-              <a:t>Read plainly: at the one locus in this study with a decisive signal, G4 sites are MORE labile than matched controls, not less.</a:t>
-            </a:r>
-          </a:p>
-          <a:p>
-            <a:pPr algn="l">
-              <a:lnSpc>
-                <a:spcPct val="135000"/>
-              </a:lnSpc>
-            </a:pPr>
-            <a:r>
-              <a:rPr sz="1350" b="1" i="0">
-                <a:solidFill>
-                  <a:srgbClr val="222A30"/>
-                </a:solidFill>
-                <a:latin typeface="Calibri"/>
-              </a:rPr>
-              <a:t>That contradicts D.H1. It is a real measurement, and reporting it as anything else would be the only actual failure here.</a:t>
-            </a:r>
-          </a:p>
-        </p:txBody>
-      </p:sp>
-      <p:sp>
-        <p:nvSpPr>
-          <p:cNvPr id="20" name="TextBox 19"/>
           <p:cNvSpPr txBox="1"/>
           <p:nvPr/>
         </p:nvSpPr>
@@ -12569,14 +14905,14 @@
                 </a:solidFill>
                 <a:latin typeface="Calibri"/>
               </a:rPr>
-              <a:t>Serotype breakdown recorded in docs/revision_log.md; the superseded verdict is kept in the ledger, not overwritten</a:t>
-            </a:r>
-          </a:p>
-        </p:txBody>
-      </p:sp>
-      <p:sp>
-        <p:nvSpPr>
-          <p:cNvPr id="21" name="TextBox 20"/>
+              <a:t>data/atlases/testing_ledger.tsv, latest run per pathogen. q = Benjamini-Hochberg adjusted p</a:t>
+            </a:r>
+          </a:p>
+        </p:txBody>
+      </p:sp>
+      <p:sp>
+        <p:nvSpPr>
+          <p:cNvPr id="9" name="TextBox 8"/>
           <p:cNvSpPr txBox="1"/>
           <p:nvPr/>
         </p:nvSpPr>
